--- a/policy/proposal_005.pptx
+++ b/policy/proposal_005.pptx
@@ -2726,7 +2726,7 @@
     <p:bg>
       <p:bgPr>
         <a:solidFill>
-          <a:srgbClr val="0A0A0A"/>
+          <a:srgbClr val="F5F6F8"/>
         </a:solidFill>
       </p:bgPr>
     </p:bg>
@@ -2771,11 +2771,11 @@
             <a:r>
               <a:rPr lang="en-US" sz="1300" b="1" spc="300" kern="0" dirty="0">
                 <a:solidFill>
-                  <a:srgbClr val="D62828"/>
-                </a:solidFill>
-                <a:latin typeface="Arial" pitchFamily="34" charset="0"/>
-                <a:ea typeface="Arial" pitchFamily="34" charset="-122"/>
-                <a:cs typeface="Arial" pitchFamily="34" charset="-120"/>
+                  <a:srgbClr val="C8161D"/>
+                </a:solidFill>
+                <a:latin typeface="Arial" pitchFamily="34" charset="0"/>
+                <a:ea typeface="BIZ UDPGothic" pitchFamily="34" charset="-122"/>
+                <a:cs typeface="BIZ UDPGothic" pitchFamily="34" charset="-120"/>
               </a:rPr>
               <a:t>政策提言プラットフォーム　REBOOT JAPAN</a:t>
             </a:r>
@@ -2810,11 +2810,11 @@
             <a:r>
               <a:rPr lang="en-US" sz="2200" dirty="0">
                 <a:solidFill>
-                  <a:srgbClr val="CCCCCC"/>
-                </a:solidFill>
-                <a:latin typeface="Arial" pitchFamily="34" charset="0"/>
-                <a:ea typeface="Arial" pitchFamily="34" charset="-122"/>
-                <a:cs typeface="Arial" pitchFamily="34" charset="-120"/>
+                  <a:srgbClr val="2B2F36"/>
+                </a:solidFill>
+                <a:latin typeface="Arial" pitchFamily="34" charset="0"/>
+                <a:ea typeface="BIZ UDPGothic" pitchFamily="34" charset="-122"/>
+                <a:cs typeface="BIZ UDPGothic" pitchFamily="34" charset="-120"/>
               </a:rPr>
               <a:t>提言005</a:t>
             </a:r>
@@ -2852,11 +2852,11 @@
             <a:r>
               <a:rPr lang="en-US" sz="5000" b="1" dirty="0">
                 <a:solidFill>
-                  <a:srgbClr val="F5F5F0"/>
-                </a:solidFill>
-                <a:latin typeface="Arial" pitchFamily="34" charset="0"/>
-                <a:ea typeface="Arial" pitchFamily="34" charset="-122"/>
-                <a:cs typeface="Arial" pitchFamily="34" charset="-120"/>
+                  <a:srgbClr val="16181D"/>
+                </a:solidFill>
+                <a:latin typeface="Arial" pitchFamily="34" charset="0"/>
+                <a:ea typeface="BIZ UDPGothic" pitchFamily="34" charset="-122"/>
+                <a:cs typeface="BIZ UDPGothic" pitchFamily="34" charset="-120"/>
               </a:rPr>
               <a:t>「取られる税金」を</a:t>
             </a:r>
@@ -2872,11 +2872,11 @@
             <a:r>
               <a:rPr lang="en-US" sz="5000" b="1" dirty="0">
                 <a:solidFill>
-                  <a:srgbClr val="D62828"/>
-                </a:solidFill>
-                <a:latin typeface="Arial" pitchFamily="34" charset="0"/>
-                <a:ea typeface="Arial" pitchFamily="34" charset="-122"/>
-                <a:cs typeface="Arial" pitchFamily="34" charset="-120"/>
+                  <a:srgbClr val="C8161D"/>
+                </a:solidFill>
+                <a:latin typeface="Arial" pitchFamily="34" charset="0"/>
+                <a:ea typeface="BIZ UDPGothic" pitchFamily="34" charset="-122"/>
+                <a:cs typeface="BIZ UDPGothic" pitchFamily="34" charset="-120"/>
               </a:rPr>
               <a:t>「選べる投資」に</a:t>
             </a:r>
@@ -2911,11 +2911,11 @@
             <a:r>
               <a:rPr lang="en-US" sz="1600" dirty="0">
                 <a:solidFill>
-                  <a:srgbClr val="CCCCCC"/>
-                </a:solidFill>
-                <a:latin typeface="Arial" pitchFamily="34" charset="0"/>
-                <a:ea typeface="Arial" pitchFamily="34" charset="-122"/>
-                <a:cs typeface="Arial" pitchFamily="34" charset="-120"/>
+                  <a:srgbClr val="2B2F36"/>
+                </a:solidFill>
+                <a:latin typeface="Arial" pitchFamily="34" charset="0"/>
+                <a:ea typeface="BIZ UDPGothic" pitchFamily="34" charset="-122"/>
+                <a:cs typeface="BIZ UDPGothic" pitchFamily="34" charset="-120"/>
               </a:rPr>
               <a:t>公的機関への用途指定寄付制度</a:t>
             </a:r>
@@ -2940,7 +2940,7 @@
           <a:noFill/>
           <a:ln w="12700">
             <a:solidFill>
-              <a:srgbClr val="2E2E2E"/>
+              <a:srgbClr val="DDE0E6"/>
             </a:solidFill>
             <a:prstDash val="solid"/>
           </a:ln>
@@ -2973,11 +2973,11 @@
             <a:r>
               <a:rPr lang="en-US" sz="1200" dirty="0">
                 <a:solidFill>
-                  <a:srgbClr val="888888"/>
-                </a:solidFill>
-                <a:latin typeface="Arial" pitchFamily="34" charset="0"/>
-                <a:ea typeface="Arial" pitchFamily="34" charset="-122"/>
-                <a:cs typeface="Arial" pitchFamily="34" charset="-120"/>
+                  <a:srgbClr val="626875"/>
+                </a:solidFill>
+                <a:latin typeface="Arial" pitchFamily="34" charset="0"/>
+                <a:ea typeface="BIZ UDPGothic" pitchFamily="34" charset="-122"/>
+                <a:cs typeface="BIZ UDPGothic" pitchFamily="34" charset="-120"/>
               </a:rPr>
               <a:t>ふるさと納税は終わり。本物の「使い道を選ぶ」時代へ。</a:t>
             </a:r>
@@ -3025,7 +3025,7 @@
     <p:bg>
       <p:bgPr>
         <a:solidFill>
-          <a:srgbClr val="0A0A0A"/>
+          <a:srgbClr val="F5F6F8"/>
         </a:solidFill>
       </p:bgPr>
     </p:bg>
@@ -3070,11 +3070,11 @@
             <a:r>
               <a:rPr lang="en-US" sz="1200" b="1" spc="300" kern="0" dirty="0">
                 <a:solidFill>
-                  <a:srgbClr val="D62828"/>
-                </a:solidFill>
-                <a:latin typeface="Arial" pitchFamily="34" charset="0"/>
-                <a:ea typeface="Arial" pitchFamily="34" charset="-122"/>
-                <a:cs typeface="Arial" pitchFamily="34" charset="-120"/>
+                  <a:srgbClr val="C8161D"/>
+                </a:solidFill>
+                <a:latin typeface="Arial" pitchFamily="34" charset="0"/>
+                <a:ea typeface="BIZ UDPGothic" pitchFamily="34" charset="-122"/>
+                <a:cs typeface="BIZ UDPGothic" pitchFamily="34" charset="-120"/>
               </a:rPr>
               <a:t>3. 住民税の控除の仕組み</a:t>
             </a:r>
@@ -3109,11 +3109,11 @@
             <a:r>
               <a:rPr lang="en-US" sz="3000" b="1" dirty="0">
                 <a:solidFill>
-                  <a:srgbClr val="F5F5F0"/>
-                </a:solidFill>
-                <a:latin typeface="Arial" pitchFamily="34" charset="0"/>
-                <a:ea typeface="Arial" pitchFamily="34" charset="-122"/>
-                <a:cs typeface="Arial" pitchFamily="34" charset="-120"/>
+                  <a:srgbClr val="16181D"/>
+                </a:solidFill>
+                <a:latin typeface="Arial" pitchFamily="34" charset="0"/>
+                <a:ea typeface="BIZ UDPGothic" pitchFamily="34" charset="-122"/>
+                <a:cs typeface="BIZ UDPGothic" pitchFamily="34" charset="-120"/>
               </a:rPr>
               <a:t>住民税の50%まで控除、75%は地元の自治体へ</a:t>
             </a:r>
@@ -3148,11 +3148,11 @@
             <a:r>
               <a:rPr lang="en-US" sz="1000" dirty="0">
                 <a:solidFill>
-                  <a:srgbClr val="CCCCCC"/>
-                </a:solidFill>
-                <a:latin typeface="Arial" pitchFamily="34" charset="0"/>
-                <a:ea typeface="Arial" pitchFamily="34" charset="-122"/>
-                <a:cs typeface="Arial" pitchFamily="34" charset="-120"/>
+                  <a:srgbClr val="2B2F36"/>
+                </a:solidFill>
+                <a:latin typeface="Arial" pitchFamily="34" charset="0"/>
+                <a:ea typeface="BIZ UDPGothic" pitchFamily="34" charset="-122"/>
+                <a:cs typeface="BIZ UDPGothic" pitchFamily="34" charset="-120"/>
               </a:rPr>
               <a:t>10</a:t>
             </a:r>
@@ -3187,11 +3187,11 @@
             <a:r>
               <a:rPr lang="en-US" sz="900" dirty="0">
                 <a:solidFill>
-                  <a:srgbClr val="555555"/>
-                </a:solidFill>
-                <a:latin typeface="Arial" pitchFamily="34" charset="0"/>
-                <a:ea typeface="Arial" pitchFamily="34" charset="-122"/>
-                <a:cs typeface="Arial" pitchFamily="34" charset="-120"/>
+                  <a:srgbClr val="9AA0AA"/>
+                </a:solidFill>
+                <a:latin typeface="Arial" pitchFamily="34" charset="0"/>
+                <a:ea typeface="BIZ UDPGothic" pitchFamily="34" charset="-122"/>
+                <a:cs typeface="BIZ UDPGothic" pitchFamily="34" charset="-120"/>
               </a:rPr>
               <a:t>REBOOT JAPAN ── 提言005</a:t>
             </a:r>
@@ -3216,11 +3216,11 @@
             </a:avLst>
           </a:prstGeom>
           <a:solidFill>
-            <a:srgbClr val="1A1A1A"/>
+            <a:srgbClr val="FFFFFF"/>
           </a:solidFill>
           <a:ln w="12700">
             <a:solidFill>
-              <a:srgbClr val="2E2E2E"/>
+              <a:srgbClr val="DDE0E6"/>
             </a:solidFill>
             <a:prstDash val="solid"/>
           </a:ln>
@@ -3241,11 +3241,11 @@
             <a:avLst/>
           </a:prstGeom>
           <a:solidFill>
-            <a:srgbClr val="0A0A0A"/>
+            <a:srgbClr val="F5F6F8"/>
           </a:solidFill>
           <a:ln w="12700">
             <a:solidFill>
-              <a:srgbClr val="2E2E2E"/>
+              <a:srgbClr val="DDE0E6"/>
             </a:solidFill>
             <a:prstDash val="solid"/>
           </a:ln>
@@ -3305,11 +3305,11 @@
             <a:r>
               <a:rPr lang="en-US" sz="1500" b="1" dirty="0">
                 <a:solidFill>
-                  <a:srgbClr val="F5F5F0"/>
-                </a:solidFill>
-                <a:latin typeface="Arial" pitchFamily="34" charset="0"/>
-                <a:ea typeface="Arial" pitchFamily="34" charset="-122"/>
-                <a:cs typeface="Arial" pitchFamily="34" charset="-120"/>
+                  <a:srgbClr val="16181D"/>
+                </a:solidFill>
+                <a:latin typeface="Arial" pitchFamily="34" charset="0"/>
+                <a:ea typeface="BIZ UDPGothic" pitchFamily="34" charset="-122"/>
+                <a:cs typeface="BIZ UDPGothic" pitchFamily="34" charset="-120"/>
               </a:rPr>
               <a:t>住民税はフラットな税率（一律10%）なので、「差額」ではなく「50%まで」という上限方式を採用</a:t>
             </a:r>
@@ -3347,11 +3347,11 @@
             <a:r>
               <a:rPr lang="en-US" sz="1200" dirty="0">
                 <a:solidFill>
-                  <a:srgbClr val="CCCCCC"/>
-                </a:solidFill>
-                <a:latin typeface="Arial" pitchFamily="34" charset="0"/>
-                <a:ea typeface="Arial" pitchFamily="34" charset="-122"/>
-                <a:cs typeface="Arial" pitchFamily="34" charset="-120"/>
+                  <a:srgbClr val="2B2F36"/>
+                </a:solidFill>
+                <a:latin typeface="Arial" pitchFamily="34" charset="0"/>
+                <a:ea typeface="BIZ UDPGothic" pitchFamily="34" charset="-122"/>
+                <a:cs typeface="BIZ UDPGothic" pitchFamily="34" charset="-120"/>
               </a:rPr>
               <a:t>住民税の納税額のうち、50%を上限として寄付に使えます。</a:t>
             </a:r>
@@ -3386,11 +3386,11 @@
             <a:r>
               <a:rPr lang="en-US" sz="1500" b="1" dirty="0">
                 <a:solidFill>
-                  <a:srgbClr val="D62828"/>
-                </a:solidFill>
-                <a:latin typeface="Arial" pitchFamily="34" charset="0"/>
-                <a:ea typeface="Arial" pitchFamily="34" charset="-122"/>
-                <a:cs typeface="Arial" pitchFamily="34" charset="-120"/>
+                  <a:srgbClr val="C8161D"/>
+                </a:solidFill>
+                <a:latin typeface="Arial" pitchFamily="34" charset="0"/>
+                <a:ea typeface="BIZ UDPGothic" pitchFamily="34" charset="-122"/>
+                <a:cs typeface="BIZ UDPGothic" pitchFamily="34" charset="-120"/>
               </a:rPr>
               <a:t>75 : 25 ルール（住民税ならではの配分）</a:t>
             </a:r>
@@ -3415,11 +3415,11 @@
             </a:avLst>
           </a:prstGeom>
           <a:solidFill>
-            <a:srgbClr val="1A1A1A"/>
+            <a:srgbClr val="FFFFFF"/>
           </a:solidFill>
           <a:ln w="12700">
             <a:solidFill>
-              <a:srgbClr val="2E2E2E"/>
+              <a:srgbClr val="DDE0E6"/>
             </a:solidFill>
             <a:prstDash val="solid"/>
           </a:ln>
@@ -3440,7 +3440,7 @@
             <a:avLst/>
           </a:prstGeom>
           <a:solidFill>
-            <a:srgbClr val="1A3A1A"/>
+            <a:srgbClr val="E9EFF8"/>
           </a:solidFill>
           <a:ln/>
         </p:spPr>
@@ -3460,7 +3460,7 @@
             <a:avLst/>
           </a:prstGeom>
           <a:solidFill>
-            <a:srgbClr val="A01F1F"/>
+            <a:srgbClr val="9E1016"/>
           </a:solidFill>
           <a:ln/>
         </p:spPr>
@@ -3492,11 +3492,11 @@
             <a:r>
               <a:rPr lang="en-US" sz="1200" b="1" dirty="0">
                 <a:solidFill>
-                  <a:srgbClr val="88CC88"/>
-                </a:solidFill>
-                <a:latin typeface="Arial" pitchFamily="34" charset="0"/>
-                <a:ea typeface="Arial" pitchFamily="34" charset="-122"/>
-                <a:cs typeface="Arial" pitchFamily="34" charset="-120"/>
+                  <a:srgbClr val="3A6AAE"/>
+                </a:solidFill>
+                <a:latin typeface="Arial" pitchFamily="34" charset="0"/>
+                <a:ea typeface="BIZ UDPGothic" pitchFamily="34" charset="-122"/>
+                <a:cs typeface="BIZ UDPGothic" pitchFamily="34" charset="-120"/>
               </a:rPr>
               <a:t>75%　居住する自治体へ（地元の財源を守る）</a:t>
             </a:r>
@@ -3531,11 +3531,11 @@
             <a:r>
               <a:rPr lang="en-US" sz="1200" b="1" dirty="0">
                 <a:solidFill>
-                  <a:srgbClr val="F5F5F0"/>
-                </a:solidFill>
-                <a:latin typeface="Arial" pitchFamily="34" charset="0"/>
-                <a:ea typeface="Arial" pitchFamily="34" charset="-122"/>
-                <a:cs typeface="Arial" pitchFamily="34" charset="-120"/>
+                  <a:srgbClr val="FFFFFF"/>
+                </a:solidFill>
+                <a:latin typeface="Arial" pitchFamily="34" charset="0"/>
+                <a:ea typeface="BIZ UDPGothic" pitchFamily="34" charset="-122"/>
+                <a:cs typeface="BIZ UDPGothic" pitchFamily="34" charset="-120"/>
               </a:rPr>
               <a:t>25%　自由指定</a:t>
             </a:r>
@@ -3570,11 +3570,11 @@
             <a:r>
               <a:rPr lang="en-US" sz="1200" dirty="0">
                 <a:solidFill>
-                  <a:srgbClr val="CCCCCC"/>
-                </a:solidFill>
-                <a:latin typeface="Arial" pitchFamily="34" charset="0"/>
-                <a:ea typeface="Arial" pitchFamily="34" charset="-122"/>
-                <a:cs typeface="Arial" pitchFamily="34" charset="-120"/>
+                  <a:srgbClr val="2B2F36"/>
+                </a:solidFill>
+                <a:latin typeface="Arial" pitchFamily="34" charset="0"/>
+                <a:ea typeface="BIZ UDPGothic" pitchFamily="34" charset="-122"/>
+                <a:cs typeface="BIZ UDPGothic" pitchFamily="34" charset="-120"/>
               </a:rPr>
               <a:t>ふるさと納税の最大の欠陥（都市部の税収が丸ごと流出）を、この75:25ルールで是正します。</a:t>
             </a:r>
@@ -3596,7 +3596,7 @@
     <p:bg>
       <p:bgPr>
         <a:solidFill>
-          <a:srgbClr val="0A0A0A"/>
+          <a:srgbClr val="F5F6F8"/>
         </a:solidFill>
       </p:bgPr>
     </p:bg>
@@ -3641,11 +3641,11 @@
             <a:r>
               <a:rPr lang="en-US" sz="1200" b="1" spc="300" kern="0" dirty="0">
                 <a:solidFill>
-                  <a:srgbClr val="D62828"/>
-                </a:solidFill>
-                <a:latin typeface="Arial" pitchFamily="34" charset="0"/>
-                <a:ea typeface="Arial" pitchFamily="34" charset="-122"/>
-                <a:cs typeface="Arial" pitchFamily="34" charset="-120"/>
+                  <a:srgbClr val="C8161D"/>
+                </a:solidFill>
+                <a:latin typeface="Arial" pitchFamily="34" charset="0"/>
+                <a:ea typeface="BIZ UDPGothic" pitchFamily="34" charset="-122"/>
+                <a:cs typeface="BIZ UDPGothic" pitchFamily="34" charset="-120"/>
               </a:rPr>
               <a:t>3. 消費税の控除の仕組み</a:t>
             </a:r>
@@ -3680,11 +3680,11 @@
             <a:r>
               <a:rPr lang="en-US" sz="3000" b="1" dirty="0">
                 <a:solidFill>
-                  <a:srgbClr val="F5F5F0"/>
-                </a:solidFill>
-                <a:latin typeface="Arial" pitchFamily="34" charset="0"/>
-                <a:ea typeface="Arial" pitchFamily="34" charset="-122"/>
-                <a:cs typeface="Arial" pitchFamily="34" charset="-120"/>
+                  <a:srgbClr val="16181D"/>
+                </a:solidFill>
+                <a:latin typeface="Arial" pitchFamily="34" charset="0"/>
+                <a:ea typeface="BIZ UDPGothic" pitchFamily="34" charset="-122"/>
+                <a:cs typeface="BIZ UDPGothic" pitchFamily="34" charset="-120"/>
               </a:rPr>
               <a:t>10万円超の買い物の消費税が、寄付に使える</a:t>
             </a:r>
@@ -3719,11 +3719,11 @@
             <a:r>
               <a:rPr lang="en-US" sz="1000" dirty="0">
                 <a:solidFill>
-                  <a:srgbClr val="CCCCCC"/>
-                </a:solidFill>
-                <a:latin typeface="Arial" pitchFamily="34" charset="0"/>
-                <a:ea typeface="Arial" pitchFamily="34" charset="-122"/>
-                <a:cs typeface="Arial" pitchFamily="34" charset="-120"/>
+                  <a:srgbClr val="2B2F36"/>
+                </a:solidFill>
+                <a:latin typeface="Arial" pitchFamily="34" charset="0"/>
+                <a:ea typeface="BIZ UDPGothic" pitchFamily="34" charset="-122"/>
+                <a:cs typeface="BIZ UDPGothic" pitchFamily="34" charset="-120"/>
               </a:rPr>
               <a:t>11</a:t>
             </a:r>
@@ -3758,11 +3758,11 @@
             <a:r>
               <a:rPr lang="en-US" sz="900" dirty="0">
                 <a:solidFill>
-                  <a:srgbClr val="555555"/>
-                </a:solidFill>
-                <a:latin typeface="Arial" pitchFamily="34" charset="0"/>
-                <a:ea typeface="Arial" pitchFamily="34" charset="-122"/>
-                <a:cs typeface="Arial" pitchFamily="34" charset="-120"/>
+                  <a:srgbClr val="9AA0AA"/>
+                </a:solidFill>
+                <a:latin typeface="Arial" pitchFamily="34" charset="0"/>
+                <a:ea typeface="BIZ UDPGothic" pitchFamily="34" charset="-122"/>
+                <a:cs typeface="BIZ UDPGothic" pitchFamily="34" charset="-120"/>
               </a:rPr>
               <a:t>REBOOT JAPAN ── 提言005</a:t>
             </a:r>
@@ -3787,11 +3787,11 @@
             </a:avLst>
           </a:prstGeom>
           <a:solidFill>
-            <a:srgbClr val="1A1A1A"/>
+            <a:srgbClr val="FFFFFF"/>
           </a:solidFill>
           <a:ln w="12700">
             <a:solidFill>
-              <a:srgbClr val="2E2E2E"/>
+              <a:srgbClr val="DDE0E6"/>
             </a:solidFill>
             <a:prstDash val="solid"/>
           </a:ln>
@@ -3812,11 +3812,11 @@
             <a:avLst/>
           </a:prstGeom>
           <a:solidFill>
-            <a:srgbClr val="0A0A0A"/>
+            <a:srgbClr val="F5F6F8"/>
           </a:solidFill>
           <a:ln w="12700">
             <a:solidFill>
-              <a:srgbClr val="2E2E2E"/>
+              <a:srgbClr val="DDE0E6"/>
             </a:solidFill>
             <a:prstDash val="solid"/>
           </a:ln>
@@ -3876,11 +3876,11 @@
             <a:r>
               <a:rPr lang="en-US" sz="1500" b="1" dirty="0">
                 <a:solidFill>
-                  <a:srgbClr val="F5F5F0"/>
-                </a:solidFill>
-                <a:latin typeface="Arial" pitchFamily="34" charset="0"/>
-                <a:ea typeface="Arial" pitchFamily="34" charset="-122"/>
-                <a:cs typeface="Arial" pitchFamily="34" charset="-120"/>
+                  <a:srgbClr val="16181D"/>
+                </a:solidFill>
+                <a:latin typeface="Arial" pitchFamily="34" charset="0"/>
+                <a:ea typeface="BIZ UDPGothic" pitchFamily="34" charset="-122"/>
+                <a:cs typeface="BIZ UDPGothic" pitchFamily="34" charset="-120"/>
               </a:rPr>
               <a:t>なぜ10万円超なのか</a:t>
             </a:r>
@@ -3918,11 +3918,11 @@
             <a:r>
               <a:rPr lang="en-US" sz="1200" dirty="0">
                 <a:solidFill>
-                  <a:srgbClr val="CCCCCC"/>
-                </a:solidFill>
-                <a:latin typeface="Arial" pitchFamily="34" charset="0"/>
-                <a:ea typeface="Arial" pitchFamily="34" charset="-122"/>
-                <a:cs typeface="Arial" pitchFamily="34" charset="-120"/>
+                  <a:srgbClr val="2B2F36"/>
+                </a:solidFill>
+                <a:latin typeface="Arial" pitchFamily="34" charset="0"/>
+                <a:ea typeface="BIZ UDPGothic" pitchFamily="34" charset="-122"/>
+                <a:cs typeface="BIZ UDPGothic" pitchFamily="34" charset="-120"/>
               </a:rPr>
               <a:t>日常の小額決済すべてを追跡するのは現実的ではありません。高額な買い物（家電・家具・車・リフォームなど）なら、領収書が自然に手元に残ります。医療費控除と同じ要領で、確定申告時に合算して申告できます。</a:t>
             </a:r>
@@ -3947,11 +3947,11 @@
             </a:avLst>
           </a:prstGeom>
           <a:solidFill>
-            <a:srgbClr val="1A1A1A"/>
+            <a:srgbClr val="FFFFFF"/>
           </a:solidFill>
           <a:ln w="12700">
             <a:solidFill>
-              <a:srgbClr val="2E2E2E"/>
+              <a:srgbClr val="DDE0E6"/>
             </a:solidFill>
             <a:prstDash val="solid"/>
           </a:ln>
@@ -3972,11 +3972,11 @@
             <a:avLst/>
           </a:prstGeom>
           <a:solidFill>
-            <a:srgbClr val="0A0A0A"/>
+            <a:srgbClr val="F5F6F8"/>
           </a:solidFill>
           <a:ln w="12700">
             <a:solidFill>
-              <a:srgbClr val="2E2E2E"/>
+              <a:srgbClr val="DDE0E6"/>
             </a:solidFill>
             <a:prstDash val="solid"/>
           </a:ln>
@@ -4036,11 +4036,11 @@
             <a:r>
               <a:rPr lang="en-US" sz="1500" b="1" dirty="0">
                 <a:solidFill>
-                  <a:srgbClr val="F5F5F0"/>
-                </a:solidFill>
-                <a:latin typeface="Arial" pitchFamily="34" charset="0"/>
-                <a:ea typeface="Arial" pitchFamily="34" charset="-122"/>
-                <a:cs typeface="Arial" pitchFamily="34" charset="-120"/>
+                  <a:srgbClr val="16181D"/>
+                </a:solidFill>
+                <a:latin typeface="Arial" pitchFamily="34" charset="0"/>
+                <a:ea typeface="BIZ UDPGothic" pitchFamily="34" charset="-122"/>
+                <a:cs typeface="BIZ UDPGothic" pitchFamily="34" charset="-120"/>
               </a:rPr>
               <a:t>控除の上限と寄付先</a:t>
             </a:r>
@@ -4078,11 +4078,11 @@
             <a:r>
               <a:rPr lang="en-US" sz="1200" dirty="0">
                 <a:solidFill>
-                  <a:srgbClr val="CCCCCC"/>
-                </a:solidFill>
-                <a:latin typeface="Arial" pitchFamily="34" charset="0"/>
-                <a:ea typeface="Arial" pitchFamily="34" charset="-122"/>
-                <a:cs typeface="Arial" pitchFamily="34" charset="-120"/>
+                  <a:srgbClr val="2B2F36"/>
+                </a:solidFill>
+                <a:latin typeface="Arial" pitchFamily="34" charset="0"/>
+                <a:ea typeface="BIZ UDPGothic" pitchFamily="34" charset="-122"/>
+                <a:cs typeface="BIZ UDPGothic" pitchFamily="34" charset="-120"/>
               </a:rPr>
               <a:t>控除できるのは、対象となる消費税額の50%まで。消費税は国税なので、住民税の75:25ルールは適用しない。寄付先は自由に指定できます。（所得税と同じ自由度）</a:t>
             </a:r>
@@ -4117,11 +4117,11 @@
             <a:r>
               <a:rPr lang="en-US" sz="1200" i="1" dirty="0">
                 <a:solidFill>
-                  <a:srgbClr val="999999"/>
-                </a:solidFill>
-                <a:latin typeface="Arial" pitchFamily="34" charset="0"/>
-                <a:ea typeface="Arial" pitchFamily="34" charset="-122"/>
-                <a:cs typeface="Arial" pitchFamily="34" charset="-120"/>
+                  <a:srgbClr val="4B515C"/>
+                </a:solidFill>
+                <a:latin typeface="Arial" pitchFamily="34" charset="0"/>
+                <a:ea typeface="BIZ UDPGothic" pitchFamily="34" charset="-122"/>
+                <a:cs typeface="BIZ UDPGothic" pitchFamily="34" charset="-120"/>
               </a:rPr>
               <a:t>3つの控除枠はすべて独立しているので、所得税枠・住民税枠・消費税枠をそれぞれ上限まで使い切れます。</a:t>
             </a:r>
@@ -4143,7 +4143,7 @@
     <p:bg>
       <p:bgPr>
         <a:solidFill>
-          <a:srgbClr val="0A0A0A"/>
+          <a:srgbClr val="F5F6F8"/>
         </a:solidFill>
       </p:bgPr>
     </p:bg>
@@ -4188,11 +4188,11 @@
             <a:r>
               <a:rPr lang="en-US" sz="1200" b="1" spc="300" kern="0" dirty="0">
                 <a:solidFill>
-                  <a:srgbClr val="D62828"/>
-                </a:solidFill>
-                <a:latin typeface="Arial" pitchFamily="34" charset="0"/>
-                <a:ea typeface="Arial" pitchFamily="34" charset="-122"/>
-                <a:cs typeface="Arial" pitchFamily="34" charset="-120"/>
+                  <a:srgbClr val="C8161D"/>
+                </a:solidFill>
+                <a:latin typeface="Arial" pitchFamily="34" charset="0"/>
+                <a:ea typeface="BIZ UDPGothic" pitchFamily="34" charset="-122"/>
+                <a:cs typeface="BIZ UDPGothic" pitchFamily="34" charset="-120"/>
               </a:rPr>
               <a:t>4. お金の出口設計</a:t>
             </a:r>
@@ -4227,11 +4227,11 @@
             <a:r>
               <a:rPr lang="en-US" sz="3000" b="1" dirty="0">
                 <a:solidFill>
-                  <a:srgbClr val="F5F5F0"/>
-                </a:solidFill>
-                <a:latin typeface="Arial" pitchFamily="34" charset="0"/>
-                <a:ea typeface="Arial" pitchFamily="34" charset="-122"/>
-                <a:cs typeface="Arial" pitchFamily="34" charset="-120"/>
+                  <a:srgbClr val="16181D"/>
+                </a:solidFill>
+                <a:latin typeface="Arial" pitchFamily="34" charset="0"/>
+                <a:ea typeface="BIZ UDPGothic" pitchFamily="34" charset="-122"/>
+                <a:cs typeface="BIZ UDPGothic" pitchFamily="34" charset="-120"/>
               </a:rPr>
               <a:t>国・自治体・施設が「使い道のメニュー」を提示する</a:t>
             </a:r>
@@ -4266,11 +4266,11 @@
             <a:r>
               <a:rPr lang="en-US" sz="1000" dirty="0">
                 <a:solidFill>
-                  <a:srgbClr val="CCCCCC"/>
-                </a:solidFill>
-                <a:latin typeface="Arial" pitchFamily="34" charset="0"/>
-                <a:ea typeface="Arial" pitchFamily="34" charset="-122"/>
-                <a:cs typeface="Arial" pitchFamily="34" charset="-120"/>
+                  <a:srgbClr val="2B2F36"/>
+                </a:solidFill>
+                <a:latin typeface="Arial" pitchFamily="34" charset="0"/>
+                <a:ea typeface="BIZ UDPGothic" pitchFamily="34" charset="-122"/>
+                <a:cs typeface="BIZ UDPGothic" pitchFamily="34" charset="-120"/>
               </a:rPr>
               <a:t>12</a:t>
             </a:r>
@@ -4305,11 +4305,11 @@
             <a:r>
               <a:rPr lang="en-US" sz="900" dirty="0">
                 <a:solidFill>
-                  <a:srgbClr val="555555"/>
-                </a:solidFill>
-                <a:latin typeface="Arial" pitchFamily="34" charset="0"/>
-                <a:ea typeface="Arial" pitchFamily="34" charset="-122"/>
-                <a:cs typeface="Arial" pitchFamily="34" charset="-120"/>
+                  <a:srgbClr val="9AA0AA"/>
+                </a:solidFill>
+                <a:latin typeface="Arial" pitchFamily="34" charset="0"/>
+                <a:ea typeface="BIZ UDPGothic" pitchFamily="34" charset="-122"/>
+                <a:cs typeface="BIZ UDPGothic" pitchFamily="34" charset="-120"/>
               </a:rPr>
               <a:t>REBOOT JAPAN ── 提言005</a:t>
             </a:r>
@@ -4334,11 +4334,11 @@
             </a:avLst>
           </a:prstGeom>
           <a:solidFill>
-            <a:srgbClr val="1A1A1A"/>
+            <a:srgbClr val="FFFFFF"/>
           </a:solidFill>
           <a:ln w="12700">
             <a:solidFill>
-              <a:srgbClr val="2E2E2E"/>
+              <a:srgbClr val="DDE0E6"/>
             </a:solidFill>
             <a:prstDash val="solid"/>
           </a:ln>
@@ -4359,11 +4359,11 @@
             <a:avLst/>
           </a:prstGeom>
           <a:solidFill>
-            <a:srgbClr val="0A0A0A"/>
+            <a:srgbClr val="F5F6F8"/>
           </a:solidFill>
           <a:ln w="12700">
             <a:solidFill>
-              <a:srgbClr val="2E2E2E"/>
+              <a:srgbClr val="DDE0E6"/>
             </a:solidFill>
             <a:prstDash val="solid"/>
           </a:ln>
@@ -4420,11 +4420,11 @@
             <a:r>
               <a:rPr lang="en-US" sz="1700" b="1" dirty="0">
                 <a:solidFill>
-                  <a:srgbClr val="D62828"/>
-                </a:solidFill>
-                <a:latin typeface="Arial" pitchFamily="34" charset="0"/>
-                <a:ea typeface="Arial" pitchFamily="34" charset="-122"/>
-                <a:cs typeface="Arial" pitchFamily="34" charset="-120"/>
+                  <a:srgbClr val="C8161D"/>
+                </a:solidFill>
+                <a:latin typeface="Arial" pitchFamily="34" charset="0"/>
+                <a:ea typeface="BIZ UDPGothic" pitchFamily="34" charset="-122"/>
+                <a:cs typeface="BIZ UDPGothic" pitchFamily="34" charset="-120"/>
               </a:rPr>
               <a:t>用途限定メニュー</a:t>
             </a:r>
@@ -4462,11 +4462,11 @@
             <a:r>
               <a:rPr lang="en-US" sz="1300" dirty="0">
                 <a:solidFill>
-                  <a:srgbClr val="CCCCCC"/>
-                </a:solidFill>
-                <a:latin typeface="Arial" pitchFamily="34" charset="0"/>
-                <a:ea typeface="Arial" pitchFamily="34" charset="-122"/>
-                <a:cs typeface="Arial" pitchFamily="34" charset="-120"/>
+                  <a:srgbClr val="2B2F36"/>
+                </a:solidFill>
+                <a:latin typeface="Arial" pitchFamily="34" charset="0"/>
+                <a:ea typeface="BIZ UDPGothic" pitchFamily="34" charset="-122"/>
+                <a:cs typeface="BIZ UDPGothic" pitchFamily="34" charset="-120"/>
               </a:rPr>
               <a:t>「○○市児童相談所の人員増強」のように、具体的な用途を明示。施設・部署が自ら作成する。成果報告が義務。</a:t>
             </a:r>
@@ -4491,11 +4491,11 @@
             </a:avLst>
           </a:prstGeom>
           <a:solidFill>
-            <a:srgbClr val="1A1A1A"/>
+            <a:srgbClr val="FFFFFF"/>
           </a:solidFill>
           <a:ln w="12700">
             <a:solidFill>
-              <a:srgbClr val="2E2E2E"/>
+              <a:srgbClr val="DDE0E6"/>
             </a:solidFill>
             <a:prstDash val="solid"/>
           </a:ln>
@@ -4516,11 +4516,11 @@
             <a:avLst/>
           </a:prstGeom>
           <a:solidFill>
-            <a:srgbClr val="0A0A0A"/>
+            <a:srgbClr val="F5F6F8"/>
           </a:solidFill>
           <a:ln w="12700">
             <a:solidFill>
-              <a:srgbClr val="2E2E2E"/>
+              <a:srgbClr val="DDE0E6"/>
             </a:solidFill>
             <a:prstDash val="solid"/>
           </a:ln>
@@ -4577,11 +4577,11 @@
             <a:r>
               <a:rPr lang="en-US" sz="1700" b="1" dirty="0">
                 <a:solidFill>
-                  <a:srgbClr val="D62828"/>
-                </a:solidFill>
-                <a:latin typeface="Arial" pitchFamily="34" charset="0"/>
-                <a:ea typeface="Arial" pitchFamily="34" charset="-122"/>
-                <a:cs typeface="Arial" pitchFamily="34" charset="-120"/>
+                  <a:srgbClr val="C8161D"/>
+                </a:solidFill>
+                <a:latin typeface="Arial" pitchFamily="34" charset="0"/>
+                <a:ea typeface="BIZ UDPGothic" pitchFamily="34" charset="-122"/>
+                <a:cs typeface="BIZ UDPGothic" pitchFamily="34" charset="-120"/>
               </a:rPr>
               <a:t>用途自由メニュー</a:t>
             </a:r>
@@ -4619,11 +4619,11 @@
             <a:r>
               <a:rPr lang="en-US" sz="1300" dirty="0">
                 <a:solidFill>
-                  <a:srgbClr val="CCCCCC"/>
-                </a:solidFill>
-                <a:latin typeface="Arial" pitchFamily="34" charset="0"/>
-                <a:ea typeface="Arial" pitchFamily="34" charset="-122"/>
-                <a:cs typeface="Arial" pitchFamily="34" charset="-120"/>
+                  <a:srgbClr val="2B2F36"/>
+                </a:solidFill>
+                <a:latin typeface="Arial" pitchFamily="34" charset="0"/>
+                <a:ea typeface="BIZ UDPGothic" pitchFamily="34" charset="-122"/>
+                <a:cs typeface="BIZ UDPGothic" pitchFamily="34" charset="-120"/>
               </a:rPr>
               <a:t>使い道を指定しない寄付も選べる。資金をプールするかどうかは自治体の裁量に委ねる。報告義務なし。</a:t>
             </a:r>
@@ -4661,11 +4661,11 @@
             <a:r>
               <a:rPr lang="en-US" sz="1300" dirty="0">
                 <a:solidFill>
-                  <a:srgbClr val="CCCCCC"/>
-                </a:solidFill>
-                <a:latin typeface="Arial" pitchFamily="34" charset="0"/>
-                <a:ea typeface="Arial" pitchFamily="34" charset="-122"/>
-                <a:cs typeface="Arial" pitchFamily="34" charset="-120"/>
+                  <a:srgbClr val="2B2F36"/>
+                </a:solidFill>
+                <a:latin typeface="Arial" pitchFamily="34" charset="0"/>
+                <a:ea typeface="BIZ UDPGothic" pitchFamily="34" charset="-122"/>
+                <a:cs typeface="BIZ UDPGothic" pitchFamily="34" charset="-120"/>
               </a:rPr>
               <a:t>用途限定メニューには「単年度型」か「複数年型」かを必ず明示する（寄付者が何年計画か事前に分かる）</a:t>
             </a:r>
@@ -4700,11 +4700,11 @@
             <a:r>
               <a:rPr lang="en-US" sz="1250" i="1" dirty="0">
                 <a:solidFill>
-                  <a:srgbClr val="D62828"/>
-                </a:solidFill>
-                <a:latin typeface="Arial" pitchFamily="34" charset="0"/>
-                <a:ea typeface="Arial" pitchFamily="34" charset="-122"/>
-                <a:cs typeface="Arial" pitchFamily="34" charset="-120"/>
+                  <a:srgbClr val="C8161D"/>
+                </a:solidFill>
+                <a:latin typeface="Arial" pitchFamily="34" charset="0"/>
+                <a:ea typeface="BIZ UDPGothic" pitchFamily="34" charset="-122"/>
+                <a:cs typeface="BIZ UDPGothic" pitchFamily="34" charset="-120"/>
               </a:rPr>
               <a:t>施設・部署が自らメニューを作成 → 現場の「本当に必要なもの」が寄付メニューに直結します。</a:t>
             </a:r>
@@ -4726,7 +4726,7 @@
     <p:bg>
       <p:bgPr>
         <a:solidFill>
-          <a:srgbClr val="0A0A0A"/>
+          <a:srgbClr val="F5F6F8"/>
         </a:solidFill>
       </p:bgPr>
     </p:bg>
@@ -4771,11 +4771,11 @@
             <a:r>
               <a:rPr lang="en-US" sz="1200" b="1" spc="300" kern="0" dirty="0">
                 <a:solidFill>
-                  <a:srgbClr val="D62828"/>
-                </a:solidFill>
-                <a:latin typeface="Arial" pitchFamily="34" charset="0"/>
-                <a:ea typeface="Arial" pitchFamily="34" charset="-122"/>
-                <a:cs typeface="Arial" pitchFamily="34" charset="-120"/>
+                  <a:srgbClr val="C8161D"/>
+                </a:solidFill>
+                <a:latin typeface="Arial" pitchFamily="34" charset="0"/>
+                <a:ea typeface="BIZ UDPGothic" pitchFamily="34" charset="-122"/>
+                <a:cs typeface="BIZ UDPGothic" pitchFamily="34" charset="-120"/>
               </a:rPr>
               <a:t>4. 受付上限のルール</a:t>
             </a:r>
@@ -4810,11 +4810,11 @@
             <a:r>
               <a:rPr lang="en-US" sz="3000" b="1" dirty="0">
                 <a:solidFill>
-                  <a:srgbClr val="F5F5F0"/>
-                </a:solidFill>
-                <a:latin typeface="Arial" pitchFamily="34" charset="0"/>
-                <a:ea typeface="Arial" pitchFamily="34" charset="-122"/>
-                <a:cs typeface="Arial" pitchFamily="34" charset="-120"/>
+                  <a:srgbClr val="16181D"/>
+                </a:solidFill>
+                <a:latin typeface="Arial" pitchFamily="34" charset="0"/>
+                <a:ea typeface="BIZ UDPGothic" pitchFamily="34" charset="-122"/>
+                <a:cs typeface="BIZ UDPGothic" pitchFamily="34" charset="-120"/>
               </a:rPr>
               <a:t>必要予算の115%に達したら、受付終了</a:t>
             </a:r>
@@ -4849,11 +4849,11 @@
             <a:r>
               <a:rPr lang="en-US" sz="1000" dirty="0">
                 <a:solidFill>
-                  <a:srgbClr val="CCCCCC"/>
-                </a:solidFill>
-                <a:latin typeface="Arial" pitchFamily="34" charset="0"/>
-                <a:ea typeface="Arial" pitchFamily="34" charset="-122"/>
-                <a:cs typeface="Arial" pitchFamily="34" charset="-120"/>
+                  <a:srgbClr val="2B2F36"/>
+                </a:solidFill>
+                <a:latin typeface="Arial" pitchFamily="34" charset="0"/>
+                <a:ea typeface="BIZ UDPGothic" pitchFamily="34" charset="-122"/>
+                <a:cs typeface="BIZ UDPGothic" pitchFamily="34" charset="-120"/>
               </a:rPr>
               <a:t>13</a:t>
             </a:r>
@@ -4888,11 +4888,11 @@
             <a:r>
               <a:rPr lang="en-US" sz="900" dirty="0">
                 <a:solidFill>
-                  <a:srgbClr val="555555"/>
-                </a:solidFill>
-                <a:latin typeface="Arial" pitchFamily="34" charset="0"/>
-                <a:ea typeface="Arial" pitchFamily="34" charset="-122"/>
-                <a:cs typeface="Arial" pitchFamily="34" charset="-120"/>
+                  <a:srgbClr val="9AA0AA"/>
+                </a:solidFill>
+                <a:latin typeface="Arial" pitchFamily="34" charset="0"/>
+                <a:ea typeface="BIZ UDPGothic" pitchFamily="34" charset="-122"/>
+                <a:cs typeface="BIZ UDPGothic" pitchFamily="34" charset="-120"/>
               </a:rPr>
               <a:t>REBOOT JAPAN ── 提言005</a:t>
             </a:r>
@@ -4927,11 +4927,11 @@
             <a:r>
               <a:rPr lang="en-US" sz="1400" dirty="0">
                 <a:solidFill>
-                  <a:srgbClr val="CCCCCC"/>
-                </a:solidFill>
-                <a:latin typeface="Arial" pitchFamily="34" charset="0"/>
-                <a:ea typeface="Arial" pitchFamily="34" charset="-122"/>
-                <a:cs typeface="Arial" pitchFamily="34" charset="-120"/>
+                  <a:srgbClr val="2B2F36"/>
+                </a:solidFill>
+                <a:latin typeface="Arial" pitchFamily="34" charset="0"/>
+                <a:ea typeface="BIZ UDPGothic" pitchFamily="34" charset="-122"/>
+                <a:cs typeface="BIZ UDPGothic" pitchFamily="34" charset="-120"/>
               </a:rPr>
               <a:t>「集まりすぎた」による無駄や不正を防ぐためのシンプルなルールです。</a:t>
             </a:r>
@@ -4954,7 +4954,7 @@
             <a:avLst/>
           </a:prstGeom>
           <a:solidFill>
-            <a:srgbClr val="1A1A1A"/>
+            <a:srgbClr val="FFFFFF"/>
           </a:solidFill>
           <a:ln/>
         </p:spPr>
@@ -4974,7 +4974,7 @@
             <a:avLst/>
           </a:prstGeom>
           <a:solidFill>
-            <a:srgbClr val="1A3A1A"/>
+            <a:srgbClr val="E9EFF8"/>
           </a:solidFill>
           <a:ln/>
         </p:spPr>
@@ -4994,7 +4994,7 @@
             <a:avLst/>
           </a:prstGeom>
           <a:solidFill>
-            <a:srgbClr val="3A6A3A"/>
+            <a:srgbClr val="B9C9E2"/>
           </a:solidFill>
           <a:ln/>
         </p:spPr>
@@ -5026,11 +5026,11 @@
             <a:r>
               <a:rPr lang="en-US" sz="1400" b="1" dirty="0">
                 <a:solidFill>
-                  <a:srgbClr val="88CC88"/>
-                </a:solidFill>
-                <a:latin typeface="Arial" pitchFamily="34" charset="0"/>
-                <a:ea typeface="Arial" pitchFamily="34" charset="-122"/>
-                <a:cs typeface="Arial" pitchFamily="34" charset="-120"/>
+                  <a:srgbClr val="3A6AAE"/>
+                </a:solidFill>
+                <a:latin typeface="Arial" pitchFamily="34" charset="0"/>
+                <a:ea typeface="BIZ UDPGothic" pitchFamily="34" charset="-122"/>
+                <a:cs typeface="BIZ UDPGothic" pitchFamily="34" charset="-120"/>
               </a:rPr>
               <a:t>必要予算（100%）</a:t>
             </a:r>
@@ -5065,11 +5065,11 @@
             <a:r>
               <a:rPr lang="en-US" sz="1100" dirty="0">
                 <a:solidFill>
-                  <a:srgbClr val="F5F5F0"/>
-                </a:solidFill>
-                <a:latin typeface="Arial" pitchFamily="34" charset="0"/>
-                <a:ea typeface="Arial" pitchFamily="34" charset="-122"/>
-                <a:cs typeface="Arial" pitchFamily="34" charset="-120"/>
+                  <a:srgbClr val="16181D"/>
+                </a:solidFill>
+                <a:latin typeface="Arial" pitchFamily="34" charset="0"/>
+                <a:ea typeface="BIZ UDPGothic" pitchFamily="34" charset="-122"/>
+                <a:cs typeface="BIZ UDPGothic" pitchFamily="34" charset="-120"/>
               </a:rPr>
               <a:t>+15%</a:t>
             </a:r>
@@ -5082,11 +5082,11 @@
             <a:r>
               <a:rPr lang="en-US" sz="1100" dirty="0">
                 <a:solidFill>
-                  <a:srgbClr val="F5F5F0"/>
-                </a:solidFill>
-                <a:latin typeface="Arial" pitchFamily="34" charset="0"/>
-                <a:ea typeface="Arial" pitchFamily="34" charset="-122"/>
-                <a:cs typeface="Arial" pitchFamily="34" charset="-120"/>
+                  <a:srgbClr val="16181D"/>
+                </a:solidFill>
+                <a:latin typeface="Arial" pitchFamily="34" charset="0"/>
+                <a:ea typeface="BIZ UDPGothic" pitchFamily="34" charset="-122"/>
+                <a:cs typeface="BIZ UDPGothic" pitchFamily="34" charset="-120"/>
               </a:rPr>
               <a:t>余裕分</a:t>
             </a:r>
@@ -5111,7 +5111,7 @@
           <a:noFill/>
           <a:ln w="12700">
             <a:solidFill>
-              <a:srgbClr val="555555"/>
+              <a:srgbClr val="9AA0AA"/>
             </a:solidFill>
             <a:prstDash val="dash"/>
           </a:ln>
@@ -5144,11 +5144,11 @@
             <a:r>
               <a:rPr lang="en-US" sz="1100" dirty="0">
                 <a:solidFill>
-                  <a:srgbClr val="D62828"/>
-                </a:solidFill>
-                <a:latin typeface="Arial" pitchFamily="34" charset="0"/>
-                <a:ea typeface="Arial" pitchFamily="34" charset="-122"/>
-                <a:cs typeface="Arial" pitchFamily="34" charset="-120"/>
+                  <a:srgbClr val="C8161D"/>
+                </a:solidFill>
+                <a:latin typeface="Arial" pitchFamily="34" charset="0"/>
+                <a:ea typeface="BIZ UDPGothic" pitchFamily="34" charset="-122"/>
+                <a:cs typeface="BIZ UDPGothic" pitchFamily="34" charset="-120"/>
               </a:rPr>
               <a:t>← 受付上限（115%）に達したら即座に受付終了</a:t>
             </a:r>
@@ -5207,11 +5207,11 @@
             <a:r>
               <a:rPr lang="en-US" sz="1300" dirty="0">
                 <a:solidFill>
-                  <a:srgbClr val="CCCCCC"/>
-                </a:solidFill>
-                <a:latin typeface="Arial" pitchFamily="34" charset="0"/>
-                <a:ea typeface="Arial" pitchFamily="34" charset="-122"/>
-                <a:cs typeface="Arial" pitchFamily="34" charset="-120"/>
+                  <a:srgbClr val="2B2F36"/>
+                </a:solidFill>
+                <a:latin typeface="Arial" pitchFamily="34" charset="0"/>
+                <a:ea typeface="BIZ UDPGothic" pitchFamily="34" charset="-122"/>
+                <a:cs typeface="BIZ UDPGothic" pitchFamily="34" charset="-120"/>
               </a:rPr>
               <a:t>15%の余裕は、人件費・資材価格の変動など「運用上の誤差」を吸収できる範囲として設定</a:t>
             </a:r>
@@ -5270,11 +5270,11 @@
             <a:r>
               <a:rPr lang="en-US" sz="1300" dirty="0">
                 <a:solidFill>
-                  <a:srgbClr val="CCCCCC"/>
-                </a:solidFill>
-                <a:latin typeface="Arial" pitchFamily="34" charset="0"/>
-                <a:ea typeface="Arial" pitchFamily="34" charset="-122"/>
-                <a:cs typeface="Arial" pitchFamily="34" charset="-120"/>
+                  <a:srgbClr val="2B2F36"/>
+                </a:solidFill>
+                <a:latin typeface="Arial" pitchFamily="34" charset="0"/>
+                <a:ea typeface="BIZ UDPGothic" pitchFamily="34" charset="-122"/>
+                <a:cs typeface="BIZ UDPGothic" pitchFamily="34" charset="-120"/>
               </a:rPr>
               <a:t>これにより「予算を低く申告してポイントを大量発生させる」という不正が構造的に防がれる</a:t>
             </a:r>
@@ -5333,11 +5333,11 @@
             <a:r>
               <a:rPr lang="en-US" sz="1300" dirty="0">
                 <a:solidFill>
-                  <a:srgbClr val="CCCCCC"/>
-                </a:solidFill>
-                <a:latin typeface="Arial" pitchFamily="34" charset="0"/>
-                <a:ea typeface="Arial" pitchFamily="34" charset="-122"/>
-                <a:cs typeface="Arial" pitchFamily="34" charset="-120"/>
+                  <a:srgbClr val="2B2F36"/>
+                </a:solidFill>
+                <a:latin typeface="Arial" pitchFamily="34" charset="0"/>
+                <a:ea typeface="BIZ UDPGothic" pitchFamily="34" charset="-122"/>
+                <a:cs typeface="BIZ UDPGothic" pitchFamily="34" charset="-120"/>
               </a:rPr>
               <a:t>115%到達後に寄付したい人は、他のメニューを選ぶ（超過分の自動繰越はしない）</a:t>
             </a:r>
@@ -5359,7 +5359,7 @@
     <p:bg>
       <p:bgPr>
         <a:solidFill>
-          <a:srgbClr val="0A0A0A"/>
+          <a:srgbClr val="F5F6F8"/>
         </a:solidFill>
       </p:bgPr>
     </p:bg>
@@ -5404,11 +5404,11 @@
             <a:r>
               <a:rPr lang="en-US" sz="1200" b="1" spc="300" kern="0" dirty="0">
                 <a:solidFill>
-                  <a:srgbClr val="D62828"/>
-                </a:solidFill>
-                <a:latin typeface="Arial" pitchFamily="34" charset="0"/>
-                <a:ea typeface="Arial" pitchFamily="34" charset="-122"/>
-                <a:cs typeface="Arial" pitchFamily="34" charset="-120"/>
+                  <a:srgbClr val="C8161D"/>
+                </a:solidFill>
+                <a:latin typeface="Arial" pitchFamily="34" charset="0"/>
+                <a:ea typeface="BIZ UDPGothic" pitchFamily="34" charset="-122"/>
+                <a:cs typeface="BIZ UDPGothic" pitchFamily="34" charset="-120"/>
               </a:rPr>
               <a:t>4. 余剰分のポイント還元</a:t>
             </a:r>
@@ -5443,11 +5443,11 @@
             <a:r>
               <a:rPr lang="en-US" sz="3000" b="1" dirty="0">
                 <a:solidFill>
-                  <a:srgbClr val="F5F5F0"/>
-                </a:solidFill>
-                <a:latin typeface="Arial" pitchFamily="34" charset="0"/>
-                <a:ea typeface="Arial" pitchFamily="34" charset="-122"/>
-                <a:cs typeface="Arial" pitchFamily="34" charset="-120"/>
+                  <a:srgbClr val="16181D"/>
+                </a:solidFill>
+                <a:latin typeface="Arial" pitchFamily="34" charset="0"/>
+                <a:ea typeface="BIZ UDPGothic" pitchFamily="34" charset="-122"/>
+                <a:cs typeface="BIZ UDPGothic" pitchFamily="34" charset="-120"/>
               </a:rPr>
               <a:t>使い切れなかった分は、翌年の寄付に使えるポイントへ</a:t>
             </a:r>
@@ -5482,11 +5482,11 @@
             <a:r>
               <a:rPr lang="en-US" sz="1000" dirty="0">
                 <a:solidFill>
-                  <a:srgbClr val="CCCCCC"/>
-                </a:solidFill>
-                <a:latin typeface="Arial" pitchFamily="34" charset="0"/>
-                <a:ea typeface="Arial" pitchFamily="34" charset="-122"/>
-                <a:cs typeface="Arial" pitchFamily="34" charset="-120"/>
+                  <a:srgbClr val="2B2F36"/>
+                </a:solidFill>
+                <a:latin typeface="Arial" pitchFamily="34" charset="0"/>
+                <a:ea typeface="BIZ UDPGothic" pitchFamily="34" charset="-122"/>
+                <a:cs typeface="BIZ UDPGothic" pitchFamily="34" charset="-120"/>
               </a:rPr>
               <a:t>14</a:t>
             </a:r>
@@ -5521,11 +5521,11 @@
             <a:r>
               <a:rPr lang="en-US" sz="900" dirty="0">
                 <a:solidFill>
-                  <a:srgbClr val="555555"/>
-                </a:solidFill>
-                <a:latin typeface="Arial" pitchFamily="34" charset="0"/>
-                <a:ea typeface="Arial" pitchFamily="34" charset="-122"/>
-                <a:cs typeface="Arial" pitchFamily="34" charset="-120"/>
+                  <a:srgbClr val="9AA0AA"/>
+                </a:solidFill>
+                <a:latin typeface="Arial" pitchFamily="34" charset="0"/>
+                <a:ea typeface="BIZ UDPGothic" pitchFamily="34" charset="-122"/>
+                <a:cs typeface="BIZ UDPGothic" pitchFamily="34" charset="-120"/>
               </a:rPr>
               <a:t>REBOOT JAPAN ── 提言005</a:t>
             </a:r>
@@ -5560,11 +5560,11 @@
             <a:r>
               <a:rPr lang="en-US" sz="1350" dirty="0">
                 <a:solidFill>
-                  <a:srgbClr val="CCCCCC"/>
-                </a:solidFill>
-                <a:latin typeface="Arial" pitchFamily="34" charset="0"/>
-                <a:ea typeface="Arial" pitchFamily="34" charset="-122"/>
-                <a:cs typeface="Arial" pitchFamily="34" charset="-120"/>
+                  <a:srgbClr val="2B2F36"/>
+                </a:solidFill>
+                <a:latin typeface="Arial" pitchFamily="34" charset="0"/>
+                <a:ea typeface="BIZ UDPGothic" pitchFamily="34" charset="-122"/>
+                <a:cs typeface="BIZ UDPGothic" pitchFamily="34" charset="-120"/>
               </a:rPr>
               <a:t>115%キャップにより余剰は稀ですが、単年度型メニューで余った場合の精算ルールです。</a:t>
             </a:r>
@@ -5589,11 +5589,11 @@
             </a:avLst>
           </a:prstGeom>
           <a:solidFill>
-            <a:srgbClr val="1A1A1A"/>
+            <a:srgbClr val="FFFFFF"/>
           </a:solidFill>
           <a:ln w="12700">
             <a:solidFill>
-              <a:srgbClr val="2E2E2E"/>
+              <a:srgbClr val="DDE0E6"/>
             </a:solidFill>
             <a:prstDash val="solid"/>
           </a:ln>
@@ -5626,11 +5626,11 @@
             <a:r>
               <a:rPr lang="en-US" sz="1500" b="1" dirty="0">
                 <a:solidFill>
-                  <a:srgbClr val="D62828"/>
-                </a:solidFill>
-                <a:latin typeface="Arial" pitchFamily="34" charset="0"/>
-                <a:ea typeface="Arial" pitchFamily="34" charset="-122"/>
-                <a:cs typeface="Arial" pitchFamily="34" charset="-120"/>
+                  <a:srgbClr val="C8161D"/>
+                </a:solidFill>
+                <a:latin typeface="Arial" pitchFamily="34" charset="0"/>
+                <a:ea typeface="BIZ UDPGothic" pitchFamily="34" charset="-122"/>
+                <a:cs typeface="BIZ UDPGothic" pitchFamily="34" charset="-120"/>
               </a:rPr>
               <a:t>1pt＝1円</a:t>
             </a:r>
@@ -5665,11 +5665,11 @@
             <a:r>
               <a:rPr lang="en-US" sz="1300" dirty="0">
                 <a:solidFill>
-                  <a:srgbClr val="CCCCCC"/>
-                </a:solidFill>
-                <a:latin typeface="Arial" pitchFamily="34" charset="0"/>
-                <a:ea typeface="Arial" pitchFamily="34" charset="-122"/>
-                <a:cs typeface="Arial" pitchFamily="34" charset="-120"/>
+                  <a:srgbClr val="2B2F36"/>
+                </a:solidFill>
+                <a:latin typeface="Arial" pitchFamily="34" charset="0"/>
+                <a:ea typeface="BIZ UDPGothic" pitchFamily="34" charset="-122"/>
+                <a:cs typeface="BIZ UDPGothic" pitchFamily="34" charset="-120"/>
               </a:rPr>
               <a:t>シンプルな換算レート。現金との等価で分かりやすい</a:t>
             </a:r>
@@ -5694,11 +5694,11 @@
             </a:avLst>
           </a:prstGeom>
           <a:solidFill>
-            <a:srgbClr val="1A1A1A"/>
+            <a:srgbClr val="FFFFFF"/>
           </a:solidFill>
           <a:ln w="12700">
             <a:solidFill>
-              <a:srgbClr val="2E2E2E"/>
+              <a:srgbClr val="DDE0E6"/>
             </a:solidFill>
             <a:prstDash val="solid"/>
           </a:ln>
@@ -5731,11 +5731,11 @@
             <a:r>
               <a:rPr lang="en-US" sz="1500" b="1" dirty="0">
                 <a:solidFill>
-                  <a:srgbClr val="D62828"/>
-                </a:solidFill>
-                <a:latin typeface="Arial" pitchFamily="34" charset="0"/>
-                <a:ea typeface="Arial" pitchFamily="34" charset="-122"/>
-                <a:cs typeface="Arial" pitchFamily="34" charset="-120"/>
+                  <a:srgbClr val="C8161D"/>
+                </a:solidFill>
+                <a:latin typeface="Arial" pitchFamily="34" charset="0"/>
+                <a:ea typeface="BIZ UDPGothic" pitchFamily="34" charset="-122"/>
+                <a:cs typeface="BIZ UDPGothic" pitchFamily="34" charset="-120"/>
               </a:rPr>
               <a:t>翌年の寄付のみに使用可</a:t>
             </a:r>
@@ -5770,11 +5770,11 @@
             <a:r>
               <a:rPr lang="en-US" sz="1300" dirty="0">
                 <a:solidFill>
-                  <a:srgbClr val="CCCCCC"/>
-                </a:solidFill>
-                <a:latin typeface="Arial" pitchFamily="34" charset="0"/>
-                <a:ea typeface="Arial" pitchFamily="34" charset="-122"/>
-                <a:cs typeface="Arial" pitchFamily="34" charset="-120"/>
+                  <a:srgbClr val="2B2F36"/>
+                </a:solidFill>
+                <a:latin typeface="Arial" pitchFamily="34" charset="0"/>
+                <a:ea typeface="BIZ UDPGothic" pitchFamily="34" charset="-122"/>
+                <a:cs typeface="BIZ UDPGothic" pitchFamily="34" charset="-120"/>
               </a:rPr>
               <a:t>換金不可。次の寄付に使うためだけのポイント</a:t>
             </a:r>
@@ -5799,11 +5799,11 @@
             </a:avLst>
           </a:prstGeom>
           <a:solidFill>
-            <a:srgbClr val="1A1A1A"/>
+            <a:srgbClr val="FFFFFF"/>
           </a:solidFill>
           <a:ln w="12700">
             <a:solidFill>
-              <a:srgbClr val="2E2E2E"/>
+              <a:srgbClr val="DDE0E6"/>
             </a:solidFill>
             <a:prstDash val="solid"/>
           </a:ln>
@@ -5836,11 +5836,11 @@
             <a:r>
               <a:rPr lang="en-US" sz="1500" b="1" dirty="0">
                 <a:solidFill>
-                  <a:srgbClr val="D62828"/>
-                </a:solidFill>
-                <a:latin typeface="Arial" pitchFamily="34" charset="0"/>
-                <a:ea typeface="Arial" pitchFamily="34" charset="-122"/>
-                <a:cs typeface="Arial" pitchFamily="34" charset="-120"/>
+                  <a:srgbClr val="C8161D"/>
+                </a:solidFill>
+                <a:latin typeface="Arial" pitchFamily="34" charset="0"/>
+                <a:ea typeface="BIZ UDPGothic" pitchFamily="34" charset="-122"/>
+                <a:cs typeface="BIZ UDPGothic" pitchFamily="34" charset="-120"/>
               </a:rPr>
               <a:t>自治体・用途を問わない</a:t>
             </a:r>
@@ -5875,11 +5875,11 @@
             <a:r>
               <a:rPr lang="en-US" sz="1300" dirty="0">
                 <a:solidFill>
-                  <a:srgbClr val="CCCCCC"/>
-                </a:solidFill>
-                <a:latin typeface="Arial" pitchFamily="34" charset="0"/>
-                <a:ea typeface="Arial" pitchFamily="34" charset="-122"/>
-                <a:cs typeface="Arial" pitchFamily="34" charset="-120"/>
+                  <a:srgbClr val="2B2F36"/>
+                </a:solidFill>
+                <a:latin typeface="Arial" pitchFamily="34" charset="0"/>
+                <a:ea typeface="BIZ UDPGothic" pitchFamily="34" charset="-122"/>
+                <a:cs typeface="BIZ UDPGothic" pitchFamily="34" charset="-120"/>
               </a:rPr>
               <a:t>発行元の自治体は使い道を縛らない。翌年どこでも自由</a:t>
             </a:r>
@@ -5904,11 +5904,11 @@
             </a:avLst>
           </a:prstGeom>
           <a:solidFill>
-            <a:srgbClr val="1A1A1A"/>
+            <a:srgbClr val="FFFFFF"/>
           </a:solidFill>
           <a:ln w="12700">
             <a:solidFill>
-              <a:srgbClr val="2E2E2E"/>
+              <a:srgbClr val="DDE0E6"/>
             </a:solidFill>
             <a:prstDash val="solid"/>
           </a:ln>
@@ -5941,11 +5941,11 @@
             <a:r>
               <a:rPr lang="en-US" sz="1500" b="1" dirty="0">
                 <a:solidFill>
-                  <a:srgbClr val="D62828"/>
-                </a:solidFill>
-                <a:latin typeface="Arial" pitchFamily="34" charset="0"/>
-                <a:ea typeface="Arial" pitchFamily="34" charset="-122"/>
-                <a:cs typeface="Arial" pitchFamily="34" charset="-120"/>
+                  <a:srgbClr val="C8161D"/>
+                </a:solidFill>
+                <a:latin typeface="Arial" pitchFamily="34" charset="0"/>
+                <a:ea typeface="BIZ UDPGothic" pitchFamily="34" charset="-122"/>
+                <a:cs typeface="BIZ UDPGothic" pitchFamily="34" charset="-120"/>
               </a:rPr>
               <a:t>ポイントが「余る」のは稀</a:t>
             </a:r>
@@ -5980,11 +5980,11 @@
             <a:r>
               <a:rPr lang="en-US" sz="1300" dirty="0">
                 <a:solidFill>
-                  <a:srgbClr val="CCCCCC"/>
-                </a:solidFill>
-                <a:latin typeface="Arial" pitchFamily="34" charset="0"/>
-                <a:ea typeface="Arial" pitchFamily="34" charset="-122"/>
-                <a:cs typeface="Arial" pitchFamily="34" charset="-120"/>
+                  <a:srgbClr val="2B2F36"/>
+                </a:solidFill>
+                <a:latin typeface="Arial" pitchFamily="34" charset="0"/>
+                <a:ea typeface="BIZ UDPGothic" pitchFamily="34" charset="-122"/>
+                <a:cs typeface="BIZ UDPGothic" pitchFamily="34" charset="-120"/>
               </a:rPr>
               <a:t>115%キャップのおかげで、そもそも大量発生しにくい設計</a:t>
             </a:r>
@@ -6006,7 +6006,7 @@
     <p:bg>
       <p:bgPr>
         <a:solidFill>
-          <a:srgbClr val="0A0A0A"/>
+          <a:srgbClr val="F5F6F8"/>
         </a:solidFill>
       </p:bgPr>
     </p:bg>
@@ -6051,11 +6051,11 @@
             <a:r>
               <a:rPr lang="en-US" sz="1200" b="1" spc="300" kern="0" dirty="0">
                 <a:solidFill>
-                  <a:srgbClr val="D62828"/>
-                </a:solidFill>
-                <a:latin typeface="Arial" pitchFamily="34" charset="0"/>
-                <a:ea typeface="Arial" pitchFamily="34" charset="-122"/>
-                <a:cs typeface="Arial" pitchFamily="34" charset="-120"/>
+                  <a:srgbClr val="C8161D"/>
+                </a:solidFill>
+                <a:latin typeface="Arial" pitchFamily="34" charset="0"/>
+                <a:ea typeface="BIZ UDPGothic" pitchFamily="34" charset="-122"/>
+                <a:cs typeface="BIZ UDPGothic" pitchFamily="34" charset="-120"/>
               </a:rPr>
               <a:t>4. 成果報告の仕組み</a:t>
             </a:r>
@@ -6090,11 +6090,11 @@
             <a:r>
               <a:rPr lang="en-US" sz="3000" b="1" dirty="0">
                 <a:solidFill>
-                  <a:srgbClr val="F5F5F0"/>
-                </a:solidFill>
-                <a:latin typeface="Arial" pitchFamily="34" charset="0"/>
-                <a:ea typeface="Arial" pitchFamily="34" charset="-122"/>
-                <a:cs typeface="Arial" pitchFamily="34" charset="-120"/>
+                  <a:srgbClr val="16181D"/>
+                </a:solidFill>
+                <a:latin typeface="Arial" pitchFamily="34" charset="0"/>
+                <a:ea typeface="BIZ UDPGothic" pitchFamily="34" charset="-122"/>
+                <a:cs typeface="BIZ UDPGothic" pitchFamily="34" charset="-120"/>
               </a:rPr>
               <a:t>用途を指定した以上、結果を説明する義務がある</a:t>
             </a:r>
@@ -6129,11 +6129,11 @@
             <a:r>
               <a:rPr lang="en-US" sz="1000" dirty="0">
                 <a:solidFill>
-                  <a:srgbClr val="CCCCCC"/>
-                </a:solidFill>
-                <a:latin typeface="Arial" pitchFamily="34" charset="0"/>
-                <a:ea typeface="Arial" pitchFamily="34" charset="-122"/>
-                <a:cs typeface="Arial" pitchFamily="34" charset="-120"/>
+                  <a:srgbClr val="2B2F36"/>
+                </a:solidFill>
+                <a:latin typeface="Arial" pitchFamily="34" charset="0"/>
+                <a:ea typeface="BIZ UDPGothic" pitchFamily="34" charset="-122"/>
+                <a:cs typeface="BIZ UDPGothic" pitchFamily="34" charset="-120"/>
               </a:rPr>
               <a:t>15</a:t>
             </a:r>
@@ -6168,11 +6168,11 @@
             <a:r>
               <a:rPr lang="en-US" sz="900" dirty="0">
                 <a:solidFill>
-                  <a:srgbClr val="555555"/>
-                </a:solidFill>
-                <a:latin typeface="Arial" pitchFamily="34" charset="0"/>
-                <a:ea typeface="Arial" pitchFamily="34" charset="-122"/>
-                <a:cs typeface="Arial" pitchFamily="34" charset="-120"/>
+                  <a:srgbClr val="9AA0AA"/>
+                </a:solidFill>
+                <a:latin typeface="Arial" pitchFamily="34" charset="0"/>
+                <a:ea typeface="BIZ UDPGothic" pitchFamily="34" charset="-122"/>
+                <a:cs typeface="BIZ UDPGothic" pitchFamily="34" charset="-120"/>
               </a:rPr>
               <a:t>REBOOT JAPAN ── 提言005</a:t>
             </a:r>
@@ -6207,11 +6207,11 @@
             <a:r>
               <a:rPr lang="en-US" sz="1350" dirty="0">
                 <a:solidFill>
-                  <a:srgbClr val="CCCCCC"/>
-                </a:solidFill>
-                <a:latin typeface="Arial" pitchFamily="34" charset="0"/>
-                <a:ea typeface="Arial" pitchFamily="34" charset="-122"/>
-                <a:cs typeface="Arial" pitchFamily="34" charset="-120"/>
+                  <a:srgbClr val="2B2F36"/>
+                </a:solidFill>
+                <a:latin typeface="Arial" pitchFamily="34" charset="0"/>
+                <a:ea typeface="BIZ UDPGothic" pitchFamily="34" charset="-122"/>
+                <a:cs typeface="BIZ UDPGothic" pitchFamily="34" charset="-120"/>
               </a:rPr>
               <a:t>対象は用途限定メニューのみ。用途自由メニューは個別報告義務なし。</a:t>
             </a:r>
@@ -6236,11 +6236,11 @@
             </a:avLst>
           </a:prstGeom>
           <a:solidFill>
-            <a:srgbClr val="1A1A1A"/>
+            <a:srgbClr val="FFFFFF"/>
           </a:solidFill>
           <a:ln w="12700">
             <a:solidFill>
-              <a:srgbClr val="2E2E2E"/>
+              <a:srgbClr val="DDE0E6"/>
             </a:solidFill>
             <a:prstDash val="solid"/>
           </a:ln>
@@ -6273,11 +6273,11 @@
             <a:r>
               <a:rPr lang="en-US" sz="1300" b="1" dirty="0">
                 <a:solidFill>
-                  <a:srgbClr val="D62828"/>
-                </a:solidFill>
-                <a:latin typeface="Arial" pitchFamily="34" charset="0"/>
-                <a:ea typeface="Arial" pitchFamily="34" charset="-122"/>
-                <a:cs typeface="Arial" pitchFamily="34" charset="-120"/>
+                  <a:srgbClr val="C8161D"/>
+                </a:solidFill>
+                <a:latin typeface="Arial" pitchFamily="34" charset="0"/>
+                <a:ea typeface="BIZ UDPGothic" pitchFamily="34" charset="-122"/>
+                <a:cs typeface="BIZ UDPGothic" pitchFamily="34" charset="-120"/>
               </a:rPr>
               <a:t>頻度</a:t>
             </a:r>
@@ -6312,11 +6312,11 @@
             <a:r>
               <a:rPr lang="en-US" sz="1300" dirty="0">
                 <a:solidFill>
-                  <a:srgbClr val="CCCCCC"/>
-                </a:solidFill>
-                <a:latin typeface="Arial" pitchFamily="34" charset="0"/>
-                <a:ea typeface="Arial" pitchFamily="34" charset="-122"/>
-                <a:cs typeface="Arial" pitchFamily="34" charset="-120"/>
+                  <a:srgbClr val="2B2F36"/>
+                </a:solidFill>
+                <a:latin typeface="Arial" pitchFamily="34" charset="0"/>
+                <a:ea typeface="BIZ UDPGothic" pitchFamily="34" charset="-122"/>
+                <a:cs typeface="BIZ UDPGothic" pitchFamily="34" charset="-120"/>
               </a:rPr>
               <a:t>四半期ごとに報告（単年度型・複数年型の両方）</a:t>
             </a:r>
@@ -6341,11 +6341,11 @@
             </a:avLst>
           </a:prstGeom>
           <a:solidFill>
-            <a:srgbClr val="1A1A1A"/>
+            <a:srgbClr val="FFFFFF"/>
           </a:solidFill>
           <a:ln w="12700">
             <a:solidFill>
-              <a:srgbClr val="2E2E2E"/>
+              <a:srgbClr val="DDE0E6"/>
             </a:solidFill>
             <a:prstDash val="solid"/>
           </a:ln>
@@ -6378,11 +6378,11 @@
             <a:r>
               <a:rPr lang="en-US" sz="1300" b="1" dirty="0">
                 <a:solidFill>
-                  <a:srgbClr val="D62828"/>
-                </a:solidFill>
-                <a:latin typeface="Arial" pitchFamily="34" charset="0"/>
-                <a:ea typeface="Arial" pitchFamily="34" charset="-122"/>
-                <a:cs typeface="Arial" pitchFamily="34" charset="-120"/>
+                  <a:srgbClr val="C8161D"/>
+                </a:solidFill>
+                <a:latin typeface="Arial" pitchFamily="34" charset="0"/>
+                <a:ea typeface="BIZ UDPGothic" pitchFamily="34" charset="-122"/>
+                <a:cs typeface="BIZ UDPGothic" pitchFamily="34" charset="-120"/>
               </a:rPr>
               <a:t>タイミング</a:t>
             </a:r>
@@ -6417,11 +6417,11 @@
             <a:r>
               <a:rPr lang="en-US" sz="1300" dirty="0">
                 <a:solidFill>
-                  <a:srgbClr val="CCCCCC"/>
-                </a:solidFill>
-                <a:latin typeface="Arial" pitchFamily="34" charset="0"/>
-                <a:ea typeface="Arial" pitchFamily="34" charset="-122"/>
-                <a:cs typeface="Arial" pitchFamily="34" charset="-120"/>
+                  <a:srgbClr val="2B2F36"/>
+                </a:solidFill>
+                <a:latin typeface="Arial" pitchFamily="34" charset="0"/>
+                <a:ea typeface="BIZ UDPGothic" pitchFamily="34" charset="-122"/>
+                <a:cs typeface="BIZ UDPGothic" pitchFamily="34" charset="-120"/>
               </a:rPr>
               <a:t>例：4〜6月分の活動は、9月末までに提出</a:t>
             </a:r>
@@ -6446,11 +6446,11 @@
             </a:avLst>
           </a:prstGeom>
           <a:solidFill>
-            <a:srgbClr val="1A1A1A"/>
+            <a:srgbClr val="FFFFFF"/>
           </a:solidFill>
           <a:ln w="12700">
             <a:solidFill>
-              <a:srgbClr val="2E2E2E"/>
+              <a:srgbClr val="DDE0E6"/>
             </a:solidFill>
             <a:prstDash val="solid"/>
           </a:ln>
@@ -6483,11 +6483,11 @@
             <a:r>
               <a:rPr lang="en-US" sz="1300" b="1" dirty="0">
                 <a:solidFill>
-                  <a:srgbClr val="D62828"/>
-                </a:solidFill>
-                <a:latin typeface="Arial" pitchFamily="34" charset="0"/>
-                <a:ea typeface="Arial" pitchFamily="34" charset="-122"/>
-                <a:cs typeface="Arial" pitchFamily="34" charset="-120"/>
+                  <a:srgbClr val="C8161D"/>
+                </a:solidFill>
+                <a:latin typeface="Arial" pitchFamily="34" charset="0"/>
+                <a:ea typeface="BIZ UDPGothic" pitchFamily="34" charset="-122"/>
+                <a:cs typeface="BIZ UDPGothic" pitchFamily="34" charset="-120"/>
               </a:rPr>
               <a:t>報告の中身</a:t>
             </a:r>
@@ -6522,11 +6522,11 @@
             <a:r>
               <a:rPr lang="en-US" sz="1300" dirty="0">
                 <a:solidFill>
-                  <a:srgbClr val="CCCCCC"/>
-                </a:solidFill>
-                <a:latin typeface="Arial" pitchFamily="34" charset="0"/>
-                <a:ea typeface="Arial" pitchFamily="34" charset="-122"/>
-                <a:cs typeface="Arial" pitchFamily="34" charset="-120"/>
+                  <a:srgbClr val="2B2F36"/>
+                </a:solidFill>
+                <a:latin typeface="Arial" pitchFamily="34" charset="0"/>
+                <a:ea typeface="BIZ UDPGothic" pitchFamily="34" charset="-122"/>
+                <a:cs typeface="BIZ UDPGothic" pitchFamily="34" charset="-120"/>
               </a:rPr>
               <a:t>数字（使った金額・救われた人数など）＋現場の声（定性データ）</a:t>
             </a:r>
@@ -6551,11 +6551,11 @@
             </a:avLst>
           </a:prstGeom>
           <a:solidFill>
-            <a:srgbClr val="1A1A1A"/>
+            <a:srgbClr val="FFFFFF"/>
           </a:solidFill>
           <a:ln w="12700">
             <a:solidFill>
-              <a:srgbClr val="2E2E2E"/>
+              <a:srgbClr val="DDE0E6"/>
             </a:solidFill>
             <a:prstDash val="solid"/>
           </a:ln>
@@ -6588,11 +6588,11 @@
             <a:r>
               <a:rPr lang="en-US" sz="1300" b="1" dirty="0">
                 <a:solidFill>
-                  <a:srgbClr val="D62828"/>
-                </a:solidFill>
-                <a:latin typeface="Arial" pitchFamily="34" charset="0"/>
-                <a:ea typeface="Arial" pitchFamily="34" charset="-122"/>
-                <a:cs typeface="Arial" pitchFamily="34" charset="-120"/>
+                  <a:srgbClr val="C8161D"/>
+                </a:solidFill>
+                <a:latin typeface="Arial" pitchFamily="34" charset="0"/>
+                <a:ea typeface="BIZ UDPGothic" pitchFamily="34" charset="-122"/>
+                <a:cs typeface="BIZ UDPGothic" pitchFamily="34" charset="-120"/>
               </a:rPr>
               <a:t>公開方法</a:t>
             </a:r>
@@ -6627,11 +6627,11 @@
             <a:r>
               <a:rPr lang="en-US" sz="1300" dirty="0">
                 <a:solidFill>
-                  <a:srgbClr val="CCCCCC"/>
-                </a:solidFill>
-                <a:latin typeface="Arial" pitchFamily="34" charset="0"/>
-                <a:ea typeface="Arial" pitchFamily="34" charset="-122"/>
-                <a:cs typeface="Arial" pitchFamily="34" charset="-120"/>
+                  <a:srgbClr val="2B2F36"/>
+                </a:solidFill>
+                <a:latin typeface="Arial" pitchFamily="34" charset="0"/>
+                <a:ea typeface="BIZ UDPGothic" pitchFamily="34" charset="-122"/>
+                <a:cs typeface="BIZ UDPGothic" pitchFamily="34" charset="-120"/>
               </a:rPr>
               <a:t>マイナポータルで常時閲覧可能（誰でもいつでも確認できる）</a:t>
             </a:r>
@@ -6656,11 +6656,11 @@
             </a:avLst>
           </a:prstGeom>
           <a:solidFill>
-            <a:srgbClr val="2A1414"/>
+            <a:srgbClr val="FCEBEB"/>
           </a:solidFill>
           <a:ln w="19050">
             <a:solidFill>
-              <a:srgbClr val="D62828"/>
+              <a:srgbClr val="C8161D"/>
             </a:solidFill>
             <a:prstDash val="solid"/>
           </a:ln>
@@ -6720,11 +6720,11 @@
             <a:r>
               <a:rPr lang="en-US" sz="1500" b="1" dirty="0">
                 <a:solidFill>
-                  <a:srgbClr val="F5F5F0"/>
-                </a:solidFill>
-                <a:latin typeface="Arial" pitchFamily="34" charset="0"/>
-                <a:ea typeface="Arial" pitchFamily="34" charset="-122"/>
-                <a:cs typeface="Arial" pitchFamily="34" charset="-120"/>
+                  <a:srgbClr val="16181D"/>
+                </a:solidFill>
+                <a:latin typeface="Arial" pitchFamily="34" charset="0"/>
+                <a:ea typeface="BIZ UDPGothic" pitchFamily="34" charset="-122"/>
+                <a:cs typeface="BIZ UDPGothic" pitchFamily="34" charset="-120"/>
               </a:rPr>
               <a:t>報告しなかった場合：自治体が集まった寄付額を全額返却。寄付者の税控除はそのまま有効。</a:t>
             </a:r>
@@ -6746,7 +6746,7 @@
     <p:bg>
       <p:bgPr>
         <a:solidFill>
-          <a:srgbClr val="0A0A0A"/>
+          <a:srgbClr val="F5F6F8"/>
         </a:solidFill>
       </p:bgPr>
     </p:bg>
@@ -6791,11 +6791,11 @@
             <a:r>
               <a:rPr lang="en-US" sz="1200" b="1" spc="300" kern="0" dirty="0">
                 <a:solidFill>
-                  <a:srgbClr val="D62828"/>
-                </a:solidFill>
-                <a:latin typeface="Arial" pitchFamily="34" charset="0"/>
-                <a:ea typeface="Arial" pitchFamily="34" charset="-122"/>
-                <a:cs typeface="Arial" pitchFamily="34" charset="-120"/>
+                  <a:srgbClr val="C8161D"/>
+                </a:solidFill>
+                <a:latin typeface="Arial" pitchFamily="34" charset="0"/>
+                <a:ea typeface="BIZ UDPGothic" pitchFamily="34" charset="-122"/>
+                <a:cs typeface="BIZ UDPGothic" pitchFamily="34" charset="-120"/>
               </a:rPr>
               <a:t>4. 不正利用対策（3本柱）</a:t>
             </a:r>
@@ -6830,11 +6830,11 @@
             <a:r>
               <a:rPr lang="en-US" sz="3000" b="1" dirty="0">
                 <a:solidFill>
-                  <a:srgbClr val="F5F5F0"/>
-                </a:solidFill>
-                <a:latin typeface="Arial" pitchFamily="34" charset="0"/>
-                <a:ea typeface="Arial" pitchFamily="34" charset="-122"/>
-                <a:cs typeface="Arial" pitchFamily="34" charset="-120"/>
+                  <a:srgbClr val="16181D"/>
+                </a:solidFill>
+                <a:latin typeface="Arial" pitchFamily="34" charset="0"/>
+                <a:ea typeface="BIZ UDPGothic" pitchFamily="34" charset="-122"/>
+                <a:cs typeface="BIZ UDPGothic" pitchFamily="34" charset="-120"/>
               </a:rPr>
               <a:t>3つのリスクに、それぞれ対策を設ける</a:t>
             </a:r>
@@ -6869,11 +6869,11 @@
             <a:r>
               <a:rPr lang="en-US" sz="1000" dirty="0">
                 <a:solidFill>
-                  <a:srgbClr val="CCCCCC"/>
-                </a:solidFill>
-                <a:latin typeface="Arial" pitchFamily="34" charset="0"/>
-                <a:ea typeface="Arial" pitchFamily="34" charset="-122"/>
-                <a:cs typeface="Arial" pitchFamily="34" charset="-120"/>
+                  <a:srgbClr val="2B2F36"/>
+                </a:solidFill>
+                <a:latin typeface="Arial" pitchFamily="34" charset="0"/>
+                <a:ea typeface="BIZ UDPGothic" pitchFamily="34" charset="-122"/>
+                <a:cs typeface="BIZ UDPGothic" pitchFamily="34" charset="-120"/>
               </a:rPr>
               <a:t>16</a:t>
             </a:r>
@@ -6908,11 +6908,11 @@
             <a:r>
               <a:rPr lang="en-US" sz="900" dirty="0">
                 <a:solidFill>
-                  <a:srgbClr val="555555"/>
-                </a:solidFill>
-                <a:latin typeface="Arial" pitchFamily="34" charset="0"/>
-                <a:ea typeface="Arial" pitchFamily="34" charset="-122"/>
-                <a:cs typeface="Arial" pitchFamily="34" charset="-120"/>
+                  <a:srgbClr val="9AA0AA"/>
+                </a:solidFill>
+                <a:latin typeface="Arial" pitchFamily="34" charset="0"/>
+                <a:ea typeface="BIZ UDPGothic" pitchFamily="34" charset="-122"/>
+                <a:cs typeface="BIZ UDPGothic" pitchFamily="34" charset="-120"/>
               </a:rPr>
               <a:t>REBOOT JAPAN ── 提言005</a:t>
             </a:r>
@@ -6937,11 +6937,11 @@
             </a:avLst>
           </a:prstGeom>
           <a:solidFill>
-            <a:srgbClr val="1A1A1A"/>
+            <a:srgbClr val="FFFFFF"/>
           </a:solidFill>
           <a:ln w="12700">
             <a:solidFill>
-              <a:srgbClr val="2E2E2E"/>
+              <a:srgbClr val="DDE0E6"/>
             </a:solidFill>
             <a:prstDash val="solid"/>
           </a:ln>
@@ -6962,11 +6962,11 @@
             <a:avLst/>
           </a:prstGeom>
           <a:solidFill>
-            <a:srgbClr val="0A0A0A"/>
+            <a:srgbClr val="F5F6F8"/>
           </a:solidFill>
           <a:ln w="12700">
             <a:solidFill>
-              <a:srgbClr val="2E2E2E"/>
+              <a:srgbClr val="DDE0E6"/>
             </a:solidFill>
             <a:prstDash val="solid"/>
           </a:ln>
@@ -7023,11 +7023,11 @@
             <a:r>
               <a:rPr lang="en-US" sz="1600" b="1" dirty="0">
                 <a:solidFill>
-                  <a:srgbClr val="D62828"/>
-                </a:solidFill>
-                <a:latin typeface="Arial" pitchFamily="34" charset="0"/>
-                <a:ea typeface="Arial" pitchFamily="34" charset="-122"/>
-                <a:cs typeface="Arial" pitchFamily="34" charset="-120"/>
+                  <a:srgbClr val="C8161D"/>
+                </a:solidFill>
+                <a:latin typeface="Arial" pitchFamily="34" charset="0"/>
+                <a:ea typeface="BIZ UDPGothic" pitchFamily="34" charset="-122"/>
+                <a:cs typeface="BIZ UDPGothic" pitchFamily="34" charset="-120"/>
               </a:rPr>
               <a:t>なりすまし・架空施設</a:t>
             </a:r>
@@ -7065,11 +7065,11 @@
             <a:r>
               <a:rPr lang="en-US" sz="1250" dirty="0">
                 <a:solidFill>
-                  <a:srgbClr val="CCCCCC"/>
-                </a:solidFill>
-                <a:latin typeface="Arial" pitchFamily="34" charset="0"/>
-                <a:ea typeface="Arial" pitchFamily="34" charset="-122"/>
-                <a:cs typeface="Arial" pitchFamily="34" charset="-120"/>
+                  <a:srgbClr val="2B2F36"/>
+                </a:solidFill>
+                <a:latin typeface="Arial" pitchFamily="34" charset="0"/>
+                <a:ea typeface="BIZ UDPGothic" pitchFamily="34" charset="-122"/>
+                <a:cs typeface="BIZ UDPGothic" pitchFamily="34" charset="-120"/>
               </a:rPr>
               <a:t>マイナポータルに登録された正式な行政機関・施設のみメニュー掲載可。自治体コード・施設番号で紐づけ。</a:t>
             </a:r>
@@ -7094,11 +7094,11 @@
             </a:avLst>
           </a:prstGeom>
           <a:solidFill>
-            <a:srgbClr val="1A1A1A"/>
+            <a:srgbClr val="FFFFFF"/>
           </a:solidFill>
           <a:ln w="12700">
             <a:solidFill>
-              <a:srgbClr val="2E2E2E"/>
+              <a:srgbClr val="DDE0E6"/>
             </a:solidFill>
             <a:prstDash val="solid"/>
           </a:ln>
@@ -7119,11 +7119,11 @@
             <a:avLst/>
           </a:prstGeom>
           <a:solidFill>
-            <a:srgbClr val="0A0A0A"/>
+            <a:srgbClr val="F5F6F8"/>
           </a:solidFill>
           <a:ln w="12700">
             <a:solidFill>
-              <a:srgbClr val="2E2E2E"/>
+              <a:srgbClr val="DDE0E6"/>
             </a:solidFill>
             <a:prstDash val="solid"/>
           </a:ln>
@@ -7180,11 +7180,11 @@
             <a:r>
               <a:rPr lang="en-US" sz="1600" b="1" dirty="0">
                 <a:solidFill>
-                  <a:srgbClr val="D62828"/>
-                </a:solidFill>
-                <a:latin typeface="Arial" pitchFamily="34" charset="0"/>
-                <a:ea typeface="Arial" pitchFamily="34" charset="-122"/>
-                <a:cs typeface="Arial" pitchFamily="34" charset="-120"/>
+                  <a:srgbClr val="C8161D"/>
+                </a:solidFill>
+                <a:latin typeface="Arial" pitchFamily="34" charset="0"/>
+                <a:ea typeface="BIZ UDPGothic" pitchFamily="34" charset="-122"/>
+                <a:cs typeface="BIZ UDPGothic" pitchFamily="34" charset="-120"/>
               </a:rPr>
               <a:t>身内取引・自作自演</a:t>
             </a:r>
@@ -7222,11 +7222,11 @@
             <a:r>
               <a:rPr lang="en-US" sz="1250" dirty="0">
                 <a:solidFill>
-                  <a:srgbClr val="CCCCCC"/>
-                </a:solidFill>
-                <a:latin typeface="Arial" pitchFamily="34" charset="0"/>
-                <a:ea typeface="Arial" pitchFamily="34" charset="-122"/>
-                <a:cs typeface="Arial" pitchFamily="34" charset="-120"/>
+                  <a:srgbClr val="2B2F36"/>
+                </a:solidFill>
+                <a:latin typeface="Arial" pitchFamily="34" charset="0"/>
+                <a:ea typeface="BIZ UDPGothic" pitchFamily="34" charset="-122"/>
+                <a:cs typeface="BIZ UDPGothic" pitchFamily="34" charset="-120"/>
               </a:rPr>
               <a:t>当該施設の職員・親族は当該施設への寄付不可（事前ルール）。違反はインサイダー取引と同様の罪として扱う。</a:t>
             </a:r>
@@ -7251,11 +7251,11 @@
             </a:avLst>
           </a:prstGeom>
           <a:solidFill>
-            <a:srgbClr val="1A1A1A"/>
+            <a:srgbClr val="FFFFFF"/>
           </a:solidFill>
           <a:ln w="12700">
             <a:solidFill>
-              <a:srgbClr val="2E2E2E"/>
+              <a:srgbClr val="DDE0E6"/>
             </a:solidFill>
             <a:prstDash val="solid"/>
           </a:ln>
@@ -7276,11 +7276,11 @@
             <a:avLst/>
           </a:prstGeom>
           <a:solidFill>
-            <a:srgbClr val="0A0A0A"/>
+            <a:srgbClr val="F5F6F8"/>
           </a:solidFill>
           <a:ln w="12700">
             <a:solidFill>
-              <a:srgbClr val="2E2E2E"/>
+              <a:srgbClr val="DDE0E6"/>
             </a:solidFill>
             <a:prstDash val="solid"/>
           </a:ln>
@@ -7337,11 +7337,11 @@
             <a:r>
               <a:rPr lang="en-US" sz="1600" b="1" dirty="0">
                 <a:solidFill>
-                  <a:srgbClr val="D62828"/>
-                </a:solidFill>
-                <a:latin typeface="Arial" pitchFamily="34" charset="0"/>
-                <a:ea typeface="Arial" pitchFamily="34" charset="-122"/>
-                <a:cs typeface="Arial" pitchFamily="34" charset="-120"/>
+                  <a:srgbClr val="C8161D"/>
+                </a:solidFill>
+                <a:latin typeface="Arial" pitchFamily="34" charset="0"/>
+                <a:ea typeface="BIZ UDPGothic" pitchFamily="34" charset="-122"/>
+                <a:cs typeface="BIZ UDPGothic" pitchFamily="34" charset="-120"/>
               </a:rPr>
               <a:t>予算の過小申告</a:t>
             </a:r>
@@ -7379,11 +7379,11 @@
             <a:r>
               <a:rPr lang="en-US" sz="1250" dirty="0">
                 <a:solidFill>
-                  <a:srgbClr val="CCCCCC"/>
-                </a:solidFill>
-                <a:latin typeface="Arial" pitchFamily="34" charset="0"/>
-                <a:ea typeface="Arial" pitchFamily="34" charset="-122"/>
-                <a:cs typeface="Arial" pitchFamily="34" charset="-120"/>
+                  <a:srgbClr val="2B2F36"/>
+                </a:solidFill>
+                <a:latin typeface="Arial" pitchFamily="34" charset="0"/>
+                <a:ea typeface="BIZ UDPGothic" pitchFamily="34" charset="-122"/>
+                <a:cs typeface="BIZ UDPGothic" pitchFamily="34" charset="-120"/>
               </a:rPr>
               <a:t>上位自治体・国による予算申請額の事前審査。加えて115%キャップが二重の防波堤として機能する。</a:t>
             </a:r>
@@ -7405,7 +7405,7 @@
     <p:bg>
       <p:bgPr>
         <a:solidFill>
-          <a:srgbClr val="0A0A0A"/>
+          <a:srgbClr val="F5F6F8"/>
         </a:solidFill>
       </p:bgPr>
     </p:bg>
@@ -7450,11 +7450,11 @@
             <a:r>
               <a:rPr lang="en-US" sz="1200" b="1" spc="300" kern="0" dirty="0">
                 <a:solidFill>
-                  <a:srgbClr val="D62828"/>
-                </a:solidFill>
-                <a:latin typeface="Arial" pitchFamily="34" charset="0"/>
-                <a:ea typeface="Arial" pitchFamily="34" charset="-122"/>
-                <a:cs typeface="Arial" pitchFamily="34" charset="-120"/>
+                  <a:srgbClr val="C8161D"/>
+                </a:solidFill>
+                <a:latin typeface="Arial" pitchFamily="34" charset="0"/>
+                <a:ea typeface="BIZ UDPGothic" pitchFamily="34" charset="-122"/>
+                <a:cs typeface="BIZ UDPGothic" pitchFamily="34" charset="-120"/>
               </a:rPr>
               <a:t>5. 数字で見る：年収800万円の人に当てはめると</a:t>
             </a:r>
@@ -7489,11 +7489,11 @@
             <a:r>
               <a:rPr lang="en-US" sz="3000" b="1" dirty="0">
                 <a:solidFill>
-                  <a:srgbClr val="F5F5F0"/>
-                </a:solidFill>
-                <a:latin typeface="Arial" pitchFamily="34" charset="0"/>
-                <a:ea typeface="Arial" pitchFamily="34" charset="-122"/>
-                <a:cs typeface="Arial" pitchFamily="34" charset="-120"/>
+                  <a:srgbClr val="16181D"/>
+                </a:solidFill>
+                <a:latin typeface="Arial" pitchFamily="34" charset="0"/>
+                <a:ea typeface="BIZ UDPGothic" pitchFamily="34" charset="-122"/>
+                <a:cs typeface="BIZ UDPGothic" pitchFamily="34" charset="-120"/>
               </a:rPr>
               <a:t>今回の提言を年収800万円の人に当てはめると</a:t>
             </a:r>
@@ -7528,11 +7528,11 @@
             <a:r>
               <a:rPr lang="en-US" sz="1000" dirty="0">
                 <a:solidFill>
-                  <a:srgbClr val="CCCCCC"/>
-                </a:solidFill>
-                <a:latin typeface="Arial" pitchFamily="34" charset="0"/>
-                <a:ea typeface="Arial" pitchFamily="34" charset="-122"/>
-                <a:cs typeface="Arial" pitchFamily="34" charset="-120"/>
+                  <a:srgbClr val="2B2F36"/>
+                </a:solidFill>
+                <a:latin typeface="Arial" pitchFamily="34" charset="0"/>
+                <a:ea typeface="BIZ UDPGothic" pitchFamily="34" charset="-122"/>
+                <a:cs typeface="BIZ UDPGothic" pitchFamily="34" charset="-120"/>
               </a:rPr>
               <a:t>17</a:t>
             </a:r>
@@ -7567,11 +7567,11 @@
             <a:r>
               <a:rPr lang="en-US" sz="900" dirty="0">
                 <a:solidFill>
-                  <a:srgbClr val="555555"/>
-                </a:solidFill>
-                <a:latin typeface="Arial" pitchFamily="34" charset="0"/>
-                <a:ea typeface="Arial" pitchFamily="34" charset="-122"/>
-                <a:cs typeface="Arial" pitchFamily="34" charset="-120"/>
+                  <a:srgbClr val="9AA0AA"/>
+                </a:solidFill>
+                <a:latin typeface="Arial" pitchFamily="34" charset="0"/>
+                <a:ea typeface="BIZ UDPGothic" pitchFamily="34" charset="-122"/>
+                <a:cs typeface="BIZ UDPGothic" pitchFamily="34" charset="-120"/>
               </a:rPr>
               <a:t>REBOOT JAPAN ── 提言005</a:t>
             </a:r>
@@ -7596,11 +7596,11 @@
             </a:avLst>
           </a:prstGeom>
           <a:solidFill>
-            <a:srgbClr val="1A1A1A"/>
+            <a:srgbClr val="FFFFFF"/>
           </a:solidFill>
           <a:ln w="12700">
             <a:solidFill>
-              <a:srgbClr val="2E2E2E"/>
+              <a:srgbClr val="DDE0E6"/>
             </a:solidFill>
             <a:prstDash val="solid"/>
           </a:ln>
@@ -7633,11 +7633,11 @@
             <a:r>
               <a:rPr lang="en-US" sz="1300" dirty="0">
                 <a:solidFill>
-                  <a:srgbClr val="CCCCCC"/>
-                </a:solidFill>
-                <a:latin typeface="Arial" pitchFamily="34" charset="0"/>
-                <a:ea typeface="Arial" pitchFamily="34" charset="-122"/>
-                <a:cs typeface="Arial" pitchFamily="34" charset="-120"/>
+                  <a:srgbClr val="2B2F36"/>
+                </a:solidFill>
+                <a:latin typeface="Arial" pitchFamily="34" charset="0"/>
+                <a:ea typeface="BIZ UDPGothic" pitchFamily="34" charset="-122"/>
+                <a:cs typeface="BIZ UDPGothic" pitchFamily="34" charset="-120"/>
               </a:rPr>
               <a:t>現行の所得税額</a:t>
             </a:r>
@@ -7672,11 +7672,11 @@
             <a:r>
               <a:rPr lang="en-US" sz="2200" b="1" dirty="0">
                 <a:solidFill>
-                  <a:srgbClr val="F5F5F0"/>
-                </a:solidFill>
-                <a:latin typeface="Arial" pitchFamily="34" charset="0"/>
-                <a:ea typeface="Arial" pitchFamily="34" charset="-122"/>
-                <a:cs typeface="Arial" pitchFamily="34" charset="-120"/>
+                  <a:srgbClr val="16181D"/>
+                </a:solidFill>
+                <a:latin typeface="Arial" pitchFamily="34" charset="0"/>
+                <a:ea typeface="BIZ UDPGothic" pitchFamily="34" charset="-122"/>
+                <a:cs typeface="BIZ UDPGothic" pitchFamily="34" charset="-120"/>
               </a:rPr>
               <a:t>約45.7万円</a:t>
             </a:r>
@@ -7711,11 +7711,11 @@
             <a:r>
               <a:rPr lang="en-US" sz="1000" dirty="0">
                 <a:solidFill>
-                  <a:srgbClr val="888888"/>
-                </a:solidFill>
-                <a:latin typeface="Arial" pitchFamily="34" charset="0"/>
-                <a:ea typeface="Arial" pitchFamily="34" charset="-122"/>
-                <a:cs typeface="Arial" pitchFamily="34" charset="-120"/>
+                  <a:srgbClr val="626875"/>
+                </a:solidFill>
+                <a:latin typeface="Arial" pitchFamily="34" charset="0"/>
+                <a:ea typeface="BIZ UDPGothic" pitchFamily="34" charset="-122"/>
+                <a:cs typeface="BIZ UDPGothic" pitchFamily="34" charset="-120"/>
               </a:rPr>
               <a:t>累進課税（実効税率約5.7%）</a:t>
             </a:r>
@@ -7740,11 +7740,11 @@
             </a:avLst>
           </a:prstGeom>
           <a:solidFill>
-            <a:srgbClr val="1A1A1A"/>
+            <a:srgbClr val="FFFFFF"/>
           </a:solidFill>
           <a:ln w="12700">
             <a:solidFill>
-              <a:srgbClr val="2E2E2E"/>
+              <a:srgbClr val="DDE0E6"/>
             </a:solidFill>
             <a:prstDash val="solid"/>
           </a:ln>
@@ -7777,11 +7777,11 @@
             <a:r>
               <a:rPr lang="en-US" sz="1300" dirty="0">
                 <a:solidFill>
-                  <a:srgbClr val="CCCCCC"/>
-                </a:solidFill>
-                <a:latin typeface="Arial" pitchFamily="34" charset="0"/>
-                <a:ea typeface="Arial" pitchFamily="34" charset="-122"/>
-                <a:cs typeface="Arial" pitchFamily="34" charset="-120"/>
+                  <a:srgbClr val="2B2F36"/>
+                </a:solidFill>
+                <a:latin typeface="Arial" pitchFamily="34" charset="0"/>
+                <a:ea typeface="BIZ UDPGothic" pitchFamily="34" charset="-122"/>
+                <a:cs typeface="BIZ UDPGothic" pitchFamily="34" charset="-120"/>
               </a:rPr>
               <a:t>現行の住民税額</a:t>
             </a:r>
@@ -7816,11 +7816,11 @@
             <a:r>
               <a:rPr lang="en-US" sz="2200" b="1" dirty="0">
                 <a:solidFill>
-                  <a:srgbClr val="F5F5F0"/>
-                </a:solidFill>
-                <a:latin typeface="Arial" pitchFamily="34" charset="0"/>
-                <a:ea typeface="Arial" pitchFamily="34" charset="-122"/>
-                <a:cs typeface="Arial" pitchFamily="34" charset="-120"/>
+                  <a:srgbClr val="16181D"/>
+                </a:solidFill>
+                <a:latin typeface="Arial" pitchFamily="34" charset="0"/>
+                <a:ea typeface="BIZ UDPGothic" pitchFamily="34" charset="-122"/>
+                <a:cs typeface="BIZ UDPGothic" pitchFamily="34" charset="-120"/>
               </a:rPr>
               <a:t>約44.7万円</a:t>
             </a:r>
@@ -7855,11 +7855,11 @@
             <a:r>
               <a:rPr lang="en-US" sz="1000" dirty="0">
                 <a:solidFill>
-                  <a:srgbClr val="888888"/>
-                </a:solidFill>
-                <a:latin typeface="Arial" pitchFamily="34" charset="0"/>
-                <a:ea typeface="Arial" pitchFamily="34" charset="-122"/>
-                <a:cs typeface="Arial" pitchFamily="34" charset="-120"/>
+                  <a:srgbClr val="626875"/>
+                </a:solidFill>
+                <a:latin typeface="Arial" pitchFamily="34" charset="0"/>
+                <a:ea typeface="BIZ UDPGothic" pitchFamily="34" charset="-122"/>
+                <a:cs typeface="BIZ UDPGothic" pitchFamily="34" charset="-120"/>
               </a:rPr>
               <a:t>一律10%</a:t>
             </a:r>
@@ -7884,11 +7884,11 @@
             </a:avLst>
           </a:prstGeom>
           <a:solidFill>
-            <a:srgbClr val="2A1414"/>
+            <a:srgbClr val="FCEBEB"/>
           </a:solidFill>
           <a:ln w="19050">
             <a:solidFill>
-              <a:srgbClr val="D62828"/>
+              <a:srgbClr val="C8161D"/>
             </a:solidFill>
             <a:prstDash val="solid"/>
           </a:ln>
@@ -7921,11 +7921,11 @@
             <a:r>
               <a:rPr lang="en-US" sz="1500" b="1" dirty="0">
                 <a:solidFill>
-                  <a:srgbClr val="D62828"/>
-                </a:solidFill>
-                <a:latin typeface="Arial" pitchFamily="34" charset="0"/>
-                <a:ea typeface="Arial" pitchFamily="34" charset="-122"/>
-                <a:cs typeface="Arial" pitchFamily="34" charset="-120"/>
+                  <a:srgbClr val="C8161D"/>
+                </a:solidFill>
+                <a:latin typeface="Arial" pitchFamily="34" charset="0"/>
+                <a:ea typeface="BIZ UDPGothic" pitchFamily="34" charset="-122"/>
+                <a:cs typeface="BIZ UDPGothic" pitchFamily="34" charset="-120"/>
               </a:rPr>
               <a:t>005を最大限使うと</a:t>
             </a:r>
@@ -7960,11 +7960,11 @@
             <a:r>
               <a:rPr lang="en-US" sz="1250" dirty="0">
                 <a:solidFill>
-                  <a:srgbClr val="CCCCCC"/>
-                </a:solidFill>
-                <a:latin typeface="Arial" pitchFamily="34" charset="0"/>
-                <a:ea typeface="Arial" pitchFamily="34" charset="-122"/>
-                <a:cs typeface="Arial" pitchFamily="34" charset="-120"/>
+                  <a:srgbClr val="2B2F36"/>
+                </a:solidFill>
+                <a:latin typeface="Arial" pitchFamily="34" charset="0"/>
+                <a:ea typeface="BIZ UDPGothic" pitchFamily="34" charset="-122"/>
+                <a:cs typeface="BIZ UDPGothic" pitchFamily="34" charset="-120"/>
               </a:rPr>
               <a:t>所得税の寄付枠</a:t>
             </a:r>
@@ -7999,11 +7999,11 @@
             <a:r>
               <a:rPr lang="en-US" sz="1300" b="1" dirty="0">
                 <a:solidFill>
-                  <a:srgbClr val="CCCCCC"/>
-                </a:solidFill>
-                <a:latin typeface="Arial" pitchFamily="34" charset="0"/>
-                <a:ea typeface="Arial" pitchFamily="34" charset="-122"/>
-                <a:cs typeface="Arial" pitchFamily="34" charset="-120"/>
+                  <a:srgbClr val="2B2F36"/>
+                </a:solidFill>
+                <a:latin typeface="Arial" pitchFamily="34" charset="0"/>
+                <a:ea typeface="BIZ UDPGothic" pitchFamily="34" charset="-122"/>
+                <a:cs typeface="BIZ UDPGothic" pitchFamily="34" charset="-120"/>
               </a:rPr>
               <a:t>約23.6万円</a:t>
             </a:r>
@@ -8038,11 +8038,11 @@
             <a:r>
               <a:rPr lang="en-US" sz="1250" dirty="0">
                 <a:solidFill>
-                  <a:srgbClr val="CCCCCC"/>
-                </a:solidFill>
-                <a:latin typeface="Arial" pitchFamily="34" charset="0"/>
-                <a:ea typeface="Arial" pitchFamily="34" charset="-122"/>
-                <a:cs typeface="Arial" pitchFamily="34" charset="-120"/>
+                  <a:srgbClr val="2B2F36"/>
+                </a:solidFill>
+                <a:latin typeface="Arial" pitchFamily="34" charset="0"/>
+                <a:ea typeface="BIZ UDPGothic" pitchFamily="34" charset="-122"/>
+                <a:cs typeface="BIZ UDPGothic" pitchFamily="34" charset="-120"/>
               </a:rPr>
               <a:t>住民税の寄付枠（50%）</a:t>
             </a:r>
@@ -8077,11 +8077,11 @@
             <a:r>
               <a:rPr lang="en-US" sz="1300" b="1" dirty="0">
                 <a:solidFill>
-                  <a:srgbClr val="CCCCCC"/>
-                </a:solidFill>
-                <a:latin typeface="Arial" pitchFamily="34" charset="0"/>
-                <a:ea typeface="Arial" pitchFamily="34" charset="-122"/>
-                <a:cs typeface="Arial" pitchFamily="34" charset="-120"/>
+                  <a:srgbClr val="2B2F36"/>
+                </a:solidFill>
+                <a:latin typeface="Arial" pitchFamily="34" charset="0"/>
+                <a:ea typeface="BIZ UDPGothic" pitchFamily="34" charset="-122"/>
+                <a:cs typeface="BIZ UDPGothic" pitchFamily="34" charset="-120"/>
               </a:rPr>
               <a:t>約22.4万円</a:t>
             </a:r>
@@ -8116,11 +8116,11 @@
             <a:r>
               <a:rPr lang="en-US" sz="1250" dirty="0">
                 <a:solidFill>
-                  <a:srgbClr val="CCCCCC"/>
-                </a:solidFill>
-                <a:latin typeface="Arial" pitchFamily="34" charset="0"/>
-                <a:ea typeface="Arial" pitchFamily="34" charset="-122"/>
-                <a:cs typeface="Arial" pitchFamily="34" charset="-120"/>
+                  <a:srgbClr val="2B2F36"/>
+                </a:solidFill>
+                <a:latin typeface="Arial" pitchFamily="34" charset="0"/>
+                <a:ea typeface="BIZ UDPGothic" pitchFamily="34" charset="-122"/>
+                <a:cs typeface="BIZ UDPGothic" pitchFamily="34" charset="-120"/>
               </a:rPr>
               <a:t>　うち地元へ（75%）</a:t>
             </a:r>
@@ -8155,11 +8155,11 @@
             <a:r>
               <a:rPr lang="en-US" sz="1300" b="1" dirty="0">
                 <a:solidFill>
-                  <a:srgbClr val="CCCCCC"/>
-                </a:solidFill>
-                <a:latin typeface="Arial" pitchFamily="34" charset="0"/>
-                <a:ea typeface="Arial" pitchFamily="34" charset="-122"/>
-                <a:cs typeface="Arial" pitchFamily="34" charset="-120"/>
+                  <a:srgbClr val="2B2F36"/>
+                </a:solidFill>
+                <a:latin typeface="Arial" pitchFamily="34" charset="0"/>
+                <a:ea typeface="BIZ UDPGothic" pitchFamily="34" charset="-122"/>
+                <a:cs typeface="BIZ UDPGothic" pitchFamily="34" charset="-120"/>
               </a:rPr>
               <a:t>約16.8万円</a:t>
             </a:r>
@@ -8194,11 +8194,11 @@
             <a:r>
               <a:rPr lang="en-US" sz="1250" dirty="0">
                 <a:solidFill>
-                  <a:srgbClr val="CCCCCC"/>
-                </a:solidFill>
-                <a:latin typeface="Arial" pitchFamily="34" charset="0"/>
-                <a:ea typeface="Arial" pitchFamily="34" charset="-122"/>
-                <a:cs typeface="Arial" pitchFamily="34" charset="-120"/>
+                  <a:srgbClr val="2B2F36"/>
+                </a:solidFill>
+                <a:latin typeface="Arial" pitchFamily="34" charset="0"/>
+                <a:ea typeface="BIZ UDPGothic" pitchFamily="34" charset="-122"/>
+                <a:cs typeface="BIZ UDPGothic" pitchFamily="34" charset="-120"/>
               </a:rPr>
               <a:t>　うち自由指定（25%）</a:t>
             </a:r>
@@ -8233,11 +8233,11 @@
             <a:r>
               <a:rPr lang="en-US" sz="1300" b="1" dirty="0">
                 <a:solidFill>
-                  <a:srgbClr val="CCCCCC"/>
-                </a:solidFill>
-                <a:latin typeface="Arial" pitchFamily="34" charset="0"/>
-                <a:ea typeface="Arial" pitchFamily="34" charset="-122"/>
-                <a:cs typeface="Arial" pitchFamily="34" charset="-120"/>
+                  <a:srgbClr val="2B2F36"/>
+                </a:solidFill>
+                <a:latin typeface="Arial" pitchFamily="34" charset="0"/>
+                <a:ea typeface="BIZ UDPGothic" pitchFamily="34" charset="-122"/>
+                <a:cs typeface="BIZ UDPGothic" pitchFamily="34" charset="-120"/>
               </a:rPr>
               <a:t>約5.6万円</a:t>
             </a:r>
@@ -8272,11 +8272,11 @@
             <a:r>
               <a:rPr lang="en-US" sz="1400" b="1" dirty="0">
                 <a:solidFill>
-                  <a:srgbClr val="F5F5F0"/>
-                </a:solidFill>
-                <a:latin typeface="Arial" pitchFamily="34" charset="0"/>
-                <a:ea typeface="Arial" pitchFamily="34" charset="-122"/>
-                <a:cs typeface="Arial" pitchFamily="34" charset="-120"/>
+                  <a:srgbClr val="16181D"/>
+                </a:solidFill>
+                <a:latin typeface="Arial" pitchFamily="34" charset="0"/>
+                <a:ea typeface="BIZ UDPGothic" pitchFamily="34" charset="-122"/>
+                <a:cs typeface="BIZ UDPGothic" pitchFamily="34" charset="-120"/>
               </a:rPr>
               <a:t>合計寄付可能額</a:t>
             </a:r>
@@ -8311,11 +8311,11 @@
             <a:r>
               <a:rPr lang="en-US" sz="1500" b="1" dirty="0">
                 <a:solidFill>
-                  <a:srgbClr val="D62828"/>
-                </a:solidFill>
-                <a:latin typeface="Arial" pitchFamily="34" charset="0"/>
-                <a:ea typeface="Arial" pitchFamily="34" charset="-122"/>
-                <a:cs typeface="Arial" pitchFamily="34" charset="-120"/>
+                  <a:srgbClr val="C8161D"/>
+                </a:solidFill>
+                <a:latin typeface="Arial" pitchFamily="34" charset="0"/>
+                <a:ea typeface="BIZ UDPGothic" pitchFamily="34" charset="-122"/>
+                <a:cs typeface="BIZ UDPGothic" pitchFamily="34" charset="-120"/>
               </a:rPr>
               <a:t>約46万円</a:t>
             </a:r>
@@ -8337,7 +8337,7 @@
     <p:bg>
       <p:bgPr>
         <a:solidFill>
-          <a:srgbClr val="0A0A0A"/>
+          <a:srgbClr val="F5F6F8"/>
         </a:solidFill>
       </p:bgPr>
     </p:bg>
@@ -8382,11 +8382,11 @@
             <a:r>
               <a:rPr lang="en-US" sz="1200" b="1" spc="300" kern="0" dirty="0">
                 <a:solidFill>
-                  <a:srgbClr val="D62828"/>
-                </a:solidFill>
-                <a:latin typeface="Arial" pitchFamily="34" charset="0"/>
-                <a:ea typeface="Arial" pitchFamily="34" charset="-122"/>
-                <a:cs typeface="Arial" pitchFamily="34" charset="-120"/>
+                  <a:srgbClr val="C8161D"/>
+                </a:solidFill>
+                <a:latin typeface="Arial" pitchFamily="34" charset="0"/>
+                <a:ea typeface="BIZ UDPGothic" pitchFamily="34" charset="-122"/>
+                <a:cs typeface="BIZ UDPGothic" pitchFamily="34" charset="-120"/>
               </a:rPr>
               <a:t>5. 全国規模のマクロ試算</a:t>
             </a:r>
@@ -8421,11 +8421,11 @@
             <a:r>
               <a:rPr lang="en-US" sz="3000" b="1" dirty="0">
                 <a:solidFill>
-                  <a:srgbClr val="F5F5F0"/>
-                </a:solidFill>
-                <a:latin typeface="Arial" pitchFamily="34" charset="0"/>
-                <a:ea typeface="Arial" pitchFamily="34" charset="-122"/>
-                <a:cs typeface="Arial" pitchFamily="34" charset="-120"/>
+                  <a:srgbClr val="16181D"/>
+                </a:solidFill>
+                <a:latin typeface="Arial" pitchFamily="34" charset="0"/>
+                <a:ea typeface="BIZ UDPGothic" pitchFamily="34" charset="-122"/>
+                <a:cs typeface="BIZ UDPGothic" pitchFamily="34" charset="-120"/>
               </a:rPr>
               <a:t>理論上の最大値と、現実的なシナリオ</a:t>
             </a:r>
@@ -8460,11 +8460,11 @@
             <a:r>
               <a:rPr lang="en-US" sz="1000" dirty="0">
                 <a:solidFill>
-                  <a:srgbClr val="CCCCCC"/>
-                </a:solidFill>
-                <a:latin typeface="Arial" pitchFamily="34" charset="0"/>
-                <a:ea typeface="Arial" pitchFamily="34" charset="-122"/>
-                <a:cs typeface="Arial" pitchFamily="34" charset="-120"/>
+                  <a:srgbClr val="2B2F36"/>
+                </a:solidFill>
+                <a:latin typeface="Arial" pitchFamily="34" charset="0"/>
+                <a:ea typeface="BIZ UDPGothic" pitchFamily="34" charset="-122"/>
+                <a:cs typeface="BIZ UDPGothic" pitchFamily="34" charset="-120"/>
               </a:rPr>
               <a:t>18</a:t>
             </a:r>
@@ -8499,11 +8499,11 @@
             <a:r>
               <a:rPr lang="en-US" sz="900" dirty="0">
                 <a:solidFill>
-                  <a:srgbClr val="555555"/>
-                </a:solidFill>
-                <a:latin typeface="Arial" pitchFamily="34" charset="0"/>
-                <a:ea typeface="Arial" pitchFamily="34" charset="-122"/>
-                <a:cs typeface="Arial" pitchFamily="34" charset="-120"/>
+                  <a:srgbClr val="9AA0AA"/>
+                </a:solidFill>
+                <a:latin typeface="Arial" pitchFamily="34" charset="0"/>
+                <a:ea typeface="BIZ UDPGothic" pitchFamily="34" charset="-122"/>
+                <a:cs typeface="BIZ UDPGothic" pitchFamily="34" charset="-120"/>
               </a:rPr>
               <a:t>REBOOT JAPAN ── 提言005</a:t>
             </a:r>
@@ -8538,11 +8538,11 @@
             <a:r>
               <a:rPr lang="en-US" sz="1250" dirty="0">
                 <a:solidFill>
-                  <a:srgbClr val="888888"/>
-                </a:solidFill>
-                <a:latin typeface="Arial" pitchFamily="34" charset="0"/>
-                <a:ea typeface="Arial" pitchFamily="34" charset="-122"/>
-                <a:cs typeface="Arial" pitchFamily="34" charset="-120"/>
+                  <a:srgbClr val="626875"/>
+                </a:solidFill>
+                <a:latin typeface="Arial" pitchFamily="34" charset="0"/>
+                <a:ea typeface="BIZ UDPGothic" pitchFamily="34" charset="-122"/>
+                <a:cs typeface="BIZ UDPGothic" pitchFamily="34" charset="-120"/>
               </a:rPr>
               <a:t>国税庁「民間給与実態統計調査」（令和6年分）をベースに、4つの年収層の人数と寄付可能枠を掛け合わせた概算。</a:t>
             </a:r>
@@ -8567,7 +8567,7 @@
           <a:noFill/>
           <a:ln w="12700">
             <a:solidFill>
-              <a:srgbClr val="2E2E2E"/>
+              <a:srgbClr val="DDE0E6"/>
             </a:solidFill>
             <a:prstDash val="solid"/>
           </a:ln>
@@ -8600,11 +8600,11 @@
             <a:r>
               <a:rPr lang="en-US" sz="1300" dirty="0">
                 <a:solidFill>
-                  <a:srgbClr val="CCCCCC"/>
-                </a:solidFill>
-                <a:latin typeface="Arial" pitchFamily="34" charset="0"/>
-                <a:ea typeface="Arial" pitchFamily="34" charset="-122"/>
-                <a:cs typeface="Arial" pitchFamily="34" charset="-120"/>
+                  <a:srgbClr val="2B2F36"/>
+                </a:solidFill>
+                <a:latin typeface="Arial" pitchFamily="34" charset="0"/>
+                <a:ea typeface="BIZ UDPGothic" pitchFamily="34" charset="-122"/>
+                <a:cs typeface="BIZ UDPGothic" pitchFamily="34" charset="-120"/>
               </a:rPr>
               <a:t>理論上の最大値</a:t>
             </a:r>
@@ -8639,11 +8639,11 @@
             <a:r>
               <a:rPr lang="en-US" sz="1100" dirty="0">
                 <a:solidFill>
-                  <a:srgbClr val="888888"/>
-                </a:solidFill>
-                <a:latin typeface="Arial" pitchFamily="34" charset="0"/>
-                <a:ea typeface="Arial" pitchFamily="34" charset="-122"/>
-                <a:cs typeface="Arial" pitchFamily="34" charset="-120"/>
+                  <a:srgbClr val="626875"/>
+                </a:solidFill>
+                <a:latin typeface="Arial" pitchFamily="34" charset="0"/>
+                <a:ea typeface="BIZ UDPGothic" pitchFamily="34" charset="-122"/>
+                <a:cs typeface="BIZ UDPGothic" pitchFamily="34" charset="-120"/>
               </a:rPr>
               <a:t>全員が上限まで使い切った場合</a:t>
             </a:r>
@@ -8678,11 +8678,11 @@
             <a:r>
               <a:rPr lang="en-US" sz="5200" b="1" dirty="0">
                 <a:solidFill>
-                  <a:srgbClr val="D62828"/>
-                </a:solidFill>
-                <a:latin typeface="Arial" pitchFamily="34" charset="0"/>
-                <a:ea typeface="Arial" pitchFamily="34" charset="-122"/>
-                <a:cs typeface="Arial" pitchFamily="34" charset="-120"/>
+                  <a:srgbClr val="C8161D"/>
+                </a:solidFill>
+                <a:latin typeface="Arial" pitchFamily="34" charset="0"/>
+                <a:ea typeface="BIZ UDPGothic" pitchFamily="34" charset="-122"/>
+                <a:cs typeface="BIZ UDPGothic" pitchFamily="34" charset="-120"/>
               </a:rPr>
               <a:t>約4.7兆円</a:t>
             </a:r>
@@ -8717,11 +8717,11 @@
             <a:r>
               <a:rPr lang="en-US" sz="1300" dirty="0">
                 <a:solidFill>
-                  <a:srgbClr val="CCCCCC"/>
-                </a:solidFill>
-                <a:latin typeface="Arial" pitchFamily="34" charset="0"/>
-                <a:ea typeface="Arial" pitchFamily="34" charset="-122"/>
-                <a:cs typeface="Arial" pitchFamily="34" charset="-120"/>
+                  <a:srgbClr val="2B2F36"/>
+                </a:solidFill>
+                <a:latin typeface="Arial" pitchFamily="34" charset="0"/>
+                <a:ea typeface="BIZ UDPGothic" pitchFamily="34" charset="-122"/>
+                <a:cs typeface="BIZ UDPGothic" pitchFamily="34" charset="-120"/>
               </a:rPr>
               <a:t>所得税枠＋住民税枠の合計</a:t>
             </a:r>
@@ -8756,11 +8756,11 @@
             <a:r>
               <a:rPr lang="en-US" sz="1300" dirty="0">
                 <a:solidFill>
-                  <a:srgbClr val="CCCCCC"/>
-                </a:solidFill>
-                <a:latin typeface="Arial" pitchFamily="34" charset="0"/>
-                <a:ea typeface="Arial" pitchFamily="34" charset="-122"/>
-                <a:cs typeface="Arial" pitchFamily="34" charset="-120"/>
+                  <a:srgbClr val="2B2F36"/>
+                </a:solidFill>
+                <a:latin typeface="Arial" pitchFamily="34" charset="0"/>
+                <a:ea typeface="BIZ UDPGothic" pitchFamily="34" charset="-122"/>
+                <a:cs typeface="BIZ UDPGothic" pitchFamily="34" charset="-120"/>
               </a:rPr>
               <a:t>現実的な利用率シナリオ</a:t>
             </a:r>
@@ -8785,11 +8785,11 @@
             </a:avLst>
           </a:prstGeom>
           <a:solidFill>
-            <a:srgbClr val="1A1A1A"/>
+            <a:srgbClr val="FFFFFF"/>
           </a:solidFill>
           <a:ln w="12700">
             <a:solidFill>
-              <a:srgbClr val="2E2E2E"/>
+              <a:srgbClr val="DDE0E6"/>
             </a:solidFill>
             <a:prstDash val="solid"/>
           </a:ln>
@@ -8822,11 +8822,11 @@
             <a:r>
               <a:rPr lang="en-US" sz="1300" dirty="0">
                 <a:solidFill>
-                  <a:srgbClr val="CCCCCC"/>
-                </a:solidFill>
-                <a:latin typeface="Arial" pitchFamily="34" charset="0"/>
-                <a:ea typeface="Arial" pitchFamily="34" charset="-122"/>
-                <a:cs typeface="Arial" pitchFamily="34" charset="-120"/>
+                  <a:srgbClr val="2B2F36"/>
+                </a:solidFill>
+                <a:latin typeface="Arial" pitchFamily="34" charset="0"/>
+                <a:ea typeface="BIZ UDPGothic" pitchFamily="34" charset="-122"/>
+                <a:cs typeface="BIZ UDPGothic" pitchFamily="34" charset="-120"/>
               </a:rPr>
               <a:t>利用率 5%</a:t>
             </a:r>
@@ -8861,11 +8861,11 @@
             <a:r>
               <a:rPr lang="en-US" sz="1500" b="1" dirty="0">
                 <a:solidFill>
-                  <a:srgbClr val="D62828"/>
-                </a:solidFill>
-                <a:latin typeface="Arial" pitchFamily="34" charset="0"/>
-                <a:ea typeface="Arial" pitchFamily="34" charset="-122"/>
-                <a:cs typeface="Arial" pitchFamily="34" charset="-120"/>
+                  <a:srgbClr val="C8161D"/>
+                </a:solidFill>
+                <a:latin typeface="Arial" pitchFamily="34" charset="0"/>
+                <a:ea typeface="BIZ UDPGothic" pitchFamily="34" charset="-122"/>
+                <a:cs typeface="BIZ UDPGothic" pitchFamily="34" charset="-120"/>
               </a:rPr>
               <a:t>約2,370億円</a:t>
             </a:r>
@@ -8890,11 +8890,11 @@
             </a:avLst>
           </a:prstGeom>
           <a:solidFill>
-            <a:srgbClr val="1A1A1A"/>
+            <a:srgbClr val="FFFFFF"/>
           </a:solidFill>
           <a:ln w="12700">
             <a:solidFill>
-              <a:srgbClr val="2E2E2E"/>
+              <a:srgbClr val="DDE0E6"/>
             </a:solidFill>
             <a:prstDash val="solid"/>
           </a:ln>
@@ -8927,11 +8927,11 @@
             <a:r>
               <a:rPr lang="en-US" sz="1300" dirty="0">
                 <a:solidFill>
-                  <a:srgbClr val="CCCCCC"/>
-                </a:solidFill>
-                <a:latin typeface="Arial" pitchFamily="34" charset="0"/>
-                <a:ea typeface="Arial" pitchFamily="34" charset="-122"/>
-                <a:cs typeface="Arial" pitchFamily="34" charset="-120"/>
+                  <a:srgbClr val="2B2F36"/>
+                </a:solidFill>
+                <a:latin typeface="Arial" pitchFamily="34" charset="0"/>
+                <a:ea typeface="BIZ UDPGothic" pitchFamily="34" charset="-122"/>
+                <a:cs typeface="BIZ UDPGothic" pitchFamily="34" charset="-120"/>
               </a:rPr>
               <a:t>利用率 10%</a:t>
             </a:r>
@@ -8966,11 +8966,11 @@
             <a:r>
               <a:rPr lang="en-US" sz="1500" b="1" dirty="0">
                 <a:solidFill>
-                  <a:srgbClr val="D62828"/>
-                </a:solidFill>
-                <a:latin typeface="Arial" pitchFamily="34" charset="0"/>
-                <a:ea typeface="Arial" pitchFamily="34" charset="-122"/>
-                <a:cs typeface="Arial" pitchFamily="34" charset="-120"/>
+                  <a:srgbClr val="C8161D"/>
+                </a:solidFill>
+                <a:latin typeface="Arial" pitchFamily="34" charset="0"/>
+                <a:ea typeface="BIZ UDPGothic" pitchFamily="34" charset="-122"/>
+                <a:cs typeface="BIZ UDPGothic" pitchFamily="34" charset="-120"/>
               </a:rPr>
               <a:t>約4,739億円</a:t>
             </a:r>
@@ -8995,11 +8995,11 @@
             </a:avLst>
           </a:prstGeom>
           <a:solidFill>
-            <a:srgbClr val="1A1A1A"/>
+            <a:srgbClr val="FFFFFF"/>
           </a:solidFill>
           <a:ln w="12700">
             <a:solidFill>
-              <a:srgbClr val="2E2E2E"/>
+              <a:srgbClr val="DDE0E6"/>
             </a:solidFill>
             <a:prstDash val="solid"/>
           </a:ln>
@@ -9032,11 +9032,11 @@
             <a:r>
               <a:rPr lang="en-US" sz="1300" dirty="0">
                 <a:solidFill>
-                  <a:srgbClr val="CCCCCC"/>
-                </a:solidFill>
-                <a:latin typeface="Arial" pitchFamily="34" charset="0"/>
-                <a:ea typeface="Arial" pitchFamily="34" charset="-122"/>
-                <a:cs typeface="Arial" pitchFamily="34" charset="-120"/>
+                  <a:srgbClr val="2B2F36"/>
+                </a:solidFill>
+                <a:latin typeface="Arial" pitchFamily="34" charset="0"/>
+                <a:ea typeface="BIZ UDPGothic" pitchFamily="34" charset="-122"/>
+                <a:cs typeface="BIZ UDPGothic" pitchFamily="34" charset="-120"/>
               </a:rPr>
               <a:t>利用率 30%</a:t>
             </a:r>
@@ -9071,11 +9071,11 @@
             <a:r>
               <a:rPr lang="en-US" sz="1500" b="1" dirty="0">
                 <a:solidFill>
-                  <a:srgbClr val="D62828"/>
-                </a:solidFill>
-                <a:latin typeface="Arial" pitchFamily="34" charset="0"/>
-                <a:ea typeface="Arial" pitchFamily="34" charset="-122"/>
-                <a:cs typeface="Arial" pitchFamily="34" charset="-120"/>
+                  <a:srgbClr val="C8161D"/>
+                </a:solidFill>
+                <a:latin typeface="Arial" pitchFamily="34" charset="0"/>
+                <a:ea typeface="BIZ UDPGothic" pitchFamily="34" charset="-122"/>
+                <a:cs typeface="BIZ UDPGothic" pitchFamily="34" charset="-120"/>
               </a:rPr>
               <a:t>約1兆4,217億円</a:t>
             </a:r>
@@ -9100,11 +9100,11 @@
             </a:avLst>
           </a:prstGeom>
           <a:solidFill>
-            <a:srgbClr val="1A1A1A"/>
+            <a:srgbClr val="FFFFFF"/>
           </a:solidFill>
           <a:ln w="12700">
             <a:solidFill>
-              <a:srgbClr val="2E2E2E"/>
+              <a:srgbClr val="DDE0E6"/>
             </a:solidFill>
             <a:prstDash val="solid"/>
           </a:ln>
@@ -9140,11 +9140,11 @@
             <a:r>
               <a:rPr lang="en-US" sz="1250" dirty="0">
                 <a:solidFill>
-                  <a:srgbClr val="CCCCCC"/>
-                </a:solidFill>
-                <a:latin typeface="Arial" pitchFamily="34" charset="0"/>
-                <a:ea typeface="Arial" pitchFamily="34" charset="-122"/>
-                <a:cs typeface="Arial" pitchFamily="34" charset="-120"/>
+                  <a:srgbClr val="2B2F36"/>
+                </a:solidFill>
+                <a:latin typeface="Arial" pitchFamily="34" charset="0"/>
+                <a:ea typeface="BIZ UDPGothic" pitchFamily="34" charset="-122"/>
+                <a:cs typeface="BIZ UDPGothic" pitchFamily="34" charset="-120"/>
               </a:rPr>
               <a:t>財源の考え方：提言001の消費税増収（+13兆円）の枠組みの中で吸収。利用率10%（約4,739億円）も利用率30%（約1.4兆円）も、いずれも13兆円の範囲内に収まる規模。</a:t>
             </a:r>
@@ -9166,7 +9166,7 @@
     <p:bg>
       <p:bgPr>
         <a:solidFill>
-          <a:srgbClr val="0A0A0A"/>
+          <a:srgbClr val="F5F6F8"/>
         </a:solidFill>
       </p:bgPr>
     </p:bg>
@@ -9211,11 +9211,11 @@
             <a:r>
               <a:rPr lang="en-US" sz="1200" b="1" spc="300" kern="0" dirty="0">
                 <a:solidFill>
-                  <a:srgbClr val="D62828"/>
-                </a:solidFill>
-                <a:latin typeface="Arial" pitchFamily="34" charset="0"/>
-                <a:ea typeface="Arial" pitchFamily="34" charset="-122"/>
-                <a:cs typeface="Arial" pitchFamily="34" charset="-120"/>
+                  <a:srgbClr val="C8161D"/>
+                </a:solidFill>
+                <a:latin typeface="Arial" pitchFamily="34" charset="0"/>
+                <a:ea typeface="BIZ UDPGothic" pitchFamily="34" charset="-122"/>
+                <a:cs typeface="BIZ UDPGothic" pitchFamily="34" charset="-120"/>
               </a:rPr>
               <a:t>6. ふるさと納税との比較</a:t>
             </a:r>
@@ -9250,11 +9250,11 @@
             <a:r>
               <a:rPr lang="en-US" sz="3000" b="1" dirty="0">
                 <a:solidFill>
-                  <a:srgbClr val="F5F5F0"/>
-                </a:solidFill>
-                <a:latin typeface="Arial" pitchFamily="34" charset="0"/>
-                <a:ea typeface="Arial" pitchFamily="34" charset="-122"/>
-                <a:cs typeface="Arial" pitchFamily="34" charset="-120"/>
+                  <a:srgbClr val="16181D"/>
+                </a:solidFill>
+                <a:latin typeface="Arial" pitchFamily="34" charset="0"/>
+                <a:ea typeface="BIZ UDPGothic" pitchFamily="34" charset="-122"/>
+                <a:cs typeface="BIZ UDPGothic" pitchFamily="34" charset="-120"/>
               </a:rPr>
               <a:t>005はふるさと納税の上位互換</a:t>
             </a:r>
@@ -9289,11 +9289,11 @@
             <a:r>
               <a:rPr lang="en-US" sz="1000" dirty="0">
                 <a:solidFill>
-                  <a:srgbClr val="CCCCCC"/>
-                </a:solidFill>
-                <a:latin typeface="Arial" pitchFamily="34" charset="0"/>
-                <a:ea typeface="Arial" pitchFamily="34" charset="-122"/>
-                <a:cs typeface="Arial" pitchFamily="34" charset="-120"/>
+                  <a:srgbClr val="2B2F36"/>
+                </a:solidFill>
+                <a:latin typeface="Arial" pitchFamily="34" charset="0"/>
+                <a:ea typeface="BIZ UDPGothic" pitchFamily="34" charset="-122"/>
+                <a:cs typeface="BIZ UDPGothic" pitchFamily="34" charset="-120"/>
               </a:rPr>
               <a:t>19</a:t>
             </a:r>
@@ -9328,11 +9328,11 @@
             <a:r>
               <a:rPr lang="en-US" sz="900" dirty="0">
                 <a:solidFill>
-                  <a:srgbClr val="555555"/>
-                </a:solidFill>
-                <a:latin typeface="Arial" pitchFamily="34" charset="0"/>
-                <a:ea typeface="Arial" pitchFamily="34" charset="-122"/>
-                <a:cs typeface="Arial" pitchFamily="34" charset="-120"/>
+                  <a:srgbClr val="9AA0AA"/>
+                </a:solidFill>
+                <a:latin typeface="Arial" pitchFamily="34" charset="0"/>
+                <a:ea typeface="BIZ UDPGothic" pitchFamily="34" charset="-122"/>
+                <a:cs typeface="BIZ UDPGothic" pitchFamily="34" charset="-120"/>
               </a:rPr>
               <a:t>REBOOT JAPAN ── 提言005</a:t>
             </a:r>
@@ -9367,11 +9367,11 @@
             <a:r>
               <a:rPr lang="en-US" sz="1350" i="1" dirty="0">
                 <a:solidFill>
-                  <a:srgbClr val="D62828"/>
-                </a:solidFill>
-                <a:latin typeface="Arial" pitchFamily="34" charset="0"/>
-                <a:ea typeface="Arial" pitchFamily="34" charset="-122"/>
-                <a:cs typeface="Arial" pitchFamily="34" charset="-120"/>
+                  <a:srgbClr val="C8161D"/>
+                </a:solidFill>
+                <a:latin typeface="Arial" pitchFamily="34" charset="0"/>
+                <a:ea typeface="BIZ UDPGothic" pitchFamily="34" charset="-122"/>
+                <a:cs typeface="BIZ UDPGothic" pitchFamily="34" charset="-120"/>
               </a:rPr>
               <a:t>ふるさと納税は005の導入と同時に即時廃止。返礼品文化も完全に廃止。</a:t>
             </a:r>
@@ -9394,11 +9394,11 @@
             <a:avLst/>
           </a:prstGeom>
           <a:solidFill>
-            <a:srgbClr val="2E2E2E"/>
+            <a:srgbClr val="DDE0E6"/>
           </a:solidFill>
           <a:ln w="9525">
             <a:solidFill>
-              <a:srgbClr val="2E2E2E"/>
+              <a:srgbClr val="DDE0E6"/>
             </a:solidFill>
             <a:prstDash val="solid"/>
           </a:ln>
@@ -9434,11 +9434,11 @@
             <a:r>
               <a:rPr lang="en-US" sz="1200" b="1" dirty="0">
                 <a:solidFill>
-                  <a:srgbClr val="F5F5F0"/>
-                </a:solidFill>
-                <a:latin typeface="Arial" pitchFamily="34" charset="0"/>
-                <a:ea typeface="Arial" pitchFamily="34" charset="-122"/>
-                <a:cs typeface="Arial" pitchFamily="34" charset="-120"/>
+                  <a:srgbClr val="16181D"/>
+                </a:solidFill>
+                <a:latin typeface="Arial" pitchFamily="34" charset="0"/>
+                <a:ea typeface="BIZ UDPGothic" pitchFamily="34" charset="-122"/>
+                <a:cs typeface="BIZ UDPGothic" pitchFamily="34" charset="-120"/>
               </a:rPr>
               <a:t>観点</a:t>
             </a:r>
@@ -9461,11 +9461,11 @@
             <a:avLst/>
           </a:prstGeom>
           <a:solidFill>
-            <a:srgbClr val="2E2E2E"/>
+            <a:srgbClr val="DDE0E6"/>
           </a:solidFill>
           <a:ln w="9525">
             <a:solidFill>
-              <a:srgbClr val="2E2E2E"/>
+              <a:srgbClr val="DDE0E6"/>
             </a:solidFill>
             <a:prstDash val="solid"/>
           </a:ln>
@@ -9501,11 +9501,11 @@
             <a:r>
               <a:rPr lang="en-US" sz="1200" b="1" dirty="0">
                 <a:solidFill>
-                  <a:srgbClr val="F5F5F0"/>
-                </a:solidFill>
-                <a:latin typeface="Arial" pitchFamily="34" charset="0"/>
-                <a:ea typeface="Arial" pitchFamily="34" charset="-122"/>
-                <a:cs typeface="Arial" pitchFamily="34" charset="-120"/>
+                  <a:srgbClr val="16181D"/>
+                </a:solidFill>
+                <a:latin typeface="Arial" pitchFamily="34" charset="0"/>
+                <a:ea typeface="BIZ UDPGothic" pitchFamily="34" charset="-122"/>
+                <a:cs typeface="BIZ UDPGothic" pitchFamily="34" charset="-120"/>
               </a:rPr>
               <a:t>ふるさと納税</a:t>
             </a:r>
@@ -9528,11 +9528,11 @@
             <a:avLst/>
           </a:prstGeom>
           <a:solidFill>
-            <a:srgbClr val="2E2E2E"/>
+            <a:srgbClr val="DDE0E6"/>
           </a:solidFill>
           <a:ln w="9525">
             <a:solidFill>
-              <a:srgbClr val="2E2E2E"/>
+              <a:srgbClr val="DDE0E6"/>
             </a:solidFill>
             <a:prstDash val="solid"/>
           </a:ln>
@@ -9568,11 +9568,11 @@
             <a:r>
               <a:rPr lang="en-US" sz="1200" b="1" dirty="0">
                 <a:solidFill>
-                  <a:srgbClr val="F5F5F0"/>
-                </a:solidFill>
-                <a:latin typeface="Arial" pitchFamily="34" charset="0"/>
-                <a:ea typeface="Arial" pitchFamily="34" charset="-122"/>
-                <a:cs typeface="Arial" pitchFamily="34" charset="-120"/>
+                  <a:srgbClr val="16181D"/>
+                </a:solidFill>
+                <a:latin typeface="Arial" pitchFamily="34" charset="0"/>
+                <a:ea typeface="BIZ UDPGothic" pitchFamily="34" charset="-122"/>
+                <a:cs typeface="BIZ UDPGothic" pitchFamily="34" charset="-120"/>
               </a:rPr>
               <a:t>提言005</a:t>
             </a:r>
@@ -9595,11 +9595,11 @@
             <a:avLst/>
           </a:prstGeom>
           <a:solidFill>
-            <a:srgbClr val="0A0A0A"/>
+            <a:srgbClr val="F5F6F8"/>
           </a:solidFill>
           <a:ln w="9525">
             <a:solidFill>
-              <a:srgbClr val="2E2E2E"/>
+              <a:srgbClr val="DDE0E6"/>
             </a:solidFill>
             <a:prstDash val="solid"/>
           </a:ln>
@@ -9635,11 +9635,11 @@
             <a:r>
               <a:rPr lang="en-US" sz="1250" b="1" dirty="0">
                 <a:solidFill>
-                  <a:srgbClr val="F5F5F0"/>
-                </a:solidFill>
-                <a:latin typeface="Arial" pitchFamily="34" charset="0"/>
-                <a:ea typeface="Arial" pitchFamily="34" charset="-122"/>
-                <a:cs typeface="Arial" pitchFamily="34" charset="-120"/>
+                  <a:srgbClr val="16181D"/>
+                </a:solidFill>
+                <a:latin typeface="Arial" pitchFamily="34" charset="0"/>
+                <a:ea typeface="BIZ UDPGothic" pitchFamily="34" charset="-122"/>
+                <a:cs typeface="BIZ UDPGothic" pitchFamily="34" charset="-120"/>
               </a:rPr>
               <a:t>返礼品</a:t>
             </a:r>
@@ -9662,11 +9662,11 @@
             <a:avLst/>
           </a:prstGeom>
           <a:solidFill>
-            <a:srgbClr val="0A0A0A"/>
+            <a:srgbClr val="F5F6F8"/>
           </a:solidFill>
           <a:ln w="9525">
             <a:solidFill>
-              <a:srgbClr val="2E2E2E"/>
+              <a:srgbClr val="DDE0E6"/>
             </a:solidFill>
             <a:prstDash val="solid"/>
           </a:ln>
@@ -9702,11 +9702,11 @@
             <a:r>
               <a:rPr lang="en-US" sz="1250" dirty="0">
                 <a:solidFill>
-                  <a:srgbClr val="CCCCCC"/>
-                </a:solidFill>
-                <a:latin typeface="Arial" pitchFamily="34" charset="0"/>
-                <a:ea typeface="Arial" pitchFamily="34" charset="-122"/>
-                <a:cs typeface="Arial" pitchFamily="34" charset="-120"/>
+                  <a:srgbClr val="2B2F36"/>
+                </a:solidFill>
+                <a:latin typeface="Arial" pitchFamily="34" charset="0"/>
+                <a:ea typeface="BIZ UDPGothic" pitchFamily="34" charset="-122"/>
+                <a:cs typeface="BIZ UDPGothic" pitchFamily="34" charset="-120"/>
               </a:rPr>
               <a:t>あり（寄付額の3割相当）</a:t>
             </a:r>
@@ -9729,11 +9729,11 @@
             <a:avLst/>
           </a:prstGeom>
           <a:solidFill>
-            <a:srgbClr val="2A1414"/>
+            <a:srgbClr val="FCEBEB"/>
           </a:solidFill>
           <a:ln w="19050">
             <a:solidFill>
-              <a:srgbClr val="D62828"/>
+              <a:srgbClr val="C8161D"/>
             </a:solidFill>
             <a:prstDash val="solid"/>
           </a:ln>
@@ -9769,11 +9769,11 @@
             <a:r>
               <a:rPr lang="en-US" sz="1250" b="1" dirty="0">
                 <a:solidFill>
-                  <a:srgbClr val="D62828"/>
-                </a:solidFill>
-                <a:latin typeface="Arial" pitchFamily="34" charset="0"/>
-                <a:ea typeface="Arial" pitchFamily="34" charset="-122"/>
-                <a:cs typeface="Arial" pitchFamily="34" charset="-120"/>
+                  <a:srgbClr val="C8161D"/>
+                </a:solidFill>
+                <a:latin typeface="Arial" pitchFamily="34" charset="0"/>
+                <a:ea typeface="BIZ UDPGothic" pitchFamily="34" charset="-122"/>
+                <a:cs typeface="BIZ UDPGothic" pitchFamily="34" charset="-120"/>
               </a:rPr>
               <a:t>なし（完全廃止）</a:t>
             </a:r>
@@ -9796,11 +9796,11 @@
             <a:avLst/>
           </a:prstGeom>
           <a:solidFill>
-            <a:srgbClr val="1A1A1A"/>
+            <a:srgbClr val="FFFFFF"/>
           </a:solidFill>
           <a:ln w="9525">
             <a:solidFill>
-              <a:srgbClr val="2E2E2E"/>
+              <a:srgbClr val="DDE0E6"/>
             </a:solidFill>
             <a:prstDash val="solid"/>
           </a:ln>
@@ -9836,11 +9836,11 @@
             <a:r>
               <a:rPr lang="en-US" sz="1250" b="1" dirty="0">
                 <a:solidFill>
-                  <a:srgbClr val="F5F5F0"/>
-                </a:solidFill>
-                <a:latin typeface="Arial" pitchFamily="34" charset="0"/>
-                <a:ea typeface="Arial" pitchFamily="34" charset="-122"/>
-                <a:cs typeface="Arial" pitchFamily="34" charset="-120"/>
+                  <a:srgbClr val="16181D"/>
+                </a:solidFill>
+                <a:latin typeface="Arial" pitchFamily="34" charset="0"/>
+                <a:ea typeface="BIZ UDPGothic" pitchFamily="34" charset="-122"/>
+                <a:cs typeface="BIZ UDPGothic" pitchFamily="34" charset="-120"/>
               </a:rPr>
               <a:t>対象税目</a:t>
             </a:r>
@@ -9863,11 +9863,11 @@
             <a:avLst/>
           </a:prstGeom>
           <a:solidFill>
-            <a:srgbClr val="1A1A1A"/>
+            <a:srgbClr val="FFFFFF"/>
           </a:solidFill>
           <a:ln w="9525">
             <a:solidFill>
-              <a:srgbClr val="2E2E2E"/>
+              <a:srgbClr val="DDE0E6"/>
             </a:solidFill>
             <a:prstDash val="solid"/>
           </a:ln>
@@ -9903,11 +9903,11 @@
             <a:r>
               <a:rPr lang="en-US" sz="1250" dirty="0">
                 <a:solidFill>
-                  <a:srgbClr val="CCCCCC"/>
-                </a:solidFill>
-                <a:latin typeface="Arial" pitchFamily="34" charset="0"/>
-                <a:ea typeface="Arial" pitchFamily="34" charset="-122"/>
-                <a:cs typeface="Arial" pitchFamily="34" charset="-120"/>
+                  <a:srgbClr val="2B2F36"/>
+                </a:solidFill>
+                <a:latin typeface="Arial" pitchFamily="34" charset="0"/>
+                <a:ea typeface="BIZ UDPGothic" pitchFamily="34" charset="-122"/>
+                <a:cs typeface="BIZ UDPGothic" pitchFamily="34" charset="-120"/>
               </a:rPr>
               <a:t>主に住民税</a:t>
             </a:r>
@@ -9930,11 +9930,11 @@
             <a:avLst/>
           </a:prstGeom>
           <a:solidFill>
-            <a:srgbClr val="2A1414"/>
+            <a:srgbClr val="FCEBEB"/>
           </a:solidFill>
           <a:ln w="19050">
             <a:solidFill>
-              <a:srgbClr val="D62828"/>
+              <a:srgbClr val="C8161D"/>
             </a:solidFill>
             <a:prstDash val="solid"/>
           </a:ln>
@@ -9970,11 +9970,11 @@
             <a:r>
               <a:rPr lang="en-US" sz="1250" b="1" dirty="0">
                 <a:solidFill>
-                  <a:srgbClr val="D62828"/>
-                </a:solidFill>
-                <a:latin typeface="Arial" pitchFamily="34" charset="0"/>
-                <a:ea typeface="Arial" pitchFamily="34" charset="-122"/>
-                <a:cs typeface="Arial" pitchFamily="34" charset="-120"/>
+                  <a:srgbClr val="C8161D"/>
+                </a:solidFill>
+                <a:latin typeface="Arial" pitchFamily="34" charset="0"/>
+                <a:ea typeface="BIZ UDPGothic" pitchFamily="34" charset="-122"/>
+                <a:cs typeface="BIZ UDPGothic" pitchFamily="34" charset="-120"/>
               </a:rPr>
               <a:t>所得税・住民税・消費税の3税</a:t>
             </a:r>
@@ -9997,11 +9997,11 @@
             <a:avLst/>
           </a:prstGeom>
           <a:solidFill>
-            <a:srgbClr val="0A0A0A"/>
+            <a:srgbClr val="F5F6F8"/>
           </a:solidFill>
           <a:ln w="9525">
             <a:solidFill>
-              <a:srgbClr val="2E2E2E"/>
+              <a:srgbClr val="DDE0E6"/>
             </a:solidFill>
             <a:prstDash val="solid"/>
           </a:ln>
@@ -10037,11 +10037,11 @@
             <a:r>
               <a:rPr lang="en-US" sz="1250" b="1" dirty="0">
                 <a:solidFill>
-                  <a:srgbClr val="F5F5F0"/>
-                </a:solidFill>
-                <a:latin typeface="Arial" pitchFamily="34" charset="0"/>
-                <a:ea typeface="Arial" pitchFamily="34" charset="-122"/>
-                <a:cs typeface="Arial" pitchFamily="34" charset="-120"/>
+                  <a:srgbClr val="16181D"/>
+                </a:solidFill>
+                <a:latin typeface="Arial" pitchFamily="34" charset="0"/>
+                <a:ea typeface="BIZ UDPGothic" pitchFamily="34" charset="-122"/>
+                <a:cs typeface="BIZ UDPGothic" pitchFamily="34" charset="-120"/>
               </a:rPr>
               <a:t>寄付の動機</a:t>
             </a:r>
@@ -10064,11 +10064,11 @@
             <a:avLst/>
           </a:prstGeom>
           <a:solidFill>
-            <a:srgbClr val="0A0A0A"/>
+            <a:srgbClr val="F5F6F8"/>
           </a:solidFill>
           <a:ln w="9525">
             <a:solidFill>
-              <a:srgbClr val="2E2E2E"/>
+              <a:srgbClr val="DDE0E6"/>
             </a:solidFill>
             <a:prstDash val="solid"/>
           </a:ln>
@@ -10104,11 +10104,11 @@
             <a:r>
               <a:rPr lang="en-US" sz="1250" dirty="0">
                 <a:solidFill>
-                  <a:srgbClr val="CCCCCC"/>
-                </a:solidFill>
-                <a:latin typeface="Arial" pitchFamily="34" charset="0"/>
-                <a:ea typeface="Arial" pitchFamily="34" charset="-122"/>
-                <a:cs typeface="Arial" pitchFamily="34" charset="-120"/>
+                  <a:srgbClr val="2B2F36"/>
+                </a:solidFill>
+                <a:latin typeface="Arial" pitchFamily="34" charset="0"/>
+                <a:ea typeface="BIZ UDPGothic" pitchFamily="34" charset="-122"/>
+                <a:cs typeface="BIZ UDPGothic" pitchFamily="34" charset="-120"/>
               </a:rPr>
               <a:t>返礼品目的の節税ツール化</a:t>
             </a:r>
@@ -10131,11 +10131,11 @@
             <a:avLst/>
           </a:prstGeom>
           <a:solidFill>
-            <a:srgbClr val="2A1414"/>
+            <a:srgbClr val="FCEBEB"/>
           </a:solidFill>
           <a:ln w="19050">
             <a:solidFill>
-              <a:srgbClr val="D62828"/>
+              <a:srgbClr val="C8161D"/>
             </a:solidFill>
             <a:prstDash val="solid"/>
           </a:ln>
@@ -10171,11 +10171,11 @@
             <a:r>
               <a:rPr lang="en-US" sz="1250" b="1" dirty="0">
                 <a:solidFill>
-                  <a:srgbClr val="D62828"/>
-                </a:solidFill>
-                <a:latin typeface="Arial" pitchFamily="34" charset="0"/>
-                <a:ea typeface="Arial" pitchFamily="34" charset="-122"/>
-                <a:cs typeface="Arial" pitchFamily="34" charset="-120"/>
+                  <a:srgbClr val="C8161D"/>
+                </a:solidFill>
+                <a:latin typeface="Arial" pitchFamily="34" charset="0"/>
+                <a:ea typeface="BIZ UDPGothic" pitchFamily="34" charset="-122"/>
+                <a:cs typeface="BIZ UDPGothic" pitchFamily="34" charset="-120"/>
               </a:rPr>
               <a:t>累進課税の重い分を社会課題に投資</a:t>
             </a:r>
@@ -10198,11 +10198,11 @@
             <a:avLst/>
           </a:prstGeom>
           <a:solidFill>
-            <a:srgbClr val="1A1A1A"/>
+            <a:srgbClr val="FFFFFF"/>
           </a:solidFill>
           <a:ln w="9525">
             <a:solidFill>
-              <a:srgbClr val="2E2E2E"/>
+              <a:srgbClr val="DDE0E6"/>
             </a:solidFill>
             <a:prstDash val="solid"/>
           </a:ln>
@@ -10238,11 +10238,11 @@
             <a:r>
               <a:rPr lang="en-US" sz="1250" b="1" dirty="0">
                 <a:solidFill>
-                  <a:srgbClr val="F5F5F0"/>
-                </a:solidFill>
-                <a:latin typeface="Arial" pitchFamily="34" charset="0"/>
-                <a:ea typeface="Arial" pitchFamily="34" charset="-122"/>
-                <a:cs typeface="Arial" pitchFamily="34" charset="-120"/>
+                  <a:srgbClr val="16181D"/>
+                </a:solidFill>
+                <a:latin typeface="Arial" pitchFamily="34" charset="0"/>
+                <a:ea typeface="BIZ UDPGothic" pitchFamily="34" charset="-122"/>
+                <a:cs typeface="BIZ UDPGothic" pitchFamily="34" charset="-120"/>
               </a:rPr>
               <a:t>指定の粒度</a:t>
             </a:r>
@@ -10265,11 +10265,11 @@
             <a:avLst/>
           </a:prstGeom>
           <a:solidFill>
-            <a:srgbClr val="1A1A1A"/>
+            <a:srgbClr val="FFFFFF"/>
           </a:solidFill>
           <a:ln w="9525">
             <a:solidFill>
-              <a:srgbClr val="2E2E2E"/>
+              <a:srgbClr val="DDE0E6"/>
             </a:solidFill>
             <a:prstDash val="solid"/>
           </a:ln>
@@ -10305,11 +10305,11 @@
             <a:r>
               <a:rPr lang="en-US" sz="1250" dirty="0">
                 <a:solidFill>
-                  <a:srgbClr val="CCCCCC"/>
-                </a:solidFill>
-                <a:latin typeface="Arial" pitchFamily="34" charset="0"/>
-                <a:ea typeface="Arial" pitchFamily="34" charset="-122"/>
-                <a:cs typeface="Arial" pitchFamily="34" charset="-120"/>
+                  <a:srgbClr val="2B2F36"/>
+                </a:solidFill>
+                <a:latin typeface="Arial" pitchFamily="34" charset="0"/>
+                <a:ea typeface="BIZ UDPGothic" pitchFamily="34" charset="-122"/>
+                <a:cs typeface="BIZ UDPGothic" pitchFamily="34" charset="-120"/>
               </a:rPr>
               <a:t>自治体単位</a:t>
             </a:r>
@@ -10332,11 +10332,11 @@
             <a:avLst/>
           </a:prstGeom>
           <a:solidFill>
-            <a:srgbClr val="2A1414"/>
+            <a:srgbClr val="FCEBEB"/>
           </a:solidFill>
           <a:ln w="19050">
             <a:solidFill>
-              <a:srgbClr val="D62828"/>
+              <a:srgbClr val="C8161D"/>
             </a:solidFill>
             <a:prstDash val="solid"/>
           </a:ln>
@@ -10372,11 +10372,11 @@
             <a:r>
               <a:rPr lang="en-US" sz="1250" b="1" dirty="0">
                 <a:solidFill>
-                  <a:srgbClr val="D62828"/>
-                </a:solidFill>
-                <a:latin typeface="Arial" pitchFamily="34" charset="0"/>
-                <a:ea typeface="Arial" pitchFamily="34" charset="-122"/>
-                <a:cs typeface="Arial" pitchFamily="34" charset="-120"/>
+                  <a:srgbClr val="C8161D"/>
+                </a:solidFill>
+                <a:latin typeface="Arial" pitchFamily="34" charset="0"/>
+                <a:ea typeface="BIZ UDPGothic" pitchFamily="34" charset="-122"/>
+                <a:cs typeface="BIZ UDPGothic" pitchFamily="34" charset="-120"/>
               </a:rPr>
               <a:t>施設・部署単位まで指定可能</a:t>
             </a:r>
@@ -10399,11 +10399,11 @@
             <a:avLst/>
           </a:prstGeom>
           <a:solidFill>
-            <a:srgbClr val="0A0A0A"/>
+            <a:srgbClr val="F5F6F8"/>
           </a:solidFill>
           <a:ln w="9525">
             <a:solidFill>
-              <a:srgbClr val="2E2E2E"/>
+              <a:srgbClr val="DDE0E6"/>
             </a:solidFill>
             <a:prstDash val="solid"/>
           </a:ln>
@@ -10439,11 +10439,11 @@
             <a:r>
               <a:rPr lang="en-US" sz="1250" b="1" dirty="0">
                 <a:solidFill>
-                  <a:srgbClr val="F5F5F0"/>
-                </a:solidFill>
-                <a:latin typeface="Arial" pitchFamily="34" charset="0"/>
-                <a:ea typeface="Arial" pitchFamily="34" charset="-122"/>
-                <a:cs typeface="Arial" pitchFamily="34" charset="-120"/>
+                  <a:srgbClr val="16181D"/>
+                </a:solidFill>
+                <a:latin typeface="Arial" pitchFamily="34" charset="0"/>
+                <a:ea typeface="BIZ UDPGothic" pitchFamily="34" charset="-122"/>
+                <a:cs typeface="BIZ UDPGothic" pitchFamily="34" charset="-120"/>
               </a:rPr>
               <a:t>透明性</a:t>
             </a:r>
@@ -10466,11 +10466,11 @@
             <a:avLst/>
           </a:prstGeom>
           <a:solidFill>
-            <a:srgbClr val="0A0A0A"/>
+            <a:srgbClr val="F5F6F8"/>
           </a:solidFill>
           <a:ln w="9525">
             <a:solidFill>
-              <a:srgbClr val="2E2E2E"/>
+              <a:srgbClr val="DDE0E6"/>
             </a:solidFill>
             <a:prstDash val="solid"/>
           </a:ln>
@@ -10506,11 +10506,11 @@
             <a:r>
               <a:rPr lang="en-US" sz="1250" dirty="0">
                 <a:solidFill>
-                  <a:srgbClr val="CCCCCC"/>
-                </a:solidFill>
-                <a:latin typeface="Arial" pitchFamily="34" charset="0"/>
-                <a:ea typeface="Arial" pitchFamily="34" charset="-122"/>
-                <a:cs typeface="Arial" pitchFamily="34" charset="-120"/>
+                  <a:srgbClr val="2B2F36"/>
+                </a:solidFill>
+                <a:latin typeface="Arial" pitchFamily="34" charset="0"/>
+                <a:ea typeface="BIZ UDPGothic" pitchFamily="34" charset="-122"/>
+                <a:cs typeface="BIZ UDPGothic" pitchFamily="34" charset="-120"/>
               </a:rPr>
               <a:t>報告義務が緩い</a:t>
             </a:r>
@@ -10533,11 +10533,11 @@
             <a:avLst/>
           </a:prstGeom>
           <a:solidFill>
-            <a:srgbClr val="2A1414"/>
+            <a:srgbClr val="FCEBEB"/>
           </a:solidFill>
           <a:ln w="19050">
             <a:solidFill>
-              <a:srgbClr val="D62828"/>
+              <a:srgbClr val="C8161D"/>
             </a:solidFill>
             <a:prstDash val="solid"/>
           </a:ln>
@@ -10573,11 +10573,11 @@
             <a:r>
               <a:rPr lang="en-US" sz="1250" b="1" dirty="0">
                 <a:solidFill>
-                  <a:srgbClr val="D62828"/>
-                </a:solidFill>
-                <a:latin typeface="Arial" pitchFamily="34" charset="0"/>
-                <a:ea typeface="Arial" pitchFamily="34" charset="-122"/>
-                <a:cs typeface="Arial" pitchFamily="34" charset="-120"/>
+                  <a:srgbClr val="C8161D"/>
+                </a:solidFill>
+                <a:latin typeface="Arial" pitchFamily="34" charset="0"/>
+                <a:ea typeface="BIZ UDPGothic" pitchFamily="34" charset="-122"/>
+                <a:cs typeface="BIZ UDPGothic" pitchFamily="34" charset="-120"/>
               </a:rPr>
               <a:t>四半期ごと報告、マイナポータルで公開</a:t>
             </a:r>
@@ -10600,11 +10600,11 @@
             <a:avLst/>
           </a:prstGeom>
           <a:solidFill>
-            <a:srgbClr val="1A1A1A"/>
+            <a:srgbClr val="FFFFFF"/>
           </a:solidFill>
           <a:ln w="9525">
             <a:solidFill>
-              <a:srgbClr val="2E2E2E"/>
+              <a:srgbClr val="DDE0E6"/>
             </a:solidFill>
             <a:prstDash val="solid"/>
           </a:ln>
@@ -10640,11 +10640,11 @@
             <a:r>
               <a:rPr lang="en-US" sz="1250" b="1" dirty="0">
                 <a:solidFill>
-                  <a:srgbClr val="F5F5F0"/>
-                </a:solidFill>
-                <a:latin typeface="Arial" pitchFamily="34" charset="0"/>
-                <a:ea typeface="Arial" pitchFamily="34" charset="-122"/>
-                <a:cs typeface="Arial" pitchFamily="34" charset="-120"/>
+                  <a:srgbClr val="16181D"/>
+                </a:solidFill>
+                <a:latin typeface="Arial" pitchFamily="34" charset="0"/>
+                <a:ea typeface="BIZ UDPGothic" pitchFamily="34" charset="-122"/>
+                <a:cs typeface="BIZ UDPGothic" pitchFamily="34" charset="-120"/>
               </a:rPr>
               <a:t>自治体間の公平性</a:t>
             </a:r>
@@ -10667,11 +10667,11 @@
             <a:avLst/>
           </a:prstGeom>
           <a:solidFill>
-            <a:srgbClr val="1A1A1A"/>
+            <a:srgbClr val="FFFFFF"/>
           </a:solidFill>
           <a:ln w="9525">
             <a:solidFill>
-              <a:srgbClr val="2E2E2E"/>
+              <a:srgbClr val="DDE0E6"/>
             </a:solidFill>
             <a:prstDash val="solid"/>
           </a:ln>
@@ -10707,11 +10707,11 @@
             <a:r>
               <a:rPr lang="en-US" sz="1250" dirty="0">
                 <a:solidFill>
-                  <a:srgbClr val="CCCCCC"/>
-                </a:solidFill>
-                <a:latin typeface="Arial" pitchFamily="34" charset="0"/>
-                <a:ea typeface="Arial" pitchFamily="34" charset="-122"/>
-                <a:cs typeface="Arial" pitchFamily="34" charset="-120"/>
+                  <a:srgbClr val="2B2F36"/>
+                </a:solidFill>
+                <a:latin typeface="Arial" pitchFamily="34" charset="0"/>
+                <a:ea typeface="BIZ UDPGothic" pitchFamily="34" charset="-122"/>
+                <a:cs typeface="BIZ UDPGothic" pitchFamily="34" charset="-120"/>
               </a:rPr>
               <a:t>都市部の税収流出が問題</a:t>
             </a:r>
@@ -10734,11 +10734,11 @@
             <a:avLst/>
           </a:prstGeom>
           <a:solidFill>
-            <a:srgbClr val="2A1414"/>
+            <a:srgbClr val="FCEBEB"/>
           </a:solidFill>
           <a:ln w="19050">
             <a:solidFill>
-              <a:srgbClr val="D62828"/>
+              <a:srgbClr val="C8161D"/>
             </a:solidFill>
             <a:prstDash val="solid"/>
           </a:ln>
@@ -10774,11 +10774,11 @@
             <a:r>
               <a:rPr lang="en-US" sz="1250" b="1" dirty="0">
                 <a:solidFill>
-                  <a:srgbClr val="D62828"/>
-                </a:solidFill>
-                <a:latin typeface="Arial" pitchFamily="34" charset="0"/>
-                <a:ea typeface="Arial" pitchFamily="34" charset="-122"/>
-                <a:cs typeface="Arial" pitchFamily="34" charset="-120"/>
+                  <a:srgbClr val="C8161D"/>
+                </a:solidFill>
+                <a:latin typeface="Arial" pitchFamily="34" charset="0"/>
+                <a:ea typeface="BIZ UDPGothic" pitchFamily="34" charset="-122"/>
+                <a:cs typeface="BIZ UDPGothic" pitchFamily="34" charset="-120"/>
               </a:rPr>
               <a:t>居住自治体に75%確保し流出を抑制</a:t>
             </a:r>
@@ -10800,7 +10800,7 @@
     <p:bg>
       <p:bgPr>
         <a:solidFill>
-          <a:srgbClr val="0A0A0A"/>
+          <a:srgbClr val="F5F6F8"/>
         </a:solidFill>
       </p:bgPr>
     </p:bg>
@@ -10845,11 +10845,11 @@
             <a:r>
               <a:rPr lang="en-US" sz="1200" b="1" spc="300" kern="0" dirty="0">
                 <a:solidFill>
-                  <a:srgbClr val="D62828"/>
-                </a:solidFill>
-                <a:latin typeface="Arial" pitchFamily="34" charset="0"/>
-                <a:ea typeface="Arial" pitchFamily="34" charset="-122"/>
-                <a:cs typeface="Arial" pitchFamily="34" charset="-120"/>
+                  <a:srgbClr val="C8161D"/>
+                </a:solidFill>
+                <a:latin typeface="Arial" pitchFamily="34" charset="0"/>
+                <a:ea typeface="BIZ UDPGothic" pitchFamily="34" charset="-122"/>
+                <a:cs typeface="BIZ UDPGothic" pitchFamily="34" charset="-120"/>
               </a:rPr>
               <a:t>CONTENTS</a:t>
             </a:r>
@@ -10884,11 +10884,11 @@
             <a:r>
               <a:rPr lang="en-US" sz="3000" b="1" dirty="0">
                 <a:solidFill>
-                  <a:srgbClr val="F5F5F0"/>
-                </a:solidFill>
-                <a:latin typeface="Arial" pitchFamily="34" charset="0"/>
-                <a:ea typeface="Arial" pitchFamily="34" charset="-122"/>
-                <a:cs typeface="Arial" pitchFamily="34" charset="-120"/>
+                  <a:srgbClr val="16181D"/>
+                </a:solidFill>
+                <a:latin typeface="Arial" pitchFamily="34" charset="0"/>
+                <a:ea typeface="BIZ UDPGothic" pitchFamily="34" charset="-122"/>
+                <a:cs typeface="BIZ UDPGothic" pitchFamily="34" charset="-120"/>
               </a:rPr>
               <a:t>このスライドで分かること</a:t>
             </a:r>
@@ -10923,11 +10923,11 @@
             <a:r>
               <a:rPr lang="en-US" sz="1000" dirty="0">
                 <a:solidFill>
-                  <a:srgbClr val="CCCCCC"/>
-                </a:solidFill>
-                <a:latin typeface="Arial" pitchFamily="34" charset="0"/>
-                <a:ea typeface="Arial" pitchFamily="34" charset="-122"/>
-                <a:cs typeface="Arial" pitchFamily="34" charset="-120"/>
+                  <a:srgbClr val="2B2F36"/>
+                </a:solidFill>
+                <a:latin typeface="Arial" pitchFamily="34" charset="0"/>
+                <a:ea typeface="BIZ UDPGothic" pitchFamily="34" charset="-122"/>
+                <a:cs typeface="BIZ UDPGothic" pitchFamily="34" charset="-120"/>
               </a:rPr>
               <a:t>02</a:t>
             </a:r>
@@ -10962,11 +10962,11 @@
             <a:r>
               <a:rPr lang="en-US" sz="900" dirty="0">
                 <a:solidFill>
-                  <a:srgbClr val="555555"/>
-                </a:solidFill>
-                <a:latin typeface="Arial" pitchFamily="34" charset="0"/>
-                <a:ea typeface="Arial" pitchFamily="34" charset="-122"/>
-                <a:cs typeface="Arial" pitchFamily="34" charset="-120"/>
+                  <a:srgbClr val="9AA0AA"/>
+                </a:solidFill>
+                <a:latin typeface="Arial" pitchFamily="34" charset="0"/>
+                <a:ea typeface="BIZ UDPGothic" pitchFamily="34" charset="-122"/>
+                <a:cs typeface="BIZ UDPGothic" pitchFamily="34" charset="-120"/>
               </a:rPr>
               <a:t>REBOOT JAPAN ── 提言005</a:t>
             </a:r>
@@ -10991,11 +10991,11 @@
             </a:avLst>
           </a:prstGeom>
           <a:solidFill>
-            <a:srgbClr val="1A1A1A"/>
+            <a:srgbClr val="FFFFFF"/>
           </a:solidFill>
           <a:ln w="12700">
             <a:solidFill>
-              <a:srgbClr val="2E2E2E"/>
+              <a:srgbClr val="DDE0E6"/>
             </a:solidFill>
             <a:prstDash val="solid"/>
           </a:ln>
@@ -11028,11 +11028,11 @@
             <a:r>
               <a:rPr lang="en-US" sz="3000" b="1" dirty="0">
                 <a:solidFill>
-                  <a:srgbClr val="D62828"/>
-                </a:solidFill>
-                <a:latin typeface="Arial" pitchFamily="34" charset="0"/>
-                <a:ea typeface="Arial" pitchFamily="34" charset="-122"/>
-                <a:cs typeface="Arial" pitchFamily="34" charset="-120"/>
+                  <a:srgbClr val="C8161D"/>
+                </a:solidFill>
+                <a:latin typeface="Arial" pitchFamily="34" charset="0"/>
+                <a:ea typeface="BIZ UDPGothic" pitchFamily="34" charset="-122"/>
+                <a:cs typeface="BIZ UDPGothic" pitchFamily="34" charset="-120"/>
               </a:rPr>
               <a:t>01</a:t>
             </a:r>
@@ -11067,11 +11067,11 @@
             <a:r>
               <a:rPr lang="en-US" sz="1500" b="1" dirty="0">
                 <a:solidFill>
-                  <a:srgbClr val="F5F5F0"/>
-                </a:solidFill>
-                <a:latin typeface="Arial" pitchFamily="34" charset="0"/>
-                <a:ea typeface="Arial" pitchFamily="34" charset="-122"/>
-                <a:cs typeface="Arial" pitchFamily="34" charset="-120"/>
+                  <a:srgbClr val="16181D"/>
+                </a:solidFill>
+                <a:latin typeface="Arial" pitchFamily="34" charset="0"/>
+                <a:ea typeface="BIZ UDPGothic" pitchFamily="34" charset="-122"/>
+                <a:cs typeface="BIZ UDPGothic" pitchFamily="34" charset="-120"/>
               </a:rPr>
               <a:t>税金の「2つの問題」</a:t>
             </a:r>
@@ -11109,11 +11109,11 @@
             <a:r>
               <a:rPr lang="en-US" sz="1100" dirty="0">
                 <a:solidFill>
-                  <a:srgbClr val="CCCCCC"/>
-                </a:solidFill>
-                <a:latin typeface="Arial" pitchFamily="34" charset="0"/>
-                <a:ea typeface="Arial" pitchFamily="34" charset="-122"/>
-                <a:cs typeface="Arial" pitchFamily="34" charset="-120"/>
+                  <a:srgbClr val="2B2F36"/>
+                </a:solidFill>
+                <a:latin typeface="Arial" pitchFamily="34" charset="0"/>
+                <a:ea typeface="BIZ UDPGothic" pitchFamily="34" charset="-122"/>
+                <a:cs typeface="BIZ UDPGothic" pitchFamily="34" charset="-120"/>
               </a:rPr>
               <a:t>取られるままで、使い道は全部お上任せ</a:t>
             </a:r>
@@ -11138,11 +11138,11 @@
             </a:avLst>
           </a:prstGeom>
           <a:solidFill>
-            <a:srgbClr val="1A1A1A"/>
+            <a:srgbClr val="FFFFFF"/>
           </a:solidFill>
           <a:ln w="12700">
             <a:solidFill>
-              <a:srgbClr val="2E2E2E"/>
+              <a:srgbClr val="DDE0E6"/>
             </a:solidFill>
             <a:prstDash val="solid"/>
           </a:ln>
@@ -11175,11 +11175,11 @@
             <a:r>
               <a:rPr lang="en-US" sz="3000" b="1" dirty="0">
                 <a:solidFill>
-                  <a:srgbClr val="D62828"/>
-                </a:solidFill>
-                <a:latin typeface="Arial" pitchFamily="34" charset="0"/>
-                <a:ea typeface="Arial" pitchFamily="34" charset="-122"/>
-                <a:cs typeface="Arial" pitchFamily="34" charset="-120"/>
+                  <a:srgbClr val="C8161D"/>
+                </a:solidFill>
+                <a:latin typeface="Arial" pitchFamily="34" charset="0"/>
+                <a:ea typeface="BIZ UDPGothic" pitchFamily="34" charset="-122"/>
+                <a:cs typeface="BIZ UDPGothic" pitchFamily="34" charset="-120"/>
               </a:rPr>
               <a:t>02</a:t>
             </a:r>
@@ -11214,11 +11214,11 @@
             <a:r>
               <a:rPr lang="en-US" sz="1500" b="1" dirty="0">
                 <a:solidFill>
-                  <a:srgbClr val="F5F5F0"/>
-                </a:solidFill>
-                <a:latin typeface="Arial" pitchFamily="34" charset="0"/>
-                <a:ea typeface="Arial" pitchFamily="34" charset="-122"/>
-                <a:cs typeface="Arial" pitchFamily="34" charset="-120"/>
+                  <a:srgbClr val="16181D"/>
+                </a:solidFill>
+                <a:latin typeface="Arial" pitchFamily="34" charset="0"/>
+                <a:ea typeface="BIZ UDPGothic" pitchFamily="34" charset="-122"/>
+                <a:cs typeface="BIZ UDPGothic" pitchFamily="34" charset="-120"/>
               </a:rPr>
               <a:t>ふるさと納税の失敗</a:t>
             </a:r>
@@ -11256,11 +11256,11 @@
             <a:r>
               <a:rPr lang="en-US" sz="1100" dirty="0">
                 <a:solidFill>
-                  <a:srgbClr val="CCCCCC"/>
-                </a:solidFill>
-                <a:latin typeface="Arial" pitchFamily="34" charset="0"/>
-                <a:ea typeface="Arial" pitchFamily="34" charset="-122"/>
-                <a:cs typeface="Arial" pitchFamily="34" charset="-120"/>
+                  <a:srgbClr val="2B2F36"/>
+                </a:solidFill>
+                <a:latin typeface="Arial" pitchFamily="34" charset="0"/>
+                <a:ea typeface="BIZ UDPGothic" pitchFamily="34" charset="-122"/>
+                <a:cs typeface="BIZ UDPGothic" pitchFamily="34" charset="-120"/>
               </a:rPr>
               <a:t>返礼品競争に変質、都市から地方への税収流出</a:t>
             </a:r>
@@ -11285,11 +11285,11 @@
             </a:avLst>
           </a:prstGeom>
           <a:solidFill>
-            <a:srgbClr val="1A1A1A"/>
+            <a:srgbClr val="FFFFFF"/>
           </a:solidFill>
           <a:ln w="12700">
             <a:solidFill>
-              <a:srgbClr val="2E2E2E"/>
+              <a:srgbClr val="DDE0E6"/>
             </a:solidFill>
             <a:prstDash val="solid"/>
           </a:ln>
@@ -11322,11 +11322,11 @@
             <a:r>
               <a:rPr lang="en-US" sz="3000" b="1" dirty="0">
                 <a:solidFill>
-                  <a:srgbClr val="D62828"/>
-                </a:solidFill>
-                <a:latin typeface="Arial" pitchFamily="34" charset="0"/>
-                <a:ea typeface="Arial" pitchFamily="34" charset="-122"/>
-                <a:cs typeface="Arial" pitchFamily="34" charset="-120"/>
+                  <a:srgbClr val="C8161D"/>
+                </a:solidFill>
+                <a:latin typeface="Arial" pitchFamily="34" charset="0"/>
+                <a:ea typeface="BIZ UDPGothic" pitchFamily="34" charset="-122"/>
+                <a:cs typeface="BIZ UDPGothic" pitchFamily="34" charset="-120"/>
               </a:rPr>
               <a:t>03</a:t>
             </a:r>
@@ -11361,11 +11361,11 @@
             <a:r>
               <a:rPr lang="en-US" sz="1500" b="1" dirty="0">
                 <a:solidFill>
-                  <a:srgbClr val="F5F5F0"/>
-                </a:solidFill>
-                <a:latin typeface="Arial" pitchFamily="34" charset="0"/>
-                <a:ea typeface="Arial" pitchFamily="34" charset="-122"/>
-                <a:cs typeface="Arial" pitchFamily="34" charset="-120"/>
+                  <a:srgbClr val="16181D"/>
+                </a:solidFill>
+                <a:latin typeface="Arial" pitchFamily="34" charset="0"/>
+                <a:ea typeface="BIZ UDPGothic" pitchFamily="34" charset="-122"/>
+                <a:cs typeface="BIZ UDPGothic" pitchFamily="34" charset="-120"/>
               </a:rPr>
               <a:t>3つの税から選べる制度</a:t>
             </a:r>
@@ -11403,11 +11403,11 @@
             <a:r>
               <a:rPr lang="en-US" sz="1100" dirty="0">
                 <a:solidFill>
-                  <a:srgbClr val="CCCCCC"/>
-                </a:solidFill>
-                <a:latin typeface="Arial" pitchFamily="34" charset="0"/>
-                <a:ea typeface="Arial" pitchFamily="34" charset="-122"/>
-                <a:cs typeface="Arial" pitchFamily="34" charset="-120"/>
+                  <a:srgbClr val="2B2F36"/>
+                </a:solidFill>
+                <a:latin typeface="Arial" pitchFamily="34" charset="0"/>
+                <a:ea typeface="BIZ UDPGothic" pitchFamily="34" charset="-122"/>
+                <a:cs typeface="BIZ UDPGothic" pitchFamily="34" charset="-120"/>
               </a:rPr>
               <a:t>所得税・住民税・消費税、それぞれの仕組み</a:t>
             </a:r>
@@ -11432,11 +11432,11 @@
             </a:avLst>
           </a:prstGeom>
           <a:solidFill>
-            <a:srgbClr val="1A1A1A"/>
+            <a:srgbClr val="FFFFFF"/>
           </a:solidFill>
           <a:ln w="12700">
             <a:solidFill>
-              <a:srgbClr val="2E2E2E"/>
+              <a:srgbClr val="DDE0E6"/>
             </a:solidFill>
             <a:prstDash val="solid"/>
           </a:ln>
@@ -11469,11 +11469,11 @@
             <a:r>
               <a:rPr lang="en-US" sz="3000" b="1" dirty="0">
                 <a:solidFill>
-                  <a:srgbClr val="D62828"/>
-                </a:solidFill>
-                <a:latin typeface="Arial" pitchFamily="34" charset="0"/>
-                <a:ea typeface="Arial" pitchFamily="34" charset="-122"/>
-                <a:cs typeface="Arial" pitchFamily="34" charset="-120"/>
+                  <a:srgbClr val="C8161D"/>
+                </a:solidFill>
+                <a:latin typeface="Arial" pitchFamily="34" charset="0"/>
+                <a:ea typeface="BIZ UDPGothic" pitchFamily="34" charset="-122"/>
+                <a:cs typeface="BIZ UDPGothic" pitchFamily="34" charset="-120"/>
               </a:rPr>
               <a:t>04</a:t>
             </a:r>
@@ -11508,11 +11508,11 @@
             <a:r>
               <a:rPr lang="en-US" sz="1500" b="1" dirty="0">
                 <a:solidFill>
-                  <a:srgbClr val="F5F5F0"/>
-                </a:solidFill>
-                <a:latin typeface="Arial" pitchFamily="34" charset="0"/>
-                <a:ea typeface="Arial" pitchFamily="34" charset="-122"/>
-                <a:cs typeface="Arial" pitchFamily="34" charset="-120"/>
+                  <a:srgbClr val="16181D"/>
+                </a:solidFill>
+                <a:latin typeface="Arial" pitchFamily="34" charset="0"/>
+                <a:ea typeface="BIZ UDPGothic" pitchFamily="34" charset="-122"/>
+                <a:cs typeface="BIZ UDPGothic" pitchFamily="34" charset="-120"/>
               </a:rPr>
               <a:t>お金の「出口」設計</a:t>
             </a:r>
@@ -11550,11 +11550,11 @@
             <a:r>
               <a:rPr lang="en-US" sz="1100" dirty="0">
                 <a:solidFill>
-                  <a:srgbClr val="CCCCCC"/>
-                </a:solidFill>
-                <a:latin typeface="Arial" pitchFamily="34" charset="0"/>
-                <a:ea typeface="Arial" pitchFamily="34" charset="-122"/>
-                <a:cs typeface="Arial" pitchFamily="34" charset="-120"/>
+                  <a:srgbClr val="2B2F36"/>
+                </a:solidFill>
+                <a:latin typeface="Arial" pitchFamily="34" charset="0"/>
+                <a:ea typeface="BIZ UDPGothic" pitchFamily="34" charset="-122"/>
+                <a:cs typeface="BIZ UDPGothic" pitchFamily="34" charset="-120"/>
               </a:rPr>
               <a:t>メニュー・115%キャップ・ポイント還元</a:t>
             </a:r>
@@ -11579,11 +11579,11 @@
             </a:avLst>
           </a:prstGeom>
           <a:solidFill>
-            <a:srgbClr val="1A1A1A"/>
+            <a:srgbClr val="FFFFFF"/>
           </a:solidFill>
           <a:ln w="12700">
             <a:solidFill>
-              <a:srgbClr val="2E2E2E"/>
+              <a:srgbClr val="DDE0E6"/>
             </a:solidFill>
             <a:prstDash val="solid"/>
           </a:ln>
@@ -11616,11 +11616,11 @@
             <a:r>
               <a:rPr lang="en-US" sz="3000" b="1" dirty="0">
                 <a:solidFill>
-                  <a:srgbClr val="D62828"/>
-                </a:solidFill>
-                <a:latin typeface="Arial" pitchFamily="34" charset="0"/>
-                <a:ea typeface="Arial" pitchFamily="34" charset="-122"/>
-                <a:cs typeface="Arial" pitchFamily="34" charset="-120"/>
+                  <a:srgbClr val="C8161D"/>
+                </a:solidFill>
+                <a:latin typeface="Arial" pitchFamily="34" charset="0"/>
+                <a:ea typeface="BIZ UDPGothic" pitchFamily="34" charset="-122"/>
+                <a:cs typeface="BIZ UDPGothic" pitchFamily="34" charset="-120"/>
               </a:rPr>
               <a:t>05</a:t>
             </a:r>
@@ -11655,11 +11655,11 @@
             <a:r>
               <a:rPr lang="en-US" sz="1500" b="1" dirty="0">
                 <a:solidFill>
-                  <a:srgbClr val="F5F5F0"/>
-                </a:solidFill>
-                <a:latin typeface="Arial" pitchFamily="34" charset="0"/>
-                <a:ea typeface="Arial" pitchFamily="34" charset="-122"/>
-                <a:cs typeface="Arial" pitchFamily="34" charset="-120"/>
+                  <a:srgbClr val="16181D"/>
+                </a:solidFill>
+                <a:latin typeface="Arial" pitchFamily="34" charset="0"/>
+                <a:ea typeface="BIZ UDPGothic" pitchFamily="34" charset="-122"/>
+                <a:cs typeface="BIZ UDPGothic" pitchFamily="34" charset="-120"/>
               </a:rPr>
               <a:t>数字で見る影響</a:t>
             </a:r>
@@ -11697,11 +11697,11 @@
             <a:r>
               <a:rPr lang="en-US" sz="1100" dirty="0">
                 <a:solidFill>
-                  <a:srgbClr val="CCCCCC"/>
-                </a:solidFill>
-                <a:latin typeface="Arial" pitchFamily="34" charset="0"/>
-                <a:ea typeface="Arial" pitchFamily="34" charset="-122"/>
-                <a:cs typeface="Arial" pitchFamily="34" charset="-120"/>
+                  <a:srgbClr val="2B2F36"/>
+                </a:solidFill>
+                <a:latin typeface="Arial" pitchFamily="34" charset="0"/>
+                <a:ea typeface="BIZ UDPGothic" pitchFamily="34" charset="-122"/>
+                <a:cs typeface="BIZ UDPGothic" pitchFamily="34" charset="-120"/>
               </a:rPr>
               <a:t>年収別の控除額と、全国規模のマクロ試算</a:t>
             </a:r>
@@ -11726,11 +11726,11 @@
             </a:avLst>
           </a:prstGeom>
           <a:solidFill>
-            <a:srgbClr val="1A1A1A"/>
+            <a:srgbClr val="FFFFFF"/>
           </a:solidFill>
           <a:ln w="12700">
             <a:solidFill>
-              <a:srgbClr val="2E2E2E"/>
+              <a:srgbClr val="DDE0E6"/>
             </a:solidFill>
             <a:prstDash val="solid"/>
           </a:ln>
@@ -11763,11 +11763,11 @@
             <a:r>
               <a:rPr lang="en-US" sz="3000" b="1" dirty="0">
                 <a:solidFill>
-                  <a:srgbClr val="D62828"/>
-                </a:solidFill>
-                <a:latin typeface="Arial" pitchFamily="34" charset="0"/>
-                <a:ea typeface="Arial" pitchFamily="34" charset="-122"/>
-                <a:cs typeface="Arial" pitchFamily="34" charset="-120"/>
+                  <a:srgbClr val="C8161D"/>
+                </a:solidFill>
+                <a:latin typeface="Arial" pitchFamily="34" charset="0"/>
+                <a:ea typeface="BIZ UDPGothic" pitchFamily="34" charset="-122"/>
+                <a:cs typeface="BIZ UDPGothic" pitchFamily="34" charset="-120"/>
               </a:rPr>
               <a:t>06</a:t>
             </a:r>
@@ -11802,11 +11802,11 @@
             <a:r>
               <a:rPr lang="en-US" sz="1500" b="1" dirty="0">
                 <a:solidFill>
-                  <a:srgbClr val="F5F5F0"/>
-                </a:solidFill>
-                <a:latin typeface="Arial" pitchFamily="34" charset="0"/>
-                <a:ea typeface="Arial" pitchFamily="34" charset="-122"/>
-                <a:cs typeface="Arial" pitchFamily="34" charset="-120"/>
+                  <a:srgbClr val="16181D"/>
+                </a:solidFill>
+                <a:latin typeface="Arial" pitchFamily="34" charset="0"/>
+                <a:ea typeface="BIZ UDPGothic" pitchFamily="34" charset="-122"/>
+                <a:cs typeface="BIZ UDPGothic" pitchFamily="34" charset="-120"/>
               </a:rPr>
               <a:t>不正を防ぐ仕組み</a:t>
             </a:r>
@@ -11844,11 +11844,11 @@
             <a:r>
               <a:rPr lang="en-US" sz="1100" dirty="0">
                 <a:solidFill>
-                  <a:srgbClr val="CCCCCC"/>
-                </a:solidFill>
-                <a:latin typeface="Arial" pitchFamily="34" charset="0"/>
-                <a:ea typeface="Arial" pitchFamily="34" charset="-122"/>
-                <a:cs typeface="Arial" pitchFamily="34" charset="-120"/>
+                  <a:srgbClr val="2B2F36"/>
+                </a:solidFill>
+                <a:latin typeface="Arial" pitchFamily="34" charset="0"/>
+                <a:ea typeface="BIZ UDPGothic" pitchFamily="34" charset="-122"/>
+                <a:cs typeface="BIZ UDPGothic" pitchFamily="34" charset="-120"/>
               </a:rPr>
               <a:t>なりすまし・身内取引・予算過小申告への対策</a:t>
             </a:r>
@@ -11870,7 +11870,7 @@
     <p:bg>
       <p:bgPr>
         <a:solidFill>
-          <a:srgbClr val="0A0A0A"/>
+          <a:srgbClr val="F5F6F8"/>
         </a:solidFill>
       </p:bgPr>
     </p:bg>
@@ -11915,11 +11915,11 @@
             <a:r>
               <a:rPr lang="en-US" sz="1200" b="1" spc="300" kern="0" dirty="0">
                 <a:solidFill>
-                  <a:srgbClr val="D62828"/>
-                </a:solidFill>
-                <a:latin typeface="Arial" pitchFamily="34" charset="0"/>
-                <a:ea typeface="Arial" pitchFamily="34" charset="-122"/>
-                <a:cs typeface="Arial" pitchFamily="34" charset="-120"/>
+                  <a:srgbClr val="C8161D"/>
+                </a:solidFill>
+                <a:latin typeface="Arial" pitchFamily="34" charset="0"/>
+                <a:ea typeface="BIZ UDPGothic" pitchFamily="34" charset="-122"/>
+                <a:cs typeface="BIZ UDPGothic" pitchFamily="34" charset="-120"/>
               </a:rPr>
               <a:t>6. 他の提言とのつながり</a:t>
             </a:r>
@@ -11954,11 +11954,11 @@
             <a:r>
               <a:rPr lang="en-US" sz="3000" b="1" dirty="0">
                 <a:solidFill>
-                  <a:srgbClr val="F5F5F0"/>
-                </a:solidFill>
-                <a:latin typeface="Arial" pitchFamily="34" charset="0"/>
-                <a:ea typeface="Arial" pitchFamily="34" charset="-122"/>
-                <a:cs typeface="Arial" pitchFamily="34" charset="-120"/>
+                  <a:srgbClr val="16181D"/>
+                </a:solidFill>
+                <a:latin typeface="Arial" pitchFamily="34" charset="0"/>
+                <a:ea typeface="BIZ UDPGothic" pitchFamily="34" charset="-122"/>
+                <a:cs typeface="BIZ UDPGothic" pitchFamily="34" charset="-120"/>
               </a:rPr>
               <a:t>提言001・004・005は、同じ哲学でつながっている</a:t>
             </a:r>
@@ -11993,11 +11993,11 @@
             <a:r>
               <a:rPr lang="en-US" sz="1000" dirty="0">
                 <a:solidFill>
-                  <a:srgbClr val="CCCCCC"/>
-                </a:solidFill>
-                <a:latin typeface="Arial" pitchFamily="34" charset="0"/>
-                <a:ea typeface="Arial" pitchFamily="34" charset="-122"/>
-                <a:cs typeface="Arial" pitchFamily="34" charset="-120"/>
+                  <a:srgbClr val="2B2F36"/>
+                </a:solidFill>
+                <a:latin typeface="Arial" pitchFamily="34" charset="0"/>
+                <a:ea typeface="BIZ UDPGothic" pitchFamily="34" charset="-122"/>
+                <a:cs typeface="BIZ UDPGothic" pitchFamily="34" charset="-120"/>
               </a:rPr>
               <a:t>20</a:t>
             </a:r>
@@ -12032,11 +12032,11 @@
             <a:r>
               <a:rPr lang="en-US" sz="900" dirty="0">
                 <a:solidFill>
-                  <a:srgbClr val="555555"/>
-                </a:solidFill>
-                <a:latin typeface="Arial" pitchFamily="34" charset="0"/>
-                <a:ea typeface="Arial" pitchFamily="34" charset="-122"/>
-                <a:cs typeface="Arial" pitchFamily="34" charset="-120"/>
+                  <a:srgbClr val="9AA0AA"/>
+                </a:solidFill>
+                <a:latin typeface="Arial" pitchFamily="34" charset="0"/>
+                <a:ea typeface="BIZ UDPGothic" pitchFamily="34" charset="-122"/>
+                <a:cs typeface="BIZ UDPGothic" pitchFamily="34" charset="-120"/>
               </a:rPr>
               <a:t>REBOOT JAPAN ── 提言005</a:t>
             </a:r>
@@ -12061,11 +12061,11 @@
             </a:avLst>
           </a:prstGeom>
           <a:solidFill>
-            <a:srgbClr val="1A3A1A"/>
+            <a:srgbClr val="E9EFF8"/>
           </a:solidFill>
           <a:ln w="12700">
             <a:solidFill>
-              <a:srgbClr val="2E2E2E"/>
+              <a:srgbClr val="DDE0E6"/>
             </a:solidFill>
             <a:prstDash val="solid"/>
           </a:ln>
@@ -12098,11 +12098,11 @@
             <a:r>
               <a:rPr lang="en-US" sz="2000" b="1" dirty="0">
                 <a:solidFill>
-                  <a:srgbClr val="88CC88"/>
-                </a:solidFill>
-                <a:latin typeface="Arial" pitchFamily="34" charset="0"/>
-                <a:ea typeface="Arial" pitchFamily="34" charset="-122"/>
-                <a:cs typeface="Arial" pitchFamily="34" charset="-120"/>
+                  <a:srgbClr val="3A6AAE"/>
+                </a:solidFill>
+                <a:latin typeface="Arial" pitchFamily="34" charset="0"/>
+                <a:ea typeface="BIZ UDPGothic" pitchFamily="34" charset="-122"/>
+                <a:cs typeface="BIZ UDPGothic" pitchFamily="34" charset="-120"/>
               </a:rPr>
               <a:t>提言001</a:t>
             </a:r>
@@ -12140,11 +12140,11 @@
             <a:r>
               <a:rPr lang="en-US" sz="1400" b="1" dirty="0">
                 <a:solidFill>
-                  <a:srgbClr val="F5F5F0"/>
-                </a:solidFill>
-                <a:latin typeface="Arial" pitchFamily="34" charset="0"/>
-                <a:ea typeface="Arial" pitchFamily="34" charset="-122"/>
-                <a:cs typeface="Arial" pitchFamily="34" charset="-120"/>
+                  <a:srgbClr val="16181D"/>
+                </a:solidFill>
+                <a:latin typeface="Arial" pitchFamily="34" charset="0"/>
+                <a:ea typeface="BIZ UDPGothic" pitchFamily="34" charset="-122"/>
+                <a:cs typeface="BIZ UDPGothic" pitchFamily="34" charset="-120"/>
               </a:rPr>
               <a:t>日本再起動プラン</a:t>
             </a:r>
@@ -12169,7 +12169,7 @@
           <a:noFill/>
           <a:ln w="9525">
             <a:solidFill>
-              <a:srgbClr val="2E2E2E"/>
+              <a:srgbClr val="DDE0E6"/>
             </a:solidFill>
             <a:prstDash val="solid"/>
           </a:ln>
@@ -12229,11 +12229,11 @@
             <a:r>
               <a:rPr lang="en-US" sz="1200" dirty="0">
                 <a:solidFill>
-                  <a:srgbClr val="CCCCCC"/>
-                </a:solidFill>
-                <a:latin typeface="Arial" pitchFamily="34" charset="0"/>
-                <a:ea typeface="Arial" pitchFamily="34" charset="-122"/>
-                <a:cs typeface="Arial" pitchFamily="34" charset="-120"/>
+                  <a:srgbClr val="2B2F36"/>
+                </a:solidFill>
+                <a:latin typeface="Arial" pitchFamily="34" charset="0"/>
+                <a:ea typeface="BIZ UDPGothic" pitchFamily="34" charset="-122"/>
+                <a:cs typeface="BIZ UDPGothic" pitchFamily="34" charset="-120"/>
               </a:rPr>
               <a:t>最低賃金2,000円で中央値に収束</a:t>
             </a:r>
@@ -12295,11 +12295,11 @@
             <a:r>
               <a:rPr lang="en-US" sz="1200" dirty="0">
                 <a:solidFill>
-                  <a:srgbClr val="CCCCCC"/>
-                </a:solidFill>
-                <a:latin typeface="Arial" pitchFamily="34" charset="0"/>
-                <a:ea typeface="Arial" pitchFamily="34" charset="-122"/>
-                <a:cs typeface="Arial" pitchFamily="34" charset="-120"/>
+                  <a:srgbClr val="2B2F36"/>
+                </a:solidFill>
+                <a:latin typeface="Arial" pitchFamily="34" charset="0"/>
+                <a:ea typeface="BIZ UDPGothic" pitchFamily="34" charset="-122"/>
+                <a:cs typeface="BIZ UDPGothic" pitchFamily="34" charset="-120"/>
               </a:rPr>
               <a:t>消費税増収（+13兆円）が005の財源</a:t>
             </a:r>
@@ -12324,11 +12324,11 @@
             </a:avLst>
           </a:prstGeom>
           <a:solidFill>
-            <a:srgbClr val="1A1A3A"/>
+            <a:srgbClr val="E9EFF8"/>
           </a:solidFill>
           <a:ln w="12700">
             <a:solidFill>
-              <a:srgbClr val="2E2E2E"/>
+              <a:srgbClr val="DDE0E6"/>
             </a:solidFill>
             <a:prstDash val="solid"/>
           </a:ln>
@@ -12361,11 +12361,11 @@
             <a:r>
               <a:rPr lang="en-US" sz="2000" b="1" dirty="0">
                 <a:solidFill>
-                  <a:srgbClr val="8888CC"/>
-                </a:solidFill>
-                <a:latin typeface="Arial" pitchFamily="34" charset="0"/>
-                <a:ea typeface="Arial" pitchFamily="34" charset="-122"/>
-                <a:cs typeface="Arial" pitchFamily="34" charset="-120"/>
+                  <a:srgbClr val="4B6FA8"/>
+                </a:solidFill>
+                <a:latin typeface="Arial" pitchFamily="34" charset="0"/>
+                <a:ea typeface="BIZ UDPGothic" pitchFamily="34" charset="-122"/>
+                <a:cs typeface="BIZ UDPGothic" pitchFamily="34" charset="-120"/>
               </a:rPr>
               <a:t>提言004</a:t>
             </a:r>
@@ -12403,11 +12403,11 @@
             <a:r>
               <a:rPr lang="en-US" sz="1400" b="1" dirty="0">
                 <a:solidFill>
-                  <a:srgbClr val="F5F5F0"/>
-                </a:solidFill>
-                <a:latin typeface="Arial" pitchFamily="34" charset="0"/>
-                <a:ea typeface="Arial" pitchFamily="34" charset="-122"/>
-                <a:cs typeface="Arial" pitchFamily="34" charset="-120"/>
+                  <a:srgbClr val="16181D"/>
+                </a:solidFill>
+                <a:latin typeface="Arial" pitchFamily="34" charset="0"/>
+                <a:ea typeface="BIZ UDPGothic" pitchFamily="34" charset="-122"/>
+                <a:cs typeface="BIZ UDPGothic" pitchFamily="34" charset="-120"/>
               </a:rPr>
               <a:t>相続税の不条理是正</a:t>
             </a:r>
@@ -12432,7 +12432,7 @@
           <a:noFill/>
           <a:ln w="9525">
             <a:solidFill>
-              <a:srgbClr val="2E2E2E"/>
+              <a:srgbClr val="DDE0E6"/>
             </a:solidFill>
             <a:prstDash val="solid"/>
           </a:ln>
@@ -12492,11 +12492,11 @@
             <a:r>
               <a:rPr lang="en-US" sz="1200" dirty="0">
                 <a:solidFill>
-                  <a:srgbClr val="CCCCCC"/>
-                </a:solidFill>
-                <a:latin typeface="Arial" pitchFamily="34" charset="0"/>
-                <a:ea typeface="Arial" pitchFamily="34" charset="-122"/>
-                <a:cs typeface="Arial" pitchFamily="34" charset="-120"/>
+                  <a:srgbClr val="2B2F36"/>
+                </a:solidFill>
+                <a:latin typeface="Arial" pitchFamily="34" charset="0"/>
+                <a:ea typeface="BIZ UDPGothic" pitchFamily="34" charset="-122"/>
+                <a:cs typeface="BIZ UDPGothic" pitchFamily="34" charset="-120"/>
               </a:rPr>
               <a:t>超富裕層にも「敬意ある税率」を</a:t>
             </a:r>
@@ -12558,11 +12558,11 @@
             <a:r>
               <a:rPr lang="en-US" sz="1200" dirty="0">
                 <a:solidFill>
-                  <a:srgbClr val="CCCCCC"/>
-                </a:solidFill>
-                <a:latin typeface="Arial" pitchFamily="34" charset="0"/>
-                <a:ea typeface="Arial" pitchFamily="34" charset="-122"/>
-                <a:cs typeface="Arial" pitchFamily="34" charset="-120"/>
+                  <a:srgbClr val="2B2F36"/>
+                </a:solidFill>
+                <a:latin typeface="Arial" pitchFamily="34" charset="0"/>
+                <a:ea typeface="BIZ UDPGothic" pitchFamily="34" charset="-122"/>
+                <a:cs typeface="BIZ UDPGothic" pitchFamily="34" charset="-120"/>
               </a:rPr>
               <a:t>相続税収への依存を前提としない</a:t>
             </a:r>
@@ -12587,11 +12587,11 @@
             </a:avLst>
           </a:prstGeom>
           <a:solidFill>
-            <a:srgbClr val="2A1414"/>
+            <a:srgbClr val="FCEBEB"/>
           </a:solidFill>
           <a:ln w="12700">
             <a:solidFill>
-              <a:srgbClr val="2E2E2E"/>
+              <a:srgbClr val="DDE0E6"/>
             </a:solidFill>
             <a:prstDash val="solid"/>
           </a:ln>
@@ -12624,11 +12624,11 @@
             <a:r>
               <a:rPr lang="en-US" sz="2000" b="1" dirty="0">
                 <a:solidFill>
-                  <a:srgbClr val="D62828"/>
-                </a:solidFill>
-                <a:latin typeface="Arial" pitchFamily="34" charset="0"/>
-                <a:ea typeface="Arial" pitchFamily="34" charset="-122"/>
-                <a:cs typeface="Arial" pitchFamily="34" charset="-120"/>
+                  <a:srgbClr val="C8161D"/>
+                </a:solidFill>
+                <a:latin typeface="Arial" pitchFamily="34" charset="0"/>
+                <a:ea typeface="BIZ UDPGothic" pitchFamily="34" charset="-122"/>
+                <a:cs typeface="BIZ UDPGothic" pitchFamily="34" charset="-120"/>
               </a:rPr>
               <a:t>提言005</a:t>
             </a:r>
@@ -12666,11 +12666,11 @@
             <a:r>
               <a:rPr lang="en-US" sz="1400" b="1" dirty="0">
                 <a:solidFill>
-                  <a:srgbClr val="F5F5F0"/>
-                </a:solidFill>
-                <a:latin typeface="Arial" pitchFamily="34" charset="0"/>
-                <a:ea typeface="Arial" pitchFamily="34" charset="-122"/>
-                <a:cs typeface="Arial" pitchFamily="34" charset="-120"/>
+                  <a:srgbClr val="16181D"/>
+                </a:solidFill>
+                <a:latin typeface="Arial" pitchFamily="34" charset="0"/>
+                <a:ea typeface="BIZ UDPGothic" pitchFamily="34" charset="-122"/>
+                <a:cs typeface="BIZ UDPGothic" pitchFamily="34" charset="-120"/>
               </a:rPr>
               <a:t>用途指定寄付制度</a:t>
             </a:r>
@@ -12695,7 +12695,7 @@
           <a:noFill/>
           <a:ln w="9525">
             <a:solidFill>
-              <a:srgbClr val="2E2E2E"/>
+              <a:srgbClr val="DDE0E6"/>
             </a:solidFill>
             <a:prstDash val="solid"/>
           </a:ln>
@@ -12755,11 +12755,11 @@
             <a:r>
               <a:rPr lang="en-US" sz="1200" dirty="0">
                 <a:solidFill>
-                  <a:srgbClr val="CCCCCC"/>
-                </a:solidFill>
-                <a:latin typeface="Arial" pitchFamily="34" charset="0"/>
-                <a:ea typeface="Arial" pitchFamily="34" charset="-122"/>
-                <a:cs typeface="Arial" pitchFamily="34" charset="-120"/>
+                  <a:srgbClr val="2B2F36"/>
+                </a:solidFill>
+                <a:latin typeface="Arial" pitchFamily="34" charset="0"/>
+                <a:ea typeface="BIZ UDPGothic" pitchFamily="34" charset="-122"/>
+                <a:cs typeface="BIZ UDPGothic" pitchFamily="34" charset="-120"/>
               </a:rPr>
               <a:t>所得税の基準が中央値（5%）</a:t>
             </a:r>
@@ -12821,11 +12821,11 @@
             <a:r>
               <a:rPr lang="en-US" sz="1200" dirty="0">
                 <a:solidFill>
-                  <a:srgbClr val="CCCCCC"/>
-                </a:solidFill>
-                <a:latin typeface="Arial" pitchFamily="34" charset="0"/>
-                <a:ea typeface="Arial" pitchFamily="34" charset="-122"/>
-                <a:cs typeface="Arial" pitchFamily="34" charset="-120"/>
+                  <a:srgbClr val="2B2F36"/>
+                </a:solidFill>
+                <a:latin typeface="Arial" pitchFamily="34" charset="0"/>
+                <a:ea typeface="BIZ UDPGothic" pitchFamily="34" charset="-122"/>
+                <a:cs typeface="BIZ UDPGothic" pitchFamily="34" charset="-120"/>
               </a:rPr>
               <a:t>001の消費税増収枠内で財源を確保</a:t>
             </a:r>
@@ -12860,11 +12860,11 @@
             <a:r>
               <a:rPr lang="en-US" sz="1250" i="1" dirty="0">
                 <a:solidFill>
-                  <a:srgbClr val="D62828"/>
-                </a:solidFill>
-                <a:latin typeface="Arial" pitchFamily="34" charset="0"/>
-                <a:ea typeface="Arial" pitchFamily="34" charset="-122"/>
-                <a:cs typeface="Arial" pitchFamily="34" charset="-120"/>
+                  <a:srgbClr val="C8161D"/>
+                </a:solidFill>
+                <a:latin typeface="Arial" pitchFamily="34" charset="0"/>
+                <a:ea typeface="BIZ UDPGothic" pitchFamily="34" charset="-122"/>
+                <a:cs typeface="BIZ UDPGothic" pitchFamily="34" charset="-120"/>
               </a:rPr>
               <a:t>「頑張って働き、納税してきた人への、もう一つの選択肢。」それが提言005の核心です。</a:t>
             </a:r>
@@ -12886,7 +12886,7 @@
     <p:bg>
       <p:bgPr>
         <a:solidFill>
-          <a:srgbClr val="0A0A0A"/>
+          <a:srgbClr val="F5F6F8"/>
         </a:solidFill>
       </p:bgPr>
     </p:bg>
@@ -12931,11 +12931,11 @@
             <a:r>
               <a:rPr lang="en-US" sz="1200" b="1" spc="300" kern="0" dirty="0">
                 <a:solidFill>
-                  <a:srgbClr val="D62828"/>
-                </a:solidFill>
-                <a:latin typeface="Arial" pitchFamily="34" charset="0"/>
-                <a:ea typeface="Arial" pitchFamily="34" charset="-122"/>
-                <a:cs typeface="Arial" pitchFamily="34" charset="-120"/>
+                  <a:srgbClr val="C8161D"/>
+                </a:solidFill>
+                <a:latin typeface="Arial" pitchFamily="34" charset="0"/>
+                <a:ea typeface="BIZ UDPGothic" pitchFamily="34" charset="-122"/>
+                <a:cs typeface="BIZ UDPGothic" pitchFamily="34" charset="-120"/>
               </a:rPr>
               <a:t>今後の検討課題</a:t>
             </a:r>
@@ -12970,11 +12970,11 @@
             <a:r>
               <a:rPr lang="en-US" sz="3000" b="1" dirty="0">
                 <a:solidFill>
-                  <a:srgbClr val="F5F5F0"/>
-                </a:solidFill>
-                <a:latin typeface="Arial" pitchFamily="34" charset="0"/>
-                <a:ea typeface="Arial" pitchFamily="34" charset="-122"/>
-                <a:cs typeface="Arial" pitchFamily="34" charset="-120"/>
+                  <a:srgbClr val="16181D"/>
+                </a:solidFill>
+                <a:latin typeface="Arial" pitchFamily="34" charset="0"/>
+                <a:ea typeface="BIZ UDPGothic" pitchFamily="34" charset="-122"/>
+                <a:cs typeface="BIZ UDPGothic" pitchFamily="34" charset="-120"/>
               </a:rPr>
               <a:t>まだ詰めが必要な、5つの論点</a:t>
             </a:r>
@@ -13009,11 +13009,11 @@
             <a:r>
               <a:rPr lang="en-US" sz="1000" dirty="0">
                 <a:solidFill>
-                  <a:srgbClr val="CCCCCC"/>
-                </a:solidFill>
-                <a:latin typeface="Arial" pitchFamily="34" charset="0"/>
-                <a:ea typeface="Arial" pitchFamily="34" charset="-122"/>
-                <a:cs typeface="Arial" pitchFamily="34" charset="-120"/>
+                  <a:srgbClr val="2B2F36"/>
+                </a:solidFill>
+                <a:latin typeface="Arial" pitchFamily="34" charset="0"/>
+                <a:ea typeface="BIZ UDPGothic" pitchFamily="34" charset="-122"/>
+                <a:cs typeface="BIZ UDPGothic" pitchFamily="34" charset="-120"/>
               </a:rPr>
               <a:t>21</a:t>
             </a:r>
@@ -13048,11 +13048,11 @@
             <a:r>
               <a:rPr lang="en-US" sz="900" dirty="0">
                 <a:solidFill>
-                  <a:srgbClr val="555555"/>
-                </a:solidFill>
-                <a:latin typeface="Arial" pitchFamily="34" charset="0"/>
-                <a:ea typeface="Arial" pitchFamily="34" charset="-122"/>
-                <a:cs typeface="Arial" pitchFamily="34" charset="-120"/>
+                  <a:srgbClr val="9AA0AA"/>
+                </a:solidFill>
+                <a:latin typeface="Arial" pitchFamily="34" charset="0"/>
+                <a:ea typeface="BIZ UDPGothic" pitchFamily="34" charset="-122"/>
+                <a:cs typeface="BIZ UDPGothic" pitchFamily="34" charset="-120"/>
               </a:rPr>
               <a:t>REBOOT JAPAN ── 提言005</a:t>
             </a:r>
@@ -13077,11 +13077,11 @@
             </a:avLst>
           </a:prstGeom>
           <a:solidFill>
-            <a:srgbClr val="1A1A1A"/>
+            <a:srgbClr val="FFFFFF"/>
           </a:solidFill>
           <a:ln w="12700">
             <a:solidFill>
-              <a:srgbClr val="2E2E2E"/>
+              <a:srgbClr val="DDE0E6"/>
             </a:solidFill>
             <a:prstDash val="solid"/>
           </a:ln>
@@ -13114,11 +13114,11 @@
             <a:r>
               <a:rPr lang="en-US" sz="1800" b="1" dirty="0">
                 <a:solidFill>
-                  <a:srgbClr val="D62828"/>
-                </a:solidFill>
-                <a:latin typeface="Arial" pitchFamily="34" charset="0"/>
-                <a:ea typeface="Arial" pitchFamily="34" charset="-122"/>
-                <a:cs typeface="Arial" pitchFamily="34" charset="-120"/>
+                  <a:srgbClr val="C8161D"/>
+                </a:solidFill>
+                <a:latin typeface="Arial" pitchFamily="34" charset="0"/>
+                <a:ea typeface="BIZ UDPGothic" pitchFamily="34" charset="-122"/>
+                <a:cs typeface="BIZ UDPGothic" pitchFamily="34" charset="-120"/>
               </a:rPr>
               <a:t>1</a:t>
             </a:r>
@@ -13156,11 +13156,11 @@
             <a:r>
               <a:rPr lang="en-US" sz="1300" dirty="0">
                 <a:solidFill>
-                  <a:srgbClr val="CCCCCC"/>
-                </a:solidFill>
-                <a:latin typeface="Arial" pitchFamily="34" charset="0"/>
-                <a:ea typeface="Arial" pitchFamily="34" charset="-122"/>
-                <a:cs typeface="Arial" pitchFamily="34" charset="-120"/>
+                  <a:srgbClr val="2B2F36"/>
+                </a:solidFill>
+                <a:latin typeface="Arial" pitchFamily="34" charset="0"/>
+                <a:ea typeface="BIZ UDPGothic" pitchFamily="34" charset="-122"/>
+                <a:cs typeface="BIZ UDPGothic" pitchFamily="34" charset="-120"/>
               </a:rPr>
               <a:t>所得税控除の基準（中央値の税率）を、何年ごとに見直すか</a:t>
             </a:r>
@@ -13185,11 +13185,11 @@
             </a:avLst>
           </a:prstGeom>
           <a:solidFill>
-            <a:srgbClr val="1A1A1A"/>
+            <a:srgbClr val="FFFFFF"/>
           </a:solidFill>
           <a:ln w="12700">
             <a:solidFill>
-              <a:srgbClr val="2E2E2E"/>
+              <a:srgbClr val="DDE0E6"/>
             </a:solidFill>
             <a:prstDash val="solid"/>
           </a:ln>
@@ -13222,11 +13222,11 @@
             <a:r>
               <a:rPr lang="en-US" sz="1800" b="1" dirty="0">
                 <a:solidFill>
-                  <a:srgbClr val="D62828"/>
-                </a:solidFill>
-                <a:latin typeface="Arial" pitchFamily="34" charset="0"/>
-                <a:ea typeface="Arial" pitchFamily="34" charset="-122"/>
-                <a:cs typeface="Arial" pitchFamily="34" charset="-120"/>
+                  <a:srgbClr val="C8161D"/>
+                </a:solidFill>
+                <a:latin typeface="Arial" pitchFamily="34" charset="0"/>
+                <a:ea typeface="BIZ UDPGothic" pitchFamily="34" charset="-122"/>
+                <a:cs typeface="BIZ UDPGothic" pitchFamily="34" charset="-120"/>
               </a:rPr>
               <a:t>2</a:t>
             </a:r>
@@ -13264,11 +13264,11 @@
             <a:r>
               <a:rPr lang="en-US" sz="1300" dirty="0">
                 <a:solidFill>
-                  <a:srgbClr val="CCCCCC"/>
-                </a:solidFill>
-                <a:latin typeface="Arial" pitchFamily="34" charset="0"/>
-                <a:ea typeface="Arial" pitchFamily="34" charset="-122"/>
-                <a:cs typeface="Arial" pitchFamily="34" charset="-120"/>
+                  <a:srgbClr val="2B2F36"/>
+                </a:solidFill>
+                <a:latin typeface="Arial" pitchFamily="34" charset="0"/>
+                <a:ea typeface="BIZ UDPGothic" pitchFamily="34" charset="-122"/>
+                <a:cs typeface="BIZ UDPGothic" pitchFamily="34" charset="-120"/>
               </a:rPr>
               <a:t>消費税控除の対象「10万円超」の範囲（耐久消費財に限るか、サービス購入も含むか）</a:t>
             </a:r>
@@ -13293,11 +13293,11 @@
             </a:avLst>
           </a:prstGeom>
           <a:solidFill>
-            <a:srgbClr val="1A1A1A"/>
+            <a:srgbClr val="FFFFFF"/>
           </a:solidFill>
           <a:ln w="12700">
             <a:solidFill>
-              <a:srgbClr val="2E2E2E"/>
+              <a:srgbClr val="DDE0E6"/>
             </a:solidFill>
             <a:prstDash val="solid"/>
           </a:ln>
@@ -13330,11 +13330,11 @@
             <a:r>
               <a:rPr lang="en-US" sz="1800" b="1" dirty="0">
                 <a:solidFill>
-                  <a:srgbClr val="D62828"/>
-                </a:solidFill>
-                <a:latin typeface="Arial" pitchFamily="34" charset="0"/>
-                <a:ea typeface="Arial" pitchFamily="34" charset="-122"/>
-                <a:cs typeface="Arial" pitchFamily="34" charset="-120"/>
+                  <a:srgbClr val="C8161D"/>
+                </a:solidFill>
+                <a:latin typeface="Arial" pitchFamily="34" charset="0"/>
+                <a:ea typeface="BIZ UDPGothic" pitchFamily="34" charset="-122"/>
+                <a:cs typeface="BIZ UDPGothic" pitchFamily="34" charset="-120"/>
               </a:rPr>
               <a:t>3</a:t>
             </a:r>
@@ -13372,11 +13372,11 @@
             <a:r>
               <a:rPr lang="en-US" sz="1300" dirty="0">
                 <a:solidFill>
-                  <a:srgbClr val="CCCCCC"/>
-                </a:solidFill>
-                <a:latin typeface="Arial" pitchFamily="34" charset="0"/>
-                <a:ea typeface="Arial" pitchFamily="34" charset="-122"/>
-                <a:cs typeface="Arial" pitchFamily="34" charset="-120"/>
+                  <a:srgbClr val="2B2F36"/>
+                </a:solidFill>
+                <a:latin typeface="Arial" pitchFamily="34" charset="0"/>
+                <a:ea typeface="BIZ UDPGothic" pitchFamily="34" charset="-122"/>
+                <a:cs typeface="BIZ UDPGothic" pitchFamily="34" charset="-120"/>
               </a:rPr>
               <a:t>用途限定メニューの予算審査における、具体的な審査基準の設計</a:t>
             </a:r>
@@ -13401,11 +13401,11 @@
             </a:avLst>
           </a:prstGeom>
           <a:solidFill>
-            <a:srgbClr val="1A1A1A"/>
+            <a:srgbClr val="FFFFFF"/>
           </a:solidFill>
           <a:ln w="12700">
             <a:solidFill>
-              <a:srgbClr val="2E2E2E"/>
+              <a:srgbClr val="DDE0E6"/>
             </a:solidFill>
             <a:prstDash val="solid"/>
           </a:ln>
@@ -13438,11 +13438,11 @@
             <a:r>
               <a:rPr lang="en-US" sz="1800" b="1" dirty="0">
                 <a:solidFill>
-                  <a:srgbClr val="D62828"/>
-                </a:solidFill>
-                <a:latin typeface="Arial" pitchFamily="34" charset="0"/>
-                <a:ea typeface="Arial" pitchFamily="34" charset="-122"/>
-                <a:cs typeface="Arial" pitchFamily="34" charset="-120"/>
+                  <a:srgbClr val="C8161D"/>
+                </a:solidFill>
+                <a:latin typeface="Arial" pitchFamily="34" charset="0"/>
+                <a:ea typeface="BIZ UDPGothic" pitchFamily="34" charset="-122"/>
+                <a:cs typeface="BIZ UDPGothic" pitchFamily="34" charset="-120"/>
               </a:rPr>
               <a:t>4</a:t>
             </a:r>
@@ -13480,11 +13480,11 @@
             <a:r>
               <a:rPr lang="en-US" sz="1300" dirty="0">
                 <a:solidFill>
-                  <a:srgbClr val="CCCCCC"/>
-                </a:solidFill>
-                <a:latin typeface="Arial" pitchFamily="34" charset="0"/>
-                <a:ea typeface="Arial" pitchFamily="34" charset="-122"/>
-                <a:cs typeface="Arial" pitchFamily="34" charset="-120"/>
+                  <a:srgbClr val="2B2F36"/>
+                </a:solidFill>
+                <a:latin typeface="Arial" pitchFamily="34" charset="0"/>
+                <a:ea typeface="BIZ UDPGothic" pitchFamily="34" charset="-122"/>
+                <a:cs typeface="BIZ UDPGothic" pitchFamily="34" charset="-120"/>
               </a:rPr>
               <a:t>マイナポータルでの成果報告公開の、具体的な表示フォーマット</a:t>
             </a:r>
@@ -13509,11 +13509,11 @@
             </a:avLst>
           </a:prstGeom>
           <a:solidFill>
-            <a:srgbClr val="1A1A1A"/>
+            <a:srgbClr val="FFFFFF"/>
           </a:solidFill>
           <a:ln w="12700">
             <a:solidFill>
-              <a:srgbClr val="2E2E2E"/>
+              <a:srgbClr val="DDE0E6"/>
             </a:solidFill>
             <a:prstDash val="solid"/>
           </a:ln>
@@ -13546,11 +13546,11 @@
             <a:r>
               <a:rPr lang="en-US" sz="1800" b="1" dirty="0">
                 <a:solidFill>
-                  <a:srgbClr val="D62828"/>
-                </a:solidFill>
-                <a:latin typeface="Arial" pitchFamily="34" charset="0"/>
-                <a:ea typeface="Arial" pitchFamily="34" charset="-122"/>
-                <a:cs typeface="Arial" pitchFamily="34" charset="-120"/>
+                  <a:srgbClr val="C8161D"/>
+                </a:solidFill>
+                <a:latin typeface="Arial" pitchFamily="34" charset="0"/>
+                <a:ea typeface="BIZ UDPGothic" pitchFamily="34" charset="-122"/>
+                <a:cs typeface="BIZ UDPGothic" pitchFamily="34" charset="-120"/>
               </a:rPr>
               <a:t>5</a:t>
             </a:r>
@@ -13588,11 +13588,11 @@
             <a:r>
               <a:rPr lang="en-US" sz="1300" dirty="0">
                 <a:solidFill>
-                  <a:srgbClr val="CCCCCC"/>
-                </a:solidFill>
-                <a:latin typeface="Arial" pitchFamily="34" charset="0"/>
-                <a:ea typeface="Arial" pitchFamily="34" charset="-122"/>
-                <a:cs typeface="Arial" pitchFamily="34" charset="-120"/>
+                  <a:srgbClr val="2B2F36"/>
+                </a:solidFill>
+                <a:latin typeface="Arial" pitchFamily="34" charset="0"/>
+                <a:ea typeface="BIZ UDPGothic" pitchFamily="34" charset="-122"/>
+                <a:cs typeface="BIZ UDPGothic" pitchFamily="34" charset="-120"/>
               </a:rPr>
               <a:t>ふるさと納税の即時廃止に伴う、自治体側の移行対応（返礼品事業者との契約整理等）</a:t>
             </a:r>
@@ -13614,7 +13614,7 @@
     <p:bg>
       <p:bgPr>
         <a:solidFill>
-          <a:srgbClr val="0A0A0A"/>
+          <a:srgbClr val="F5F6F8"/>
         </a:solidFill>
       </p:bgPr>
     </p:bg>
@@ -13659,11 +13659,11 @@
             <a:r>
               <a:rPr lang="en-US" sz="1200" b="1" spc="300" kern="0" dirty="0">
                 <a:solidFill>
-                  <a:srgbClr val="D62828"/>
-                </a:solidFill>
-                <a:latin typeface="Arial" pitchFamily="34" charset="0"/>
-                <a:ea typeface="Arial" pitchFamily="34" charset="-122"/>
-                <a:cs typeface="Arial" pitchFamily="34" charset="-120"/>
+                  <a:srgbClr val="C8161D"/>
+                </a:solidFill>
+                <a:latin typeface="Arial" pitchFamily="34" charset="0"/>
+                <a:ea typeface="BIZ UDPGothic" pitchFamily="34" charset="-122"/>
+                <a:cs typeface="BIZ UDPGothic" pitchFamily="34" charset="-120"/>
               </a:rPr>
               <a:t>まとめ</a:t>
             </a:r>
@@ -13698,11 +13698,11 @@
             <a:r>
               <a:rPr lang="en-US" sz="1000" dirty="0">
                 <a:solidFill>
-                  <a:srgbClr val="CCCCCC"/>
-                </a:solidFill>
-                <a:latin typeface="Arial" pitchFamily="34" charset="0"/>
-                <a:ea typeface="Arial" pitchFamily="34" charset="-122"/>
-                <a:cs typeface="Arial" pitchFamily="34" charset="-120"/>
+                  <a:srgbClr val="2B2F36"/>
+                </a:solidFill>
+                <a:latin typeface="Arial" pitchFamily="34" charset="0"/>
+                <a:ea typeface="BIZ UDPGothic" pitchFamily="34" charset="-122"/>
+                <a:cs typeface="BIZ UDPGothic" pitchFamily="34" charset="-120"/>
               </a:rPr>
               <a:t>22</a:t>
             </a:r>
@@ -13737,11 +13737,11 @@
             <a:r>
               <a:rPr lang="en-US" sz="900" dirty="0">
                 <a:solidFill>
-                  <a:srgbClr val="555555"/>
-                </a:solidFill>
-                <a:latin typeface="Arial" pitchFamily="34" charset="0"/>
-                <a:ea typeface="Arial" pitchFamily="34" charset="-122"/>
-                <a:cs typeface="Arial" pitchFamily="34" charset="-120"/>
+                  <a:srgbClr val="9AA0AA"/>
+                </a:solidFill>
+                <a:latin typeface="Arial" pitchFamily="34" charset="0"/>
+                <a:ea typeface="BIZ UDPGothic" pitchFamily="34" charset="-122"/>
+                <a:cs typeface="BIZ UDPGothic" pitchFamily="34" charset="-120"/>
               </a:rPr>
               <a:t>REBOOT JAPAN ── 提言005</a:t>
             </a:r>
@@ -13776,11 +13776,11 @@
             <a:r>
               <a:rPr lang="en-US" sz="3000" b="1" dirty="0">
                 <a:solidFill>
-                  <a:srgbClr val="F5F5F0"/>
-                </a:solidFill>
-                <a:latin typeface="Arial" pitchFamily="34" charset="0"/>
-                <a:ea typeface="Arial" pitchFamily="34" charset="-122"/>
-                <a:cs typeface="Arial" pitchFamily="34" charset="-120"/>
+                  <a:srgbClr val="16181D"/>
+                </a:solidFill>
+                <a:latin typeface="Arial" pitchFamily="34" charset="0"/>
+                <a:ea typeface="BIZ UDPGothic" pitchFamily="34" charset="-122"/>
+                <a:cs typeface="BIZ UDPGothic" pitchFamily="34" charset="-120"/>
               </a:rPr>
               <a:t>税金を「取られる」のではなく、「託す」時代へ</a:t>
             </a:r>
@@ -13818,11 +13818,11 @@
             <a:r>
               <a:rPr lang="en-US" sz="1500" dirty="0">
                 <a:solidFill>
-                  <a:srgbClr val="CCCCCC"/>
-                </a:solidFill>
-                <a:latin typeface="Arial" pitchFamily="34" charset="0"/>
-                <a:ea typeface="Arial" pitchFamily="34" charset="-122"/>
-                <a:cs typeface="Arial" pitchFamily="34" charset="-120"/>
+                  <a:srgbClr val="2B2F36"/>
+                </a:solidFill>
+                <a:latin typeface="Arial" pitchFamily="34" charset="0"/>
+                <a:ea typeface="BIZ UDPGothic" pitchFamily="34" charset="-122"/>
+                <a:cs typeface="BIZ UDPGothic" pitchFamily="34" charset="-120"/>
               </a:rPr>
               <a:t>累進課税で重くなった分は、困っている現場、応援したい施設へ直接届けられます。</a:t>
             </a:r>
@@ -13838,11 +13838,11 @@
             <a:r>
               <a:rPr lang="en-US" sz="1500" dirty="0">
                 <a:solidFill>
-                  <a:srgbClr val="CCCCCC"/>
-                </a:solidFill>
-                <a:latin typeface="Arial" pitchFamily="34" charset="0"/>
-                <a:ea typeface="Arial" pitchFamily="34" charset="-122"/>
-                <a:cs typeface="Arial" pitchFamily="34" charset="-120"/>
+                  <a:srgbClr val="2B2F36"/>
+                </a:solidFill>
+                <a:latin typeface="Arial" pitchFamily="34" charset="0"/>
+                <a:ea typeface="BIZ UDPGothic" pitchFamily="34" charset="-122"/>
+                <a:cs typeface="BIZ UDPGothic" pitchFamily="34" charset="-120"/>
               </a:rPr>
               <a:t>ふるさと納税の「返礼品競争」を終わらせ、本物の「使い道を選ぶ」制度に作り変えます。</a:t>
             </a:r>
@@ -13867,7 +13867,7 @@
           <a:noFill/>
           <a:ln w="12700">
             <a:solidFill>
-              <a:srgbClr val="2E2E2E"/>
+              <a:srgbClr val="DDE0E6"/>
             </a:solidFill>
             <a:prstDash val="solid"/>
           </a:ln>
@@ -13903,11 +13903,11 @@
             <a:r>
               <a:rPr lang="en-US" sz="2200" b="1" dirty="0">
                 <a:solidFill>
-                  <a:srgbClr val="F5F5F0"/>
-                </a:solidFill>
-                <a:latin typeface="Arial" pitchFamily="34" charset="0"/>
-                <a:ea typeface="Arial" pitchFamily="34" charset="-122"/>
-                <a:cs typeface="Arial" pitchFamily="34" charset="-120"/>
+                  <a:srgbClr val="16181D"/>
+                </a:solidFill>
+                <a:latin typeface="Arial" pitchFamily="34" charset="0"/>
+                <a:ea typeface="BIZ UDPGothic" pitchFamily="34" charset="-122"/>
+                <a:cs typeface="BIZ UDPGothic" pitchFamily="34" charset="-120"/>
               </a:rPr>
               <a:t>お金を「取られる」のではなく、「託す」。
 </a:t>
@@ -13921,11 +13921,11 @@
             <a:r>
               <a:rPr lang="en-US" sz="2200" b="1" dirty="0">
                 <a:solidFill>
-                  <a:srgbClr val="F5F5F0"/>
-                </a:solidFill>
-                <a:latin typeface="Arial" pitchFamily="34" charset="0"/>
-                <a:ea typeface="Arial" pitchFamily="34" charset="-122"/>
-                <a:cs typeface="Arial" pitchFamily="34" charset="-120"/>
+                  <a:srgbClr val="16181D"/>
+                </a:solidFill>
+                <a:latin typeface="Arial" pitchFamily="34" charset="0"/>
+                <a:ea typeface="BIZ UDPGothic" pitchFamily="34" charset="-122"/>
+                <a:cs typeface="BIZ UDPGothic" pitchFamily="34" charset="-120"/>
               </a:rPr>
               <a:t>どこに、何のために届けるかを、自分で選ぶ。
 </a:t>
@@ -13939,11 +13939,11 @@
             <a:r>
               <a:rPr lang="en-US" sz="2200" b="1" dirty="0">
                 <a:solidFill>
-                  <a:srgbClr val="D62828"/>
-                </a:solidFill>
-                <a:latin typeface="Arial" pitchFamily="34" charset="0"/>
-                <a:ea typeface="Arial" pitchFamily="34" charset="-122"/>
-                <a:cs typeface="Arial" pitchFamily="34" charset="-120"/>
+                  <a:srgbClr val="C8161D"/>
+                </a:solidFill>
+                <a:latin typeface="Arial" pitchFamily="34" charset="0"/>
+                <a:ea typeface="BIZ UDPGothic" pitchFamily="34" charset="-122"/>
+                <a:cs typeface="BIZ UDPGothic" pitchFamily="34" charset="-120"/>
               </a:rPr>
               <a:t>それが、新しい納税の形。</a:t>
             </a:r>
@@ -13991,7 +13991,7 @@
     <p:bg>
       <p:bgPr>
         <a:solidFill>
-          <a:srgbClr val="0A0A0A"/>
+          <a:srgbClr val="F5F6F8"/>
         </a:solidFill>
       </p:bgPr>
     </p:bg>
@@ -14036,11 +14036,11 @@
             <a:r>
               <a:rPr lang="en-US" sz="1200" b="1" spc="300" kern="0" dirty="0">
                 <a:solidFill>
-                  <a:srgbClr val="D62828"/>
-                </a:solidFill>
-                <a:latin typeface="Arial" pitchFamily="34" charset="0"/>
-                <a:ea typeface="Arial" pitchFamily="34" charset="-122"/>
-                <a:cs typeface="Arial" pitchFamily="34" charset="-120"/>
+                  <a:srgbClr val="C8161D"/>
+                </a:solidFill>
+                <a:latin typeface="Arial" pitchFamily="34" charset="0"/>
+                <a:ea typeface="BIZ UDPGothic" pitchFamily="34" charset="-122"/>
+                <a:cs typeface="BIZ UDPGothic" pitchFamily="34" charset="-120"/>
               </a:rPr>
               <a:t>1. 今の税金の問題</a:t>
             </a:r>
@@ -14075,11 +14075,11 @@
             <a:r>
               <a:rPr lang="en-US" sz="3000" b="1" dirty="0">
                 <a:solidFill>
-                  <a:srgbClr val="F5F5F0"/>
-                </a:solidFill>
-                <a:latin typeface="Arial" pitchFamily="34" charset="0"/>
-                <a:ea typeface="Arial" pitchFamily="34" charset="-122"/>
-                <a:cs typeface="Arial" pitchFamily="34" charset="-120"/>
+                  <a:srgbClr val="16181D"/>
+                </a:solidFill>
+                <a:latin typeface="Arial" pitchFamily="34" charset="0"/>
+                <a:ea typeface="BIZ UDPGothic" pitchFamily="34" charset="-122"/>
+                <a:cs typeface="BIZ UDPGothic" pitchFamily="34" charset="-120"/>
               </a:rPr>
               <a:t>税金はPayしたら、自分の手から離れていく</a:t>
             </a:r>
@@ -14114,11 +14114,11 @@
             <a:r>
               <a:rPr lang="en-US" sz="1000" dirty="0">
                 <a:solidFill>
-                  <a:srgbClr val="CCCCCC"/>
-                </a:solidFill>
-                <a:latin typeface="Arial" pitchFamily="34" charset="0"/>
-                <a:ea typeface="Arial" pitchFamily="34" charset="-122"/>
-                <a:cs typeface="Arial" pitchFamily="34" charset="-120"/>
+                  <a:srgbClr val="2B2F36"/>
+                </a:solidFill>
+                <a:latin typeface="Arial" pitchFamily="34" charset="0"/>
+                <a:ea typeface="BIZ UDPGothic" pitchFamily="34" charset="-122"/>
+                <a:cs typeface="BIZ UDPGothic" pitchFamily="34" charset="-120"/>
               </a:rPr>
               <a:t>03</a:t>
             </a:r>
@@ -14153,11 +14153,11 @@
             <a:r>
               <a:rPr lang="en-US" sz="900" dirty="0">
                 <a:solidFill>
-                  <a:srgbClr val="555555"/>
-                </a:solidFill>
-                <a:latin typeface="Arial" pitchFamily="34" charset="0"/>
-                <a:ea typeface="Arial" pitchFamily="34" charset="-122"/>
-                <a:cs typeface="Arial" pitchFamily="34" charset="-120"/>
+                  <a:srgbClr val="9AA0AA"/>
+                </a:solidFill>
+                <a:latin typeface="Arial" pitchFamily="34" charset="0"/>
+                <a:ea typeface="BIZ UDPGothic" pitchFamily="34" charset="-122"/>
+                <a:cs typeface="BIZ UDPGothic" pitchFamily="34" charset="-120"/>
               </a:rPr>
               <a:t>REBOOT JAPAN ── 提言005</a:t>
             </a:r>
@@ -14182,11 +14182,11 @@
             </a:avLst>
           </a:prstGeom>
           <a:solidFill>
-            <a:srgbClr val="1A1A1A"/>
+            <a:srgbClr val="FFFFFF"/>
           </a:solidFill>
           <a:ln w="19050">
             <a:solidFill>
-              <a:srgbClr val="D62828"/>
+              <a:srgbClr val="C8161D"/>
             </a:solidFill>
             <a:prstDash val="solid"/>
           </a:ln>
@@ -14219,11 +14219,11 @@
             <a:r>
               <a:rPr lang="en-US" sz="2000" b="1" dirty="0">
                 <a:solidFill>
-                  <a:srgbClr val="F5F5F0"/>
-                </a:solidFill>
-                <a:latin typeface="Arial" pitchFamily="34" charset="0"/>
-                <a:ea typeface="Arial" pitchFamily="34" charset="-122"/>
-                <a:cs typeface="Arial" pitchFamily="34" charset="-120"/>
+                  <a:srgbClr val="16181D"/>
+                </a:solidFill>
+                <a:latin typeface="Arial" pitchFamily="34" charset="0"/>
+                <a:ea typeface="BIZ UDPGothic" pitchFamily="34" charset="-122"/>
+                <a:cs typeface="BIZ UDPGothic" pitchFamily="34" charset="-120"/>
               </a:rPr>
               <a:t>「自分の税金が何に使われているか、正直分からない」</a:t>
             </a:r>
@@ -14258,11 +14258,11 @@
             <a:r>
               <a:rPr lang="en-US" sz="1400" dirty="0">
                 <a:solidFill>
-                  <a:srgbClr val="CCCCCC"/>
-                </a:solidFill>
-                <a:latin typeface="Arial" pitchFamily="34" charset="0"/>
-                <a:ea typeface="Arial" pitchFamily="34" charset="-122"/>
-                <a:cs typeface="Arial" pitchFamily="34" charset="-120"/>
+                  <a:srgbClr val="2B2F36"/>
+                </a:solidFill>
+                <a:latin typeface="Arial" pitchFamily="34" charset="0"/>
+                <a:ea typeface="BIZ UDPGothic" pitchFamily="34" charset="-122"/>
+                <a:cs typeface="BIZ UDPGothic" pitchFamily="34" charset="-120"/>
               </a:rPr>
               <a:t>使い道は全部お上任せ。自分には何も決められない。これが今の税金です。</a:t>
             </a:r>
@@ -14287,11 +14287,11 @@
             </a:avLst>
           </a:prstGeom>
           <a:solidFill>
-            <a:srgbClr val="1A1A1A"/>
+            <a:srgbClr val="FFFFFF"/>
           </a:solidFill>
           <a:ln w="12700">
             <a:solidFill>
-              <a:srgbClr val="2E2E2E"/>
+              <a:srgbClr val="DDE0E6"/>
             </a:solidFill>
             <a:prstDash val="solid"/>
           </a:ln>
@@ -14312,11 +14312,11 @@
             <a:avLst/>
           </a:prstGeom>
           <a:solidFill>
-            <a:srgbClr val="0A0A0A"/>
+            <a:srgbClr val="F5F6F8"/>
           </a:solidFill>
           <a:ln w="12700">
             <a:solidFill>
-              <a:srgbClr val="2E2E2E"/>
+              <a:srgbClr val="DDE0E6"/>
             </a:solidFill>
             <a:prstDash val="solid"/>
           </a:ln>
@@ -14376,11 +14376,11 @@
             <a:r>
               <a:rPr lang="en-US" sz="1500" b="1" dirty="0">
                 <a:solidFill>
-                  <a:srgbClr val="F5F5F0"/>
-                </a:solidFill>
-                <a:latin typeface="Arial" pitchFamily="34" charset="0"/>
-                <a:ea typeface="Arial" pitchFamily="34" charset="-122"/>
-                <a:cs typeface="Arial" pitchFamily="34" charset="-120"/>
+                  <a:srgbClr val="16181D"/>
+                </a:solidFill>
+                <a:latin typeface="Arial" pitchFamily="34" charset="0"/>
+                <a:ea typeface="BIZ UDPGothic" pitchFamily="34" charset="-122"/>
+                <a:cs typeface="BIZ UDPGothic" pitchFamily="34" charset="-120"/>
               </a:rPr>
               <a:t>所得税・住民税</a:t>
             </a:r>
@@ -14418,11 +14418,11 @@
             <a:r>
               <a:rPr lang="en-US" sz="1200" dirty="0">
                 <a:solidFill>
-                  <a:srgbClr val="CCCCCC"/>
-                </a:solidFill>
-                <a:latin typeface="Arial" pitchFamily="34" charset="0"/>
-                <a:ea typeface="Arial" pitchFamily="34" charset="-122"/>
-                <a:cs typeface="Arial" pitchFamily="34" charset="-120"/>
+                  <a:srgbClr val="2B2F36"/>
+                </a:solidFill>
+                <a:latin typeface="Arial" pitchFamily="34" charset="0"/>
+                <a:ea typeface="BIZ UDPGothic" pitchFamily="34" charset="-122"/>
+                <a:cs typeface="BIZ UDPGothic" pitchFamily="34" charset="-120"/>
               </a:rPr>
               <a:t>年間を通じて働き、確定申告。でも、そのお金がどの学校に、どの病院に使われているか、追いかける方法がない。</a:t>
             </a:r>
@@ -14447,11 +14447,11 @@
             </a:avLst>
           </a:prstGeom>
           <a:solidFill>
-            <a:srgbClr val="1A1A1A"/>
+            <a:srgbClr val="FFFFFF"/>
           </a:solidFill>
           <a:ln w="12700">
             <a:solidFill>
-              <a:srgbClr val="2E2E2E"/>
+              <a:srgbClr val="DDE0E6"/>
             </a:solidFill>
             <a:prstDash val="solid"/>
           </a:ln>
@@ -14472,11 +14472,11 @@
             <a:avLst/>
           </a:prstGeom>
           <a:solidFill>
-            <a:srgbClr val="0A0A0A"/>
+            <a:srgbClr val="F5F6F8"/>
           </a:solidFill>
           <a:ln w="12700">
             <a:solidFill>
-              <a:srgbClr val="2E2E2E"/>
+              <a:srgbClr val="DDE0E6"/>
             </a:solidFill>
             <a:prstDash val="solid"/>
           </a:ln>
@@ -14536,11 +14536,11 @@
             <a:r>
               <a:rPr lang="en-US" sz="1500" b="1" dirty="0">
                 <a:solidFill>
-                  <a:srgbClr val="F5F5F0"/>
-                </a:solidFill>
-                <a:latin typeface="Arial" pitchFamily="34" charset="0"/>
-                <a:ea typeface="Arial" pitchFamily="34" charset="-122"/>
-                <a:cs typeface="Arial" pitchFamily="34" charset="-120"/>
+                  <a:srgbClr val="16181D"/>
+                </a:solidFill>
+                <a:latin typeface="Arial" pitchFamily="34" charset="0"/>
+                <a:ea typeface="BIZ UDPGothic" pitchFamily="34" charset="-122"/>
+                <a:cs typeface="BIZ UDPGothic" pitchFamily="34" charset="-120"/>
               </a:rPr>
               <a:t>国・自治体の一般財源へ</a:t>
             </a:r>
@@ -14578,11 +14578,11 @@
             <a:r>
               <a:rPr lang="en-US" sz="1200" dirty="0">
                 <a:solidFill>
-                  <a:srgbClr val="CCCCCC"/>
-                </a:solidFill>
-                <a:latin typeface="Arial" pitchFamily="34" charset="0"/>
-                <a:ea typeface="Arial" pitchFamily="34" charset="-122"/>
-                <a:cs typeface="Arial" pitchFamily="34" charset="-120"/>
+                  <a:srgbClr val="2B2F36"/>
+                </a:solidFill>
+                <a:latin typeface="Arial" pitchFamily="34" charset="0"/>
+                <a:ea typeface="BIZ UDPGothic" pitchFamily="34" charset="-122"/>
+                <a:cs typeface="BIZ UDPGothic" pitchFamily="34" charset="-120"/>
               </a:rPr>
               <a:t>「一般財源」に入った瞬間に、お金は匿名になる。予算会議で決められた用途に、静かに使われていく。</a:t>
             </a:r>
@@ -14604,7 +14604,7 @@
     <p:bg>
       <p:bgPr>
         <a:solidFill>
-          <a:srgbClr val="0A0A0A"/>
+          <a:srgbClr val="F5F6F8"/>
         </a:solidFill>
       </p:bgPr>
     </p:bg>
@@ -14649,11 +14649,11 @@
             <a:r>
               <a:rPr lang="en-US" sz="1200" b="1" spc="300" kern="0" dirty="0">
                 <a:solidFill>
-                  <a:srgbClr val="D62828"/>
-                </a:solidFill>
-                <a:latin typeface="Arial" pitchFamily="34" charset="0"/>
-                <a:ea typeface="Arial" pitchFamily="34" charset="-122"/>
-                <a:cs typeface="Arial" pitchFamily="34" charset="-120"/>
+                  <a:srgbClr val="C8161D"/>
+                </a:solidFill>
+                <a:latin typeface="Arial" pitchFamily="34" charset="0"/>
+                <a:ea typeface="BIZ UDPGothic" pitchFamily="34" charset="-122"/>
+                <a:cs typeface="BIZ UDPGothic" pitchFamily="34" charset="-120"/>
               </a:rPr>
               <a:t>1. ふるさと納税という失敗</a:t>
             </a:r>
@@ -14688,11 +14688,11 @@
             <a:r>
               <a:rPr lang="en-US" sz="3000" b="1" dirty="0">
                 <a:solidFill>
-                  <a:srgbClr val="F5F5F0"/>
-                </a:solidFill>
-                <a:latin typeface="Arial" pitchFamily="34" charset="0"/>
-                <a:ea typeface="Arial" pitchFamily="34" charset="-122"/>
-                <a:cs typeface="Arial" pitchFamily="34" charset="-120"/>
+                  <a:srgbClr val="16181D"/>
+                </a:solidFill>
+                <a:latin typeface="Arial" pitchFamily="34" charset="0"/>
+                <a:ea typeface="BIZ UDPGothic" pitchFamily="34" charset="-122"/>
+                <a:cs typeface="BIZ UDPGothic" pitchFamily="34" charset="-120"/>
               </a:rPr>
               <a:t>「使い道を選ぶ」はずが、「返礼品をもらう節税」に変質</a:t>
             </a:r>
@@ -14727,11 +14727,11 @@
             <a:r>
               <a:rPr lang="en-US" sz="1000" dirty="0">
                 <a:solidFill>
-                  <a:srgbClr val="CCCCCC"/>
-                </a:solidFill>
-                <a:latin typeface="Arial" pitchFamily="34" charset="0"/>
-                <a:ea typeface="Arial" pitchFamily="34" charset="-122"/>
-                <a:cs typeface="Arial" pitchFamily="34" charset="-120"/>
+                  <a:srgbClr val="2B2F36"/>
+                </a:solidFill>
+                <a:latin typeface="Arial" pitchFamily="34" charset="0"/>
+                <a:ea typeface="BIZ UDPGothic" pitchFamily="34" charset="-122"/>
+                <a:cs typeface="BIZ UDPGothic" pitchFamily="34" charset="-120"/>
               </a:rPr>
               <a:t>04</a:t>
             </a:r>
@@ -14766,11 +14766,11 @@
             <a:r>
               <a:rPr lang="en-US" sz="900" dirty="0">
                 <a:solidFill>
-                  <a:srgbClr val="555555"/>
-                </a:solidFill>
-                <a:latin typeface="Arial" pitchFamily="34" charset="0"/>
-                <a:ea typeface="Arial" pitchFamily="34" charset="-122"/>
-                <a:cs typeface="Arial" pitchFamily="34" charset="-120"/>
+                  <a:srgbClr val="9AA0AA"/>
+                </a:solidFill>
+                <a:latin typeface="Arial" pitchFamily="34" charset="0"/>
+                <a:ea typeface="BIZ UDPGothic" pitchFamily="34" charset="-122"/>
+                <a:cs typeface="BIZ UDPGothic" pitchFamily="34" charset="-120"/>
               </a:rPr>
               <a:t>REBOOT JAPAN ── 提言005</a:t>
             </a:r>
@@ -14795,11 +14795,11 @@
             </a:avLst>
           </a:prstGeom>
           <a:solidFill>
-            <a:srgbClr val="1A2A1A"/>
+            <a:srgbClr val="E9EFF8"/>
           </a:solidFill>
           <a:ln w="12700">
             <a:solidFill>
-              <a:srgbClr val="3A6A3A"/>
+              <a:srgbClr val="B9C9E2"/>
             </a:solidFill>
             <a:prstDash val="solid"/>
           </a:ln>
@@ -14832,11 +14832,11 @@
             <a:r>
               <a:rPr lang="en-US" sz="1300" b="1" dirty="0">
                 <a:solidFill>
-                  <a:srgbClr val="88CC88"/>
-                </a:solidFill>
-                <a:latin typeface="Arial" pitchFamily="34" charset="0"/>
-                <a:ea typeface="Arial" pitchFamily="34" charset="-122"/>
-                <a:cs typeface="Arial" pitchFamily="34" charset="-120"/>
+                  <a:srgbClr val="3A6AAE"/>
+                </a:solidFill>
+                <a:latin typeface="Arial" pitchFamily="34" charset="0"/>
+                <a:ea typeface="BIZ UDPGothic" pitchFamily="34" charset="-122"/>
+                <a:cs typeface="BIZ UDPGothic" pitchFamily="34" charset="-120"/>
               </a:rPr>
               <a:t>本来の目的</a:t>
             </a:r>
@@ -14871,11 +14871,11 @@
             <a:r>
               <a:rPr lang="en-US" sz="1300" dirty="0">
                 <a:solidFill>
-                  <a:srgbClr val="CCCCCC"/>
-                </a:solidFill>
-                <a:latin typeface="Arial" pitchFamily="34" charset="0"/>
-                <a:ea typeface="Arial" pitchFamily="34" charset="-122"/>
-                <a:cs typeface="Arial" pitchFamily="34" charset="-120"/>
+                  <a:srgbClr val="2B2F36"/>
+                </a:solidFill>
+                <a:latin typeface="Arial" pitchFamily="34" charset="0"/>
+                <a:ea typeface="BIZ UDPGothic" pitchFamily="34" charset="-122"/>
+                <a:cs typeface="BIZ UDPGothic" pitchFamily="34" charset="-120"/>
               </a:rPr>
               <a:t>応援したい自治体に寄付できる、使い道を選べる制度</a:t>
             </a:r>
@@ -14900,11 +14900,11 @@
             </a:avLst>
           </a:prstGeom>
           <a:solidFill>
-            <a:srgbClr val="1A1A1A"/>
+            <a:srgbClr val="FFFFFF"/>
           </a:solidFill>
           <a:ln w="12700">
             <a:solidFill>
-              <a:srgbClr val="2E2E2E"/>
+              <a:srgbClr val="DDE0E6"/>
             </a:solidFill>
             <a:prstDash val="solid"/>
           </a:ln>
@@ -14937,11 +14937,11 @@
             <a:r>
               <a:rPr lang="en-US" sz="1300" b="1" dirty="0">
                 <a:solidFill>
-                  <a:srgbClr val="D62828"/>
-                </a:solidFill>
-                <a:latin typeface="Arial" pitchFamily="34" charset="0"/>
-                <a:ea typeface="Arial" pitchFamily="34" charset="-122"/>
-                <a:cs typeface="Arial" pitchFamily="34" charset="-120"/>
+                  <a:srgbClr val="C8161D"/>
+                </a:solidFill>
+                <a:latin typeface="Arial" pitchFamily="34" charset="0"/>
+                <a:ea typeface="BIZ UDPGothic" pitchFamily="34" charset="-122"/>
+                <a:cs typeface="BIZ UDPGothic" pitchFamily="34" charset="-120"/>
               </a:rPr>
               <a:t>実際の使われ方</a:t>
             </a:r>
@@ -14976,11 +14976,11 @@
             <a:r>
               <a:rPr lang="en-US" sz="1300" dirty="0">
                 <a:solidFill>
-                  <a:srgbClr val="CCCCCC"/>
-                </a:solidFill>
-                <a:latin typeface="Arial" pitchFamily="34" charset="0"/>
-                <a:ea typeface="Arial" pitchFamily="34" charset="-122"/>
-                <a:cs typeface="Arial" pitchFamily="34" charset="-120"/>
+                  <a:srgbClr val="2B2F36"/>
+                </a:solidFill>
+                <a:latin typeface="Arial" pitchFamily="34" charset="0"/>
+                <a:ea typeface="BIZ UDPGothic" pitchFamily="34" charset="-122"/>
+                <a:cs typeface="BIZ UDPGothic" pitchFamily="34" charset="-120"/>
               </a:rPr>
               <a:t>「お得な返礼品」目当ての節税ツールとして定着</a:t>
             </a:r>
@@ -15005,11 +15005,11 @@
             </a:avLst>
           </a:prstGeom>
           <a:solidFill>
-            <a:srgbClr val="1A1A1A"/>
+            <a:srgbClr val="FFFFFF"/>
           </a:solidFill>
           <a:ln w="12700">
             <a:solidFill>
-              <a:srgbClr val="2E2E2E"/>
+              <a:srgbClr val="DDE0E6"/>
             </a:solidFill>
             <a:prstDash val="solid"/>
           </a:ln>
@@ -15042,11 +15042,11 @@
             <a:r>
               <a:rPr lang="en-US" sz="1300" b="1" dirty="0">
                 <a:solidFill>
-                  <a:srgbClr val="D62828"/>
-                </a:solidFill>
-                <a:latin typeface="Arial" pitchFamily="34" charset="0"/>
-                <a:ea typeface="Arial" pitchFamily="34" charset="-122"/>
-                <a:cs typeface="Arial" pitchFamily="34" charset="-120"/>
+                  <a:srgbClr val="C8161D"/>
+                </a:solidFill>
+                <a:latin typeface="Arial" pitchFamily="34" charset="0"/>
+                <a:ea typeface="BIZ UDPGothic" pitchFamily="34" charset="-122"/>
+                <a:cs typeface="BIZ UDPGothic" pitchFamily="34" charset="-120"/>
               </a:rPr>
               <a:t>自治体側の実態</a:t>
             </a:r>
@@ -15081,11 +15081,11 @@
             <a:r>
               <a:rPr lang="en-US" sz="1300" dirty="0">
                 <a:solidFill>
-                  <a:srgbClr val="CCCCCC"/>
-                </a:solidFill>
-                <a:latin typeface="Arial" pitchFamily="34" charset="0"/>
-                <a:ea typeface="Arial" pitchFamily="34" charset="-122"/>
-                <a:cs typeface="Arial" pitchFamily="34" charset="-120"/>
+                  <a:srgbClr val="2B2F36"/>
+                </a:solidFill>
+                <a:latin typeface="Arial" pitchFamily="34" charset="0"/>
+                <a:ea typeface="BIZ UDPGothic" pitchFamily="34" charset="-122"/>
+                <a:cs typeface="BIZ UDPGothic" pitchFamily="34" charset="-120"/>
               </a:rPr>
               <a:t>返礼品の調達コスト・ポータルへの手数料で疲弊</a:t>
             </a:r>
@@ -15110,11 +15110,11 @@
             </a:avLst>
           </a:prstGeom>
           <a:solidFill>
-            <a:srgbClr val="1A1A1A"/>
+            <a:srgbClr val="FFFFFF"/>
           </a:solidFill>
           <a:ln w="12700">
             <a:solidFill>
-              <a:srgbClr val="2E2E2E"/>
+              <a:srgbClr val="DDE0E6"/>
             </a:solidFill>
             <a:prstDash val="solid"/>
           </a:ln>
@@ -15147,11 +15147,11 @@
             <a:r>
               <a:rPr lang="en-US" sz="1300" b="1" dirty="0">
                 <a:solidFill>
-                  <a:srgbClr val="D62828"/>
-                </a:solidFill>
-                <a:latin typeface="Arial" pitchFamily="34" charset="0"/>
-                <a:ea typeface="Arial" pitchFamily="34" charset="-122"/>
-                <a:cs typeface="Arial" pitchFamily="34" charset="-120"/>
+                  <a:srgbClr val="C8161D"/>
+                </a:solidFill>
+                <a:latin typeface="Arial" pitchFamily="34" charset="0"/>
+                <a:ea typeface="BIZ UDPGothic" pitchFamily="34" charset="-122"/>
+                <a:cs typeface="BIZ UDPGothic" pitchFamily="34" charset="-120"/>
               </a:rPr>
               <a:t>都市部への打撃</a:t>
             </a:r>
@@ -15186,11 +15186,11 @@
             <a:r>
               <a:rPr lang="en-US" sz="1300" dirty="0">
                 <a:solidFill>
-                  <a:srgbClr val="CCCCCC"/>
-                </a:solidFill>
-                <a:latin typeface="Arial" pitchFamily="34" charset="0"/>
-                <a:ea typeface="Arial" pitchFamily="34" charset="-122"/>
-                <a:cs typeface="Arial" pitchFamily="34" charset="-120"/>
+                  <a:srgbClr val="2B2F36"/>
+                </a:solidFill>
+                <a:latin typeface="Arial" pitchFamily="34" charset="0"/>
+                <a:ea typeface="BIZ UDPGothic" pitchFamily="34" charset="-122"/>
+                <a:cs typeface="BIZ UDPGothic" pitchFamily="34" charset="-120"/>
               </a:rPr>
               <a:t>住民税が住んでいる自治体から流出、財源が空洞化</a:t>
             </a:r>
@@ -15215,11 +15215,11 @@
             </a:avLst>
           </a:prstGeom>
           <a:solidFill>
-            <a:srgbClr val="1A1A1A"/>
+            <a:srgbClr val="FFFFFF"/>
           </a:solidFill>
           <a:ln w="12700">
             <a:solidFill>
-              <a:srgbClr val="2E2E2E"/>
+              <a:srgbClr val="DDE0E6"/>
             </a:solidFill>
             <a:prstDash val="solid"/>
           </a:ln>
@@ -15252,11 +15252,11 @@
             <a:r>
               <a:rPr lang="en-US" sz="1300" b="1" dirty="0">
                 <a:solidFill>
-                  <a:srgbClr val="D62828"/>
-                </a:solidFill>
-                <a:latin typeface="Arial" pitchFamily="34" charset="0"/>
-                <a:ea typeface="Arial" pitchFamily="34" charset="-122"/>
-                <a:cs typeface="Arial" pitchFamily="34" charset="-120"/>
+                  <a:srgbClr val="C8161D"/>
+                </a:solidFill>
+                <a:latin typeface="Arial" pitchFamily="34" charset="0"/>
+                <a:ea typeface="BIZ UDPGothic" pitchFamily="34" charset="-122"/>
+                <a:cs typeface="BIZ UDPGothic" pitchFamily="34" charset="-120"/>
               </a:rPr>
               <a:t>透明性の欠如</a:t>
             </a:r>
@@ -15291,11 +15291,11 @@
             <a:r>
               <a:rPr lang="en-US" sz="1300" dirty="0">
                 <a:solidFill>
-                  <a:srgbClr val="CCCCCC"/>
-                </a:solidFill>
-                <a:latin typeface="Arial" pitchFamily="34" charset="0"/>
-                <a:ea typeface="Arial" pitchFamily="34" charset="-122"/>
-                <a:cs typeface="Arial" pitchFamily="34" charset="-120"/>
+                  <a:srgbClr val="2B2F36"/>
+                </a:solidFill>
+                <a:latin typeface="Arial" pitchFamily="34" charset="0"/>
+                <a:ea typeface="BIZ UDPGothic" pitchFamily="34" charset="-122"/>
+                <a:cs typeface="BIZ UDPGothic" pitchFamily="34" charset="-120"/>
               </a:rPr>
               <a:t>何に使われたか、追いかける仕組みがほぼない</a:t>
             </a:r>
@@ -15330,11 +15330,11 @@
             <a:r>
               <a:rPr lang="en-US" sz="1300" i="1" dirty="0">
                 <a:solidFill>
-                  <a:srgbClr val="D62828"/>
-                </a:solidFill>
-                <a:latin typeface="Arial" pitchFamily="34" charset="0"/>
-                <a:ea typeface="Arial" pitchFamily="34" charset="-122"/>
-                <a:cs typeface="Arial" pitchFamily="34" charset="-120"/>
+                  <a:srgbClr val="C8161D"/>
+                </a:solidFill>
+                <a:latin typeface="Arial" pitchFamily="34" charset="0"/>
+                <a:ea typeface="BIZ UDPGothic" pitchFamily="34" charset="-122"/>
+                <a:cs typeface="BIZ UDPGothic" pitchFamily="34" charset="-120"/>
               </a:rPr>
               <a:t>提言005は、ふるさと納税を即時廃止し、本来あるべき「使い道を選ぶ寄付」に作り変えます。</a:t>
             </a:r>
@@ -15356,7 +15356,7 @@
     <p:bg>
       <p:bgPr>
         <a:solidFill>
-          <a:srgbClr val="0A0A0A"/>
+          <a:srgbClr val="F5F6F8"/>
         </a:solidFill>
       </p:bgPr>
     </p:bg>
@@ -15401,11 +15401,11 @@
             <a:r>
               <a:rPr lang="en-US" sz="1200" b="1" spc="300" kern="0" dirty="0">
                 <a:solidFill>
-                  <a:srgbClr val="D62828"/>
-                </a:solidFill>
-                <a:latin typeface="Arial" pitchFamily="34" charset="0"/>
-                <a:ea typeface="Arial" pitchFamily="34" charset="-122"/>
-                <a:cs typeface="Arial" pitchFamily="34" charset="-120"/>
+                  <a:srgbClr val="C8161D"/>
+                </a:solidFill>
+                <a:latin typeface="Arial" pitchFamily="34" charset="0"/>
+                <a:ea typeface="BIZ UDPGothic" pitchFamily="34" charset="-122"/>
+                <a:cs typeface="BIZ UDPGothic" pitchFamily="34" charset="-120"/>
               </a:rPr>
               <a:t>提言005の哲学</a:t>
             </a:r>
@@ -15440,11 +15440,11 @@
             <a:r>
               <a:rPr lang="en-US" sz="1000" dirty="0">
                 <a:solidFill>
-                  <a:srgbClr val="CCCCCC"/>
-                </a:solidFill>
-                <a:latin typeface="Arial" pitchFamily="34" charset="0"/>
-                <a:ea typeface="Arial" pitchFamily="34" charset="-122"/>
-                <a:cs typeface="Arial" pitchFamily="34" charset="-120"/>
+                  <a:srgbClr val="2B2F36"/>
+                </a:solidFill>
+                <a:latin typeface="Arial" pitchFamily="34" charset="0"/>
+                <a:ea typeface="BIZ UDPGothic" pitchFamily="34" charset="-122"/>
+                <a:cs typeface="BIZ UDPGothic" pitchFamily="34" charset="-120"/>
               </a:rPr>
               <a:t>05</a:t>
             </a:r>
@@ -15479,11 +15479,11 @@
             <a:r>
               <a:rPr lang="en-US" sz="900" dirty="0">
                 <a:solidFill>
-                  <a:srgbClr val="555555"/>
-                </a:solidFill>
-                <a:latin typeface="Arial" pitchFamily="34" charset="0"/>
-                <a:ea typeface="Arial" pitchFamily="34" charset="-122"/>
-                <a:cs typeface="Arial" pitchFamily="34" charset="-120"/>
+                  <a:srgbClr val="9AA0AA"/>
+                </a:solidFill>
+                <a:latin typeface="Arial" pitchFamily="34" charset="0"/>
+                <a:ea typeface="BIZ UDPGothic" pitchFamily="34" charset="-122"/>
+                <a:cs typeface="BIZ UDPGothic" pitchFamily="34" charset="-120"/>
               </a:rPr>
               <a:t>REBOOT JAPAN ── 提言005</a:t>
             </a:r>
@@ -15521,11 +15521,11 @@
             <a:r>
               <a:rPr lang="en-US" sz="4400" b="1" dirty="0">
                 <a:solidFill>
-                  <a:srgbClr val="F5F5F0"/>
-                </a:solidFill>
-                <a:latin typeface="Arial" pitchFamily="34" charset="0"/>
-                <a:ea typeface="Arial" pitchFamily="34" charset="-122"/>
-                <a:cs typeface="Arial" pitchFamily="34" charset="-120"/>
+                  <a:srgbClr val="16181D"/>
+                </a:solidFill>
+                <a:latin typeface="Arial" pitchFamily="34" charset="0"/>
+                <a:ea typeface="BIZ UDPGothic" pitchFamily="34" charset="-122"/>
+                <a:cs typeface="BIZ UDPGothic" pitchFamily="34" charset="-120"/>
               </a:rPr>
               <a:t>納税を、社会と</a:t>
             </a:r>
@@ -15541,11 +15541,11 @@
             <a:r>
               <a:rPr lang="en-US" sz="4400" b="1" dirty="0">
                 <a:solidFill>
-                  <a:srgbClr val="F5F5F0"/>
-                </a:solidFill>
-                <a:latin typeface="Arial" pitchFamily="34" charset="0"/>
-                <a:ea typeface="Arial" pitchFamily="34" charset="-122"/>
-                <a:cs typeface="Arial" pitchFamily="34" charset="-120"/>
+                  <a:srgbClr val="16181D"/>
+                </a:solidFill>
+                <a:latin typeface="Arial" pitchFamily="34" charset="0"/>
+                <a:ea typeface="BIZ UDPGothic" pitchFamily="34" charset="-122"/>
+                <a:cs typeface="BIZ UDPGothic" pitchFamily="34" charset="-120"/>
               </a:rPr>
               <a:t>向き合う機会に変える。</a:t>
             </a:r>
@@ -15570,7 +15570,7 @@
           <a:noFill/>
           <a:ln w="12700">
             <a:solidFill>
-              <a:srgbClr val="2E2E2E"/>
+              <a:srgbClr val="DDE0E6"/>
             </a:solidFill>
             <a:prstDash val="solid"/>
           </a:ln>
@@ -15606,11 +15606,11 @@
             <a:r>
               <a:rPr lang="en-US" sz="1700" dirty="0">
                 <a:solidFill>
-                  <a:srgbClr val="CCCCCC"/>
-                </a:solidFill>
-                <a:latin typeface="Arial" pitchFamily="34" charset="0"/>
-                <a:ea typeface="Arial" pitchFamily="34" charset="-122"/>
-                <a:cs typeface="Arial" pitchFamily="34" charset="-120"/>
+                  <a:srgbClr val="2B2F36"/>
+                </a:solidFill>
+                <a:latin typeface="Arial" pitchFamily="34" charset="0"/>
+                <a:ea typeface="BIZ UDPGothic" pitchFamily="34" charset="-122"/>
+                <a:cs typeface="BIZ UDPGothic" pitchFamily="34" charset="-120"/>
               </a:rPr>
               <a:t>お金を「取られる」のではなく、「託す」。</a:t>
             </a:r>
@@ -15626,11 +15626,11 @@
             <a:r>
               <a:rPr lang="en-US" sz="1700" dirty="0">
                 <a:solidFill>
-                  <a:srgbClr val="CCCCCC"/>
-                </a:solidFill>
-                <a:latin typeface="Arial" pitchFamily="34" charset="0"/>
-                <a:ea typeface="Arial" pitchFamily="34" charset="-122"/>
-                <a:cs typeface="Arial" pitchFamily="34" charset="-120"/>
+                  <a:srgbClr val="2B2F36"/>
+                </a:solidFill>
+                <a:latin typeface="Arial" pitchFamily="34" charset="0"/>
+                <a:ea typeface="BIZ UDPGothic" pitchFamily="34" charset="-122"/>
+                <a:cs typeface="BIZ UDPGothic" pitchFamily="34" charset="-120"/>
               </a:rPr>
               <a:t>どこに、何のために、自分のお金を届けるか。</a:t>
             </a:r>
@@ -15646,11 +15646,11 @@
             <a:r>
               <a:rPr lang="en-US" sz="1700" dirty="0">
                 <a:solidFill>
-                  <a:srgbClr val="CCCCCC"/>
-                </a:solidFill>
-                <a:latin typeface="Arial" pitchFamily="34" charset="0"/>
-                <a:ea typeface="Arial" pitchFamily="34" charset="-122"/>
-                <a:cs typeface="Arial" pitchFamily="34" charset="-120"/>
+                  <a:srgbClr val="2B2F36"/>
+                </a:solidFill>
+                <a:latin typeface="Arial" pitchFamily="34" charset="0"/>
+                <a:ea typeface="BIZ UDPGothic" pitchFamily="34" charset="-122"/>
+                <a:cs typeface="BIZ UDPGothic" pitchFamily="34" charset="-120"/>
               </a:rPr>
               <a:t>それを選べるのが、提言005です。</a:t>
             </a:r>
@@ -15698,7 +15698,7 @@
     <p:bg>
       <p:bgPr>
         <a:solidFill>
-          <a:srgbClr val="0A0A0A"/>
+          <a:srgbClr val="F5F6F8"/>
         </a:solidFill>
       </p:bgPr>
     </p:bg>
@@ -15743,11 +15743,11 @@
             <a:r>
               <a:rPr lang="en-US" sz="1200" b="1" spc="300" kern="0" dirty="0">
                 <a:solidFill>
-                  <a:srgbClr val="D62828"/>
-                </a:solidFill>
-                <a:latin typeface="Arial" pitchFamily="34" charset="0"/>
-                <a:ea typeface="Arial" pitchFamily="34" charset="-122"/>
-                <a:cs typeface="Arial" pitchFamily="34" charset="-120"/>
+                  <a:srgbClr val="C8161D"/>
+                </a:solidFill>
+                <a:latin typeface="Arial" pitchFamily="34" charset="0"/>
+                <a:ea typeface="BIZ UDPGothic" pitchFamily="34" charset="-122"/>
+                <a:cs typeface="BIZ UDPGothic" pitchFamily="34" charset="-120"/>
               </a:rPr>
               <a:t>2. 制度の全体像</a:t>
             </a:r>
@@ -15782,11 +15782,11 @@
             <a:r>
               <a:rPr lang="en-US" sz="3000" b="1" dirty="0">
                 <a:solidFill>
-                  <a:srgbClr val="F5F5F0"/>
-                </a:solidFill>
-                <a:latin typeface="Arial" pitchFamily="34" charset="0"/>
-                <a:ea typeface="Arial" pitchFamily="34" charset="-122"/>
-                <a:cs typeface="Arial" pitchFamily="34" charset="-120"/>
+                  <a:srgbClr val="16181D"/>
+                </a:solidFill>
+                <a:latin typeface="Arial" pitchFamily="34" charset="0"/>
+                <a:ea typeface="BIZ UDPGothic" pitchFamily="34" charset="-122"/>
+                <a:cs typeface="BIZ UDPGothic" pitchFamily="34" charset="-120"/>
               </a:rPr>
               <a:t>3つの税から「自分で選んで」寄付できる</a:t>
             </a:r>
@@ -15821,11 +15821,11 @@
             <a:r>
               <a:rPr lang="en-US" sz="1000" dirty="0">
                 <a:solidFill>
-                  <a:srgbClr val="CCCCCC"/>
-                </a:solidFill>
-                <a:latin typeface="Arial" pitchFamily="34" charset="0"/>
-                <a:ea typeface="Arial" pitchFamily="34" charset="-122"/>
-                <a:cs typeface="Arial" pitchFamily="34" charset="-120"/>
+                  <a:srgbClr val="2B2F36"/>
+                </a:solidFill>
+                <a:latin typeface="Arial" pitchFamily="34" charset="0"/>
+                <a:ea typeface="BIZ UDPGothic" pitchFamily="34" charset="-122"/>
+                <a:cs typeface="BIZ UDPGothic" pitchFamily="34" charset="-120"/>
               </a:rPr>
               <a:t>06</a:t>
             </a:r>
@@ -15860,11 +15860,11 @@
             <a:r>
               <a:rPr lang="en-US" sz="900" dirty="0">
                 <a:solidFill>
-                  <a:srgbClr val="555555"/>
-                </a:solidFill>
-                <a:latin typeface="Arial" pitchFamily="34" charset="0"/>
-                <a:ea typeface="Arial" pitchFamily="34" charset="-122"/>
-                <a:cs typeface="Arial" pitchFamily="34" charset="-120"/>
+                  <a:srgbClr val="9AA0AA"/>
+                </a:solidFill>
+                <a:latin typeface="Arial" pitchFamily="34" charset="0"/>
+                <a:ea typeface="BIZ UDPGothic" pitchFamily="34" charset="-122"/>
+                <a:cs typeface="BIZ UDPGothic" pitchFamily="34" charset="-120"/>
               </a:rPr>
               <a:t>REBOOT JAPAN ── 提言005</a:t>
             </a:r>
@@ -15889,11 +15889,11 @@
             </a:avLst>
           </a:prstGeom>
           <a:solidFill>
-            <a:srgbClr val="1A1A1A"/>
+            <a:srgbClr val="FFFFFF"/>
           </a:solidFill>
           <a:ln w="12700">
             <a:solidFill>
-              <a:srgbClr val="2E2E2E"/>
+              <a:srgbClr val="DDE0E6"/>
             </a:solidFill>
             <a:prstDash val="solid"/>
           </a:ln>
@@ -15914,11 +15914,11 @@
             <a:avLst/>
           </a:prstGeom>
           <a:solidFill>
-            <a:srgbClr val="0A0A0A"/>
+            <a:srgbClr val="F5F6F8"/>
           </a:solidFill>
           <a:ln w="12700">
             <a:solidFill>
-              <a:srgbClr val="2E2E2E"/>
+              <a:srgbClr val="DDE0E6"/>
             </a:solidFill>
             <a:prstDash val="solid"/>
           </a:ln>
@@ -15975,11 +15975,11 @@
             <a:r>
               <a:rPr lang="en-US" sz="2200" b="1" dirty="0">
                 <a:solidFill>
-                  <a:srgbClr val="D62828"/>
-                </a:solidFill>
-                <a:latin typeface="Arial" pitchFamily="34" charset="0"/>
-                <a:ea typeface="Arial" pitchFamily="34" charset="-122"/>
-                <a:cs typeface="Arial" pitchFamily="34" charset="-120"/>
+                  <a:srgbClr val="C8161D"/>
+                </a:solidFill>
+                <a:latin typeface="Arial" pitchFamily="34" charset="0"/>
+                <a:ea typeface="BIZ UDPGothic" pitchFamily="34" charset="-122"/>
+                <a:cs typeface="BIZ UDPGothic" pitchFamily="34" charset="-120"/>
               </a:rPr>
               <a:t>所得税</a:t>
             </a:r>
@@ -16017,11 +16017,11 @@
             <a:r>
               <a:rPr lang="en-US" sz="1400" b="1" dirty="0">
                 <a:solidFill>
-                  <a:srgbClr val="F5F5F0"/>
-                </a:solidFill>
-                <a:latin typeface="Arial" pitchFamily="34" charset="0"/>
-                <a:ea typeface="Arial" pitchFamily="34" charset="-122"/>
-                <a:cs typeface="Arial" pitchFamily="34" charset="-120"/>
+                  <a:srgbClr val="16181D"/>
+                </a:solidFill>
+                <a:latin typeface="Arial" pitchFamily="34" charset="0"/>
+                <a:ea typeface="BIZ UDPGothic" pitchFamily="34" charset="-122"/>
+                <a:cs typeface="BIZ UDPGothic" pitchFamily="34" charset="-120"/>
               </a:rPr>
               <a:t>累進課税の「重い分」を寄付に</a:t>
             </a:r>
@@ -16059,11 +16059,11 @@
             <a:r>
               <a:rPr lang="en-US" sz="1250" dirty="0">
                 <a:solidFill>
-                  <a:srgbClr val="CCCCCC"/>
-                </a:solidFill>
-                <a:latin typeface="Arial" pitchFamily="34" charset="0"/>
-                <a:ea typeface="Arial" pitchFamily="34" charset="-122"/>
-                <a:cs typeface="Arial" pitchFamily="34" charset="-120"/>
+                  <a:srgbClr val="2B2F36"/>
+                </a:solidFill>
+                <a:latin typeface="Arial" pitchFamily="34" charset="0"/>
+                <a:ea typeface="BIZ UDPGothic" pitchFamily="34" charset="-122"/>
+                <a:cs typeface="BIZ UDPGothic" pitchFamily="34" charset="-120"/>
               </a:rPr>
               <a:t>年収が上がるほど税率が上がる仕組み。その重くなった分だけ寄付に使える枠が生まれる</a:t>
             </a:r>
@@ -16088,11 +16088,11 @@
             </a:avLst>
           </a:prstGeom>
           <a:solidFill>
-            <a:srgbClr val="1A1A1A"/>
+            <a:srgbClr val="FFFFFF"/>
           </a:solidFill>
           <a:ln w="12700">
             <a:solidFill>
-              <a:srgbClr val="2E2E2E"/>
+              <a:srgbClr val="DDE0E6"/>
             </a:solidFill>
             <a:prstDash val="solid"/>
           </a:ln>
@@ -16113,11 +16113,11 @@
             <a:avLst/>
           </a:prstGeom>
           <a:solidFill>
-            <a:srgbClr val="0A0A0A"/>
+            <a:srgbClr val="F5F6F8"/>
           </a:solidFill>
           <a:ln w="12700">
             <a:solidFill>
-              <a:srgbClr val="2E2E2E"/>
+              <a:srgbClr val="DDE0E6"/>
             </a:solidFill>
             <a:prstDash val="solid"/>
           </a:ln>
@@ -16174,11 +16174,11 @@
             <a:r>
               <a:rPr lang="en-US" sz="2200" b="1" dirty="0">
                 <a:solidFill>
-                  <a:srgbClr val="D62828"/>
-                </a:solidFill>
-                <a:latin typeface="Arial" pitchFamily="34" charset="0"/>
-                <a:ea typeface="Arial" pitchFamily="34" charset="-122"/>
-                <a:cs typeface="Arial" pitchFamily="34" charset="-120"/>
+                  <a:srgbClr val="C8161D"/>
+                </a:solidFill>
+                <a:latin typeface="Arial" pitchFamily="34" charset="0"/>
+                <a:ea typeface="BIZ UDPGothic" pitchFamily="34" charset="-122"/>
+                <a:cs typeface="BIZ UDPGothic" pitchFamily="34" charset="-120"/>
               </a:rPr>
               <a:t>住民税</a:t>
             </a:r>
@@ -16216,11 +16216,11 @@
             <a:r>
               <a:rPr lang="en-US" sz="1400" b="1" dirty="0">
                 <a:solidFill>
-                  <a:srgbClr val="F5F5F0"/>
-                </a:solidFill>
-                <a:latin typeface="Arial" pitchFamily="34" charset="0"/>
-                <a:ea typeface="Arial" pitchFamily="34" charset="-122"/>
-                <a:cs typeface="Arial" pitchFamily="34" charset="-120"/>
+                  <a:srgbClr val="16181D"/>
+                </a:solidFill>
+                <a:latin typeface="Arial" pitchFamily="34" charset="0"/>
+                <a:ea typeface="BIZ UDPGothic" pitchFamily="34" charset="-122"/>
+                <a:cs typeface="BIZ UDPGothic" pitchFamily="34" charset="-120"/>
               </a:rPr>
               <a:t>50%まで控除、75%は地元に</a:t>
             </a:r>
@@ -16258,11 +16258,11 @@
             <a:r>
               <a:rPr lang="en-US" sz="1250" dirty="0">
                 <a:solidFill>
-                  <a:srgbClr val="CCCCCC"/>
-                </a:solidFill>
-                <a:latin typeface="Arial" pitchFamily="34" charset="0"/>
-                <a:ea typeface="Arial" pitchFamily="34" charset="-122"/>
-                <a:cs typeface="Arial" pitchFamily="34" charset="-120"/>
+                  <a:srgbClr val="2B2F36"/>
+                </a:solidFill>
+                <a:latin typeface="Arial" pitchFamily="34" charset="0"/>
+                <a:ea typeface="BIZ UDPGothic" pitchFamily="34" charset="-122"/>
+                <a:cs typeface="BIZ UDPGothic" pitchFamily="34" charset="-120"/>
               </a:rPr>
               <a:t>住民税の半分まで寄付に使える。うち75%は住んでいる自治体へ、25%は自由に指定</a:t>
             </a:r>
@@ -16287,11 +16287,11 @@
             </a:avLst>
           </a:prstGeom>
           <a:solidFill>
-            <a:srgbClr val="1A1A1A"/>
+            <a:srgbClr val="FFFFFF"/>
           </a:solidFill>
           <a:ln w="12700">
             <a:solidFill>
-              <a:srgbClr val="2E2E2E"/>
+              <a:srgbClr val="DDE0E6"/>
             </a:solidFill>
             <a:prstDash val="solid"/>
           </a:ln>
@@ -16312,11 +16312,11 @@
             <a:avLst/>
           </a:prstGeom>
           <a:solidFill>
-            <a:srgbClr val="0A0A0A"/>
+            <a:srgbClr val="F5F6F8"/>
           </a:solidFill>
           <a:ln w="12700">
             <a:solidFill>
-              <a:srgbClr val="2E2E2E"/>
+              <a:srgbClr val="DDE0E6"/>
             </a:solidFill>
             <a:prstDash val="solid"/>
           </a:ln>
@@ -16373,11 +16373,11 @@
             <a:r>
               <a:rPr lang="en-US" sz="2200" b="1" dirty="0">
                 <a:solidFill>
-                  <a:srgbClr val="D62828"/>
-                </a:solidFill>
-                <a:latin typeface="Arial" pitchFamily="34" charset="0"/>
-                <a:ea typeface="Arial" pitchFamily="34" charset="-122"/>
-                <a:cs typeface="Arial" pitchFamily="34" charset="-120"/>
+                  <a:srgbClr val="C8161D"/>
+                </a:solidFill>
+                <a:latin typeface="Arial" pitchFamily="34" charset="0"/>
+                <a:ea typeface="BIZ UDPGothic" pitchFamily="34" charset="-122"/>
+                <a:cs typeface="BIZ UDPGothic" pitchFamily="34" charset="-120"/>
               </a:rPr>
               <a:t>消費税</a:t>
             </a:r>
@@ -16415,11 +16415,11 @@
             <a:r>
               <a:rPr lang="en-US" sz="1400" b="1" dirty="0">
                 <a:solidFill>
-                  <a:srgbClr val="F5F5F0"/>
-                </a:solidFill>
-                <a:latin typeface="Arial" pitchFamily="34" charset="0"/>
-                <a:ea typeface="Arial" pitchFamily="34" charset="-122"/>
-                <a:cs typeface="Arial" pitchFamily="34" charset="-120"/>
+                  <a:srgbClr val="16181D"/>
+                </a:solidFill>
+                <a:latin typeface="Arial" pitchFamily="34" charset="0"/>
+                <a:ea typeface="BIZ UDPGothic" pitchFamily="34" charset="-122"/>
+                <a:cs typeface="BIZ UDPGothic" pitchFamily="34" charset="-120"/>
               </a:rPr>
               <a:t>10万円超の買い物が対象</a:t>
             </a:r>
@@ -16457,11 +16457,11 @@
             <a:r>
               <a:rPr lang="en-US" sz="1250" dirty="0">
                 <a:solidFill>
-                  <a:srgbClr val="CCCCCC"/>
-                </a:solidFill>
-                <a:latin typeface="Arial" pitchFamily="34" charset="0"/>
-                <a:ea typeface="Arial" pitchFamily="34" charset="-122"/>
-                <a:cs typeface="Arial" pitchFamily="34" charset="-120"/>
+                  <a:srgbClr val="2B2F36"/>
+                </a:solidFill>
+                <a:latin typeface="Arial" pitchFamily="34" charset="0"/>
+                <a:ea typeface="BIZ UDPGothic" pitchFamily="34" charset="-122"/>
+                <a:cs typeface="BIZ UDPGothic" pitchFamily="34" charset="-120"/>
               </a:rPr>
               <a:t>高額な買い物の領収書を確定申告で。医療費控除と同じ要領。寄付先は自由に指定</a:t>
             </a:r>
@@ -16496,11 +16496,11 @@
             <a:r>
               <a:rPr lang="en-US" sz="1200" i="1" dirty="0">
                 <a:solidFill>
-                  <a:srgbClr val="999999"/>
-                </a:solidFill>
-                <a:latin typeface="Arial" pitchFamily="34" charset="0"/>
-                <a:ea typeface="Arial" pitchFamily="34" charset="-122"/>
-                <a:cs typeface="Arial" pitchFamily="34" charset="-120"/>
+                  <a:srgbClr val="4B515C"/>
+                </a:solidFill>
+                <a:latin typeface="Arial" pitchFamily="34" charset="0"/>
+                <a:ea typeface="BIZ UDPGothic" pitchFamily="34" charset="-122"/>
+                <a:cs typeface="BIZ UDPGothic" pitchFamily="34" charset="-120"/>
               </a:rPr>
               <a:t>3つの控除枠はそれぞれ独立。所得税枠・住民税枠・消費税枠をそれぞれ上限まで使い切れる。</a:t>
             </a:r>
@@ -16522,7 +16522,7 @@
     <p:bg>
       <p:bgPr>
         <a:solidFill>
-          <a:srgbClr val="0A0A0A"/>
+          <a:srgbClr val="F5F6F8"/>
         </a:solidFill>
       </p:bgPr>
     </p:bg>
@@ -16567,11 +16567,11 @@
             <a:r>
               <a:rPr lang="en-US" sz="1200" b="1" spc="300" kern="0" dirty="0">
                 <a:solidFill>
-                  <a:srgbClr val="D62828"/>
-                </a:solidFill>
-                <a:latin typeface="Arial" pitchFamily="34" charset="0"/>
-                <a:ea typeface="Arial" pitchFamily="34" charset="-122"/>
-                <a:cs typeface="Arial" pitchFamily="34" charset="-120"/>
+                  <a:srgbClr val="C8161D"/>
+                </a:solidFill>
+                <a:latin typeface="Arial" pitchFamily="34" charset="0"/>
+                <a:ea typeface="BIZ UDPGothic" pitchFamily="34" charset="-122"/>
+                <a:cs typeface="BIZ UDPGothic" pitchFamily="34" charset="-120"/>
               </a:rPr>
               <a:t>用語解説</a:t>
             </a:r>
@@ -16606,11 +16606,11 @@
             <a:r>
               <a:rPr lang="en-US" sz="3000" b="1" dirty="0">
                 <a:solidFill>
-                  <a:srgbClr val="F5F5F0"/>
-                </a:solidFill>
-                <a:latin typeface="Arial" pitchFamily="34" charset="0"/>
-                <a:ea typeface="Arial" pitchFamily="34" charset="-122"/>
-                <a:cs typeface="Arial" pitchFamily="34" charset="-120"/>
+                  <a:srgbClr val="16181D"/>
+                </a:solidFill>
+                <a:latin typeface="Arial" pitchFamily="34" charset="0"/>
+                <a:ea typeface="BIZ UDPGothic" pitchFamily="34" charset="-122"/>
+                <a:cs typeface="BIZ UDPGothic" pitchFamily="34" charset="-120"/>
               </a:rPr>
               <a:t>「累進課税」とは何か？</a:t>
             </a:r>
@@ -16645,11 +16645,11 @@
             <a:r>
               <a:rPr lang="en-US" sz="1000" dirty="0">
                 <a:solidFill>
-                  <a:srgbClr val="CCCCCC"/>
-                </a:solidFill>
-                <a:latin typeface="Arial" pitchFamily="34" charset="0"/>
-                <a:ea typeface="Arial" pitchFamily="34" charset="-122"/>
-                <a:cs typeface="Arial" pitchFamily="34" charset="-120"/>
+                  <a:srgbClr val="2B2F36"/>
+                </a:solidFill>
+                <a:latin typeface="Arial" pitchFamily="34" charset="0"/>
+                <a:ea typeface="BIZ UDPGothic" pitchFamily="34" charset="-122"/>
+                <a:cs typeface="BIZ UDPGothic" pitchFamily="34" charset="-120"/>
               </a:rPr>
               <a:t>07</a:t>
             </a:r>
@@ -16684,11 +16684,11 @@
             <a:r>
               <a:rPr lang="en-US" sz="900" dirty="0">
                 <a:solidFill>
-                  <a:srgbClr val="555555"/>
-                </a:solidFill>
-                <a:latin typeface="Arial" pitchFamily="34" charset="0"/>
-                <a:ea typeface="Arial" pitchFamily="34" charset="-122"/>
-                <a:cs typeface="Arial" pitchFamily="34" charset="-120"/>
+                  <a:srgbClr val="9AA0AA"/>
+                </a:solidFill>
+                <a:latin typeface="Arial" pitchFamily="34" charset="0"/>
+                <a:ea typeface="BIZ UDPGothic" pitchFamily="34" charset="-122"/>
+                <a:cs typeface="BIZ UDPGothic" pitchFamily="34" charset="-120"/>
               </a:rPr>
               <a:t>REBOOT JAPAN ── 提言005</a:t>
             </a:r>
@@ -16723,11 +16723,11 @@
             <a:r>
               <a:rPr lang="en-US" sz="1400" dirty="0">
                 <a:solidFill>
-                  <a:srgbClr val="CCCCCC"/>
-                </a:solidFill>
-                <a:latin typeface="Arial" pitchFamily="34" charset="0"/>
-                <a:ea typeface="Arial" pitchFamily="34" charset="-122"/>
-                <a:cs typeface="Arial" pitchFamily="34" charset="-120"/>
+                  <a:srgbClr val="2B2F36"/>
+                </a:solidFill>
+                <a:latin typeface="Arial" pitchFamily="34" charset="0"/>
+                <a:ea typeface="BIZ UDPGothic" pitchFamily="34" charset="-122"/>
+                <a:cs typeface="BIZ UDPGothic" pitchFamily="34" charset="-120"/>
               </a:rPr>
               <a:t>年収が上がるほど、税率が上がる仕組みです。現行の所得税はこの「累進課税」を採用しています。</a:t>
             </a:r>
@@ -16762,11 +16762,11 @@
             <a:r>
               <a:rPr lang="en-US" sz="1300" dirty="0">
                 <a:solidFill>
-                  <a:srgbClr val="F5F5F0"/>
-                </a:solidFill>
-                <a:latin typeface="Arial" pitchFamily="34" charset="0"/>
-                <a:ea typeface="Arial" pitchFamily="34" charset="-122"/>
-                <a:cs typeface="Arial" pitchFamily="34" charset="-120"/>
+                  <a:srgbClr val="16181D"/>
+                </a:solidFill>
+                <a:latin typeface="Arial" pitchFamily="34" charset="0"/>
+                <a:ea typeface="BIZ UDPGothic" pitchFamily="34" charset="-122"/>
+                <a:cs typeface="BIZ UDPGothic" pitchFamily="34" charset="-120"/>
               </a:rPr>
               <a:t>年収400万円</a:t>
             </a:r>
@@ -16789,7 +16789,7 @@
             <a:avLst/>
           </a:prstGeom>
           <a:solidFill>
-            <a:srgbClr val="2E2E2E"/>
+            <a:srgbClr val="DDE0E6"/>
           </a:solidFill>
           <a:ln/>
         </p:spPr>
@@ -16809,7 +16809,7 @@
             <a:avLst/>
           </a:prstGeom>
           <a:solidFill>
-            <a:srgbClr val="8B1A1A"/>
+            <a:srgbClr val="8B1116"/>
           </a:solidFill>
           <a:ln/>
         </p:spPr>
@@ -16841,11 +16841,11 @@
             <a:r>
               <a:rPr lang="en-US" sz="1100" dirty="0">
                 <a:solidFill>
-                  <a:srgbClr val="F5F5F0"/>
-                </a:solidFill>
-                <a:latin typeface="Arial" pitchFamily="34" charset="0"/>
-                <a:ea typeface="Arial" pitchFamily="34" charset="-122"/>
-                <a:cs typeface="Arial" pitchFamily="34" charset="-120"/>
+                  <a:srgbClr val="FFFFFF"/>
+                </a:solidFill>
+                <a:latin typeface="Arial" pitchFamily="34" charset="0"/>
+                <a:ea typeface="BIZ UDPGothic" pitchFamily="34" charset="-122"/>
+                <a:cs typeface="BIZ UDPGothic" pitchFamily="34" charset="-120"/>
               </a:rPr>
               <a:t>実効税率 約2.1%</a:t>
             </a:r>
@@ -16880,11 +16880,11 @@
             <a:r>
               <a:rPr lang="en-US" sz="1300" b="1" dirty="0">
                 <a:solidFill>
-                  <a:srgbClr val="D62828"/>
-                </a:solidFill>
-                <a:latin typeface="Arial" pitchFamily="34" charset="0"/>
-                <a:ea typeface="Arial" pitchFamily="34" charset="-122"/>
-                <a:cs typeface="Arial" pitchFamily="34" charset="-120"/>
+                  <a:srgbClr val="C8161D"/>
+                </a:solidFill>
+                <a:latin typeface="Arial" pitchFamily="34" charset="0"/>
+                <a:ea typeface="BIZ UDPGothic" pitchFamily="34" charset="-122"/>
+                <a:cs typeface="BIZ UDPGothic" pitchFamily="34" charset="-120"/>
               </a:rPr>
               <a:t>約8万円</a:t>
             </a:r>
@@ -16919,11 +16919,11 @@
             <a:r>
               <a:rPr lang="en-US" sz="1300" dirty="0">
                 <a:solidFill>
-                  <a:srgbClr val="F5F5F0"/>
-                </a:solidFill>
-                <a:latin typeface="Arial" pitchFamily="34" charset="0"/>
-                <a:ea typeface="Arial" pitchFamily="34" charset="-122"/>
-                <a:cs typeface="Arial" pitchFamily="34" charset="-120"/>
+                  <a:srgbClr val="16181D"/>
+                </a:solidFill>
+                <a:latin typeface="Arial" pitchFamily="34" charset="0"/>
+                <a:ea typeface="BIZ UDPGothic" pitchFamily="34" charset="-122"/>
+                <a:cs typeface="BIZ UDPGothic" pitchFamily="34" charset="-120"/>
               </a:rPr>
               <a:t>年収800万円</a:t>
             </a:r>
@@ -16946,7 +16946,7 @@
             <a:avLst/>
           </a:prstGeom>
           <a:solidFill>
-            <a:srgbClr val="2E2E2E"/>
+            <a:srgbClr val="DDE0E6"/>
           </a:solidFill>
           <a:ln/>
         </p:spPr>
@@ -16966,7 +16966,7 @@
             <a:avLst/>
           </a:prstGeom>
           <a:solidFill>
-            <a:srgbClr val="8B1A1A"/>
+            <a:srgbClr val="8B1116"/>
           </a:solidFill>
           <a:ln/>
         </p:spPr>
@@ -16998,11 +16998,11 @@
             <a:r>
               <a:rPr lang="en-US" sz="1100" dirty="0">
                 <a:solidFill>
-                  <a:srgbClr val="F5F5F0"/>
-                </a:solidFill>
-                <a:latin typeface="Arial" pitchFamily="34" charset="0"/>
-                <a:ea typeface="Arial" pitchFamily="34" charset="-122"/>
-                <a:cs typeface="Arial" pitchFamily="34" charset="-120"/>
+                  <a:srgbClr val="FFFFFF"/>
+                </a:solidFill>
+                <a:latin typeface="Arial" pitchFamily="34" charset="0"/>
+                <a:ea typeface="BIZ UDPGothic" pitchFamily="34" charset="-122"/>
+                <a:cs typeface="BIZ UDPGothic" pitchFamily="34" charset="-120"/>
               </a:rPr>
               <a:t>実効税率 約5.7%</a:t>
             </a:r>
@@ -17037,11 +17037,11 @@
             <a:r>
               <a:rPr lang="en-US" sz="1300" b="1" dirty="0">
                 <a:solidFill>
-                  <a:srgbClr val="D62828"/>
-                </a:solidFill>
-                <a:latin typeface="Arial" pitchFamily="34" charset="0"/>
-                <a:ea typeface="Arial" pitchFamily="34" charset="-122"/>
-                <a:cs typeface="Arial" pitchFamily="34" charset="-120"/>
+                  <a:srgbClr val="C8161D"/>
+                </a:solidFill>
+                <a:latin typeface="Arial" pitchFamily="34" charset="0"/>
+                <a:ea typeface="BIZ UDPGothic" pitchFamily="34" charset="-122"/>
+                <a:cs typeface="BIZ UDPGothic" pitchFamily="34" charset="-120"/>
               </a:rPr>
               <a:t>約46万円</a:t>
             </a:r>
@@ -17076,11 +17076,11 @@
             <a:r>
               <a:rPr lang="en-US" sz="1300" dirty="0">
                 <a:solidFill>
-                  <a:srgbClr val="F5F5F0"/>
-                </a:solidFill>
-                <a:latin typeface="Arial" pitchFamily="34" charset="0"/>
-                <a:ea typeface="Arial" pitchFamily="34" charset="-122"/>
-                <a:cs typeface="Arial" pitchFamily="34" charset="-120"/>
+                  <a:srgbClr val="16181D"/>
+                </a:solidFill>
+                <a:latin typeface="Arial" pitchFamily="34" charset="0"/>
+                <a:ea typeface="BIZ UDPGothic" pitchFamily="34" charset="-122"/>
+                <a:cs typeface="BIZ UDPGothic" pitchFamily="34" charset="-120"/>
               </a:rPr>
               <a:t>年収1,200万円</a:t>
             </a:r>
@@ -17103,7 +17103,7 @@
             <a:avLst/>
           </a:prstGeom>
           <a:solidFill>
-            <a:srgbClr val="2E2E2E"/>
+            <a:srgbClr val="DDE0E6"/>
           </a:solidFill>
           <a:ln/>
         </p:spPr>
@@ -17123,7 +17123,7 @@
             <a:avLst/>
           </a:prstGeom>
           <a:solidFill>
-            <a:srgbClr val="8B1A1A"/>
+            <a:srgbClr val="8B1116"/>
           </a:solidFill>
           <a:ln/>
         </p:spPr>
@@ -17155,11 +17155,11 @@
             <a:r>
               <a:rPr lang="en-US" sz="1100" dirty="0">
                 <a:solidFill>
-                  <a:srgbClr val="F5F5F0"/>
-                </a:solidFill>
-                <a:latin typeface="Arial" pitchFamily="34" charset="0"/>
-                <a:ea typeface="Arial" pitchFamily="34" charset="-122"/>
-                <a:cs typeface="Arial" pitchFamily="34" charset="-120"/>
+                  <a:srgbClr val="FFFFFF"/>
+                </a:solidFill>
+                <a:latin typeface="Arial" pitchFamily="34" charset="0"/>
+                <a:ea typeface="BIZ UDPGothic" pitchFamily="34" charset="-122"/>
+                <a:cs typeface="BIZ UDPGothic" pitchFamily="34" charset="-120"/>
               </a:rPr>
               <a:t>実効税率 約9.6%</a:t>
             </a:r>
@@ -17194,11 +17194,11 @@
             <a:r>
               <a:rPr lang="en-US" sz="1300" b="1" dirty="0">
                 <a:solidFill>
-                  <a:srgbClr val="D62828"/>
-                </a:solidFill>
-                <a:latin typeface="Arial" pitchFamily="34" charset="0"/>
-                <a:ea typeface="Arial" pitchFamily="34" charset="-122"/>
-                <a:cs typeface="Arial" pitchFamily="34" charset="-120"/>
+                  <a:srgbClr val="C8161D"/>
+                </a:solidFill>
+                <a:latin typeface="Arial" pitchFamily="34" charset="0"/>
+                <a:ea typeface="BIZ UDPGothic" pitchFamily="34" charset="-122"/>
+                <a:cs typeface="BIZ UDPGothic" pitchFamily="34" charset="-120"/>
               </a:rPr>
               <a:t>約115万円</a:t>
             </a:r>
@@ -17233,11 +17233,11 @@
             <a:r>
               <a:rPr lang="en-US" sz="1300" dirty="0">
                 <a:solidFill>
-                  <a:srgbClr val="F5F5F0"/>
-                </a:solidFill>
-                <a:latin typeface="Arial" pitchFamily="34" charset="0"/>
-                <a:ea typeface="Arial" pitchFamily="34" charset="-122"/>
-                <a:cs typeface="Arial" pitchFamily="34" charset="-120"/>
+                  <a:srgbClr val="16181D"/>
+                </a:solidFill>
+                <a:latin typeface="Arial" pitchFamily="34" charset="0"/>
+                <a:ea typeface="BIZ UDPGothic" pitchFamily="34" charset="-122"/>
+                <a:cs typeface="BIZ UDPGothic" pitchFamily="34" charset="-120"/>
               </a:rPr>
               <a:t>年収2,000万円</a:t>
             </a:r>
@@ -17260,7 +17260,7 @@
             <a:avLst/>
           </a:prstGeom>
           <a:solidFill>
-            <a:srgbClr val="2E2E2E"/>
+            <a:srgbClr val="DDE0E6"/>
           </a:solidFill>
           <a:ln/>
         </p:spPr>
@@ -17280,7 +17280,7 @@
             <a:avLst/>
           </a:prstGeom>
           <a:solidFill>
-            <a:srgbClr val="D62828"/>
+            <a:srgbClr val="C8161D"/>
           </a:solidFill>
           <a:ln/>
         </p:spPr>
@@ -17312,11 +17312,11 @@
             <a:r>
               <a:rPr lang="en-US" sz="1100" dirty="0">
                 <a:solidFill>
-                  <a:srgbClr val="F5F5F0"/>
-                </a:solidFill>
-                <a:latin typeface="Arial" pitchFamily="34" charset="0"/>
-                <a:ea typeface="Arial" pitchFamily="34" charset="-122"/>
-                <a:cs typeface="Arial" pitchFamily="34" charset="-120"/>
+                  <a:srgbClr val="FFFFFF"/>
+                </a:solidFill>
+                <a:latin typeface="Arial" pitchFamily="34" charset="0"/>
+                <a:ea typeface="BIZ UDPGothic" pitchFamily="34" charset="-122"/>
+                <a:cs typeface="BIZ UDPGothic" pitchFamily="34" charset="-120"/>
               </a:rPr>
               <a:t>実効税率 約16.4%</a:t>
             </a:r>
@@ -17351,11 +17351,11 @@
             <a:r>
               <a:rPr lang="en-US" sz="1300" b="1" dirty="0">
                 <a:solidFill>
-                  <a:srgbClr val="D62828"/>
-                </a:solidFill>
-                <a:latin typeface="Arial" pitchFamily="34" charset="0"/>
-                <a:ea typeface="Arial" pitchFamily="34" charset="-122"/>
-                <a:cs typeface="Arial" pitchFamily="34" charset="-120"/>
+                  <a:srgbClr val="C8161D"/>
+                </a:solidFill>
+                <a:latin typeface="Arial" pitchFamily="34" charset="0"/>
+                <a:ea typeface="BIZ UDPGothic" pitchFamily="34" charset="-122"/>
+                <a:cs typeface="BIZ UDPGothic" pitchFamily="34" charset="-120"/>
               </a:rPr>
               <a:t>約327万円</a:t>
             </a:r>
@@ -17390,11 +17390,11 @@
             <a:r>
               <a:rPr lang="en-US" sz="1200" i="1" dirty="0">
                 <a:solidFill>
-                  <a:srgbClr val="D62828"/>
-                </a:solidFill>
-                <a:latin typeface="Arial" pitchFamily="34" charset="0"/>
-                <a:ea typeface="Arial" pitchFamily="34" charset="-122"/>
-                <a:cs typeface="Arial" pitchFamily="34" charset="-120"/>
+                  <a:srgbClr val="C8161D"/>
+                </a:solidFill>
+                <a:latin typeface="Arial" pitchFamily="34" charset="0"/>
+                <a:ea typeface="BIZ UDPGothic" pitchFamily="34" charset="-122"/>
+                <a:cs typeface="BIZ UDPGothic" pitchFamily="34" charset="-120"/>
               </a:rPr>
               <a:t>年収が上がるほど税率が急に跳ね上がる ── この「累進性」の分を、005では寄付に変えられます。</a:t>
             </a:r>
@@ -17416,7 +17416,7 @@
     <p:bg>
       <p:bgPr>
         <a:solidFill>
-          <a:srgbClr val="0A0A0A"/>
+          <a:srgbClr val="F5F6F8"/>
         </a:solidFill>
       </p:bgPr>
     </p:bg>
@@ -17461,11 +17461,11 @@
             <a:r>
               <a:rPr lang="en-US" sz="1200" b="1" spc="300" kern="0" dirty="0">
                 <a:solidFill>
-                  <a:srgbClr val="D62828"/>
-                </a:solidFill>
-                <a:latin typeface="Arial" pitchFamily="34" charset="0"/>
-                <a:ea typeface="Arial" pitchFamily="34" charset="-122"/>
-                <a:cs typeface="Arial" pitchFamily="34" charset="-120"/>
+                  <a:srgbClr val="C8161D"/>
+                </a:solidFill>
+                <a:latin typeface="Arial" pitchFamily="34" charset="0"/>
+                <a:ea typeface="BIZ UDPGothic" pitchFamily="34" charset="-122"/>
+                <a:cs typeface="BIZ UDPGothic" pitchFamily="34" charset="-120"/>
               </a:rPr>
               <a:t>3. 所得税の控除の仕組み</a:t>
             </a:r>
@@ -17500,11 +17500,11 @@
             <a:r>
               <a:rPr lang="en-US" sz="3000" b="1" dirty="0">
                 <a:solidFill>
-                  <a:srgbClr val="F5F5F0"/>
-                </a:solidFill>
-                <a:latin typeface="Arial" pitchFamily="34" charset="0"/>
-                <a:ea typeface="Arial" pitchFamily="34" charset="-122"/>
-                <a:cs typeface="Arial" pitchFamily="34" charset="-120"/>
+                  <a:srgbClr val="16181D"/>
+                </a:solidFill>
+                <a:latin typeface="Arial" pitchFamily="34" charset="0"/>
+                <a:ea typeface="BIZ UDPGothic" pitchFamily="34" charset="-122"/>
+                <a:cs typeface="BIZ UDPGothic" pitchFamily="34" charset="-120"/>
               </a:rPr>
               <a:t>「中央値の人と同じ税率」まで、寄付で下げられる</a:t>
             </a:r>
@@ -17539,11 +17539,11 @@
             <a:r>
               <a:rPr lang="en-US" sz="1000" dirty="0">
                 <a:solidFill>
-                  <a:srgbClr val="CCCCCC"/>
-                </a:solidFill>
-                <a:latin typeface="Arial" pitchFamily="34" charset="0"/>
-                <a:ea typeface="Arial" pitchFamily="34" charset="-122"/>
-                <a:cs typeface="Arial" pitchFamily="34" charset="-120"/>
+                  <a:srgbClr val="2B2F36"/>
+                </a:solidFill>
+                <a:latin typeface="Arial" pitchFamily="34" charset="0"/>
+                <a:ea typeface="BIZ UDPGothic" pitchFamily="34" charset="-122"/>
+                <a:cs typeface="BIZ UDPGothic" pitchFamily="34" charset="-120"/>
               </a:rPr>
               <a:t>08</a:t>
             </a:r>
@@ -17578,11 +17578,11 @@
             <a:r>
               <a:rPr lang="en-US" sz="900" dirty="0">
                 <a:solidFill>
-                  <a:srgbClr val="555555"/>
-                </a:solidFill>
-                <a:latin typeface="Arial" pitchFamily="34" charset="0"/>
-                <a:ea typeface="Arial" pitchFamily="34" charset="-122"/>
-                <a:cs typeface="Arial" pitchFamily="34" charset="-120"/>
+                  <a:srgbClr val="9AA0AA"/>
+                </a:solidFill>
+                <a:latin typeface="Arial" pitchFamily="34" charset="0"/>
+                <a:ea typeface="BIZ UDPGothic" pitchFamily="34" charset="-122"/>
+                <a:cs typeface="BIZ UDPGothic" pitchFamily="34" charset="-120"/>
               </a:rPr>
               <a:t>REBOOT JAPAN ── 提言005</a:t>
             </a:r>
@@ -17607,11 +17607,11 @@
             </a:avLst>
           </a:prstGeom>
           <a:solidFill>
-            <a:srgbClr val="1A1A1A"/>
+            <a:srgbClr val="FFFFFF"/>
           </a:solidFill>
           <a:ln w="19050">
             <a:solidFill>
-              <a:srgbClr val="D62828"/>
+              <a:srgbClr val="C8161D"/>
             </a:solidFill>
             <a:prstDash val="solid"/>
           </a:ln>
@@ -17644,11 +17644,11 @@
             <a:r>
               <a:rPr lang="en-US" sz="1600" b="1" dirty="0">
                 <a:solidFill>
-                  <a:srgbClr val="F5F5F0"/>
-                </a:solidFill>
-                <a:latin typeface="Arial" pitchFamily="34" charset="0"/>
-                <a:ea typeface="Arial" pitchFamily="34" charset="-122"/>
-                <a:cs typeface="Arial" pitchFamily="34" charset="-120"/>
+                  <a:srgbClr val="16181D"/>
+                </a:solidFill>
+                <a:latin typeface="Arial" pitchFamily="34" charset="0"/>
+                <a:ea typeface="BIZ UDPGothic" pitchFamily="34" charset="-122"/>
+                <a:cs typeface="BIZ UDPGothic" pitchFamily="34" charset="-120"/>
               </a:rPr>
               <a:t>寄付に使える枠  ＝  現行の累進課税での所得税額  －  中央値（5%）での所得税額</a:t>
             </a:r>
@@ -17686,11 +17686,11 @@
             <a:r>
               <a:rPr lang="en-US" sz="1300" dirty="0">
                 <a:solidFill>
-                  <a:srgbClr val="CCCCCC"/>
-                </a:solidFill>
-                <a:latin typeface="Arial" pitchFamily="34" charset="0"/>
-                <a:ea typeface="Arial" pitchFamily="34" charset="-122"/>
-                <a:cs typeface="Arial" pitchFamily="34" charset="-120"/>
+                  <a:srgbClr val="2B2F36"/>
+                </a:solidFill>
+                <a:latin typeface="Arial" pitchFamily="34" charset="0"/>
+                <a:ea typeface="BIZ UDPGothic" pitchFamily="34" charset="-122"/>
+                <a:cs typeface="BIZ UDPGothic" pitchFamily="34" charset="-120"/>
               </a:rPr>
               <a:t>年収の中央値（約380万円）の人に適用される税率5%を、自分の所得にも当てはめた場合の税額との差額が、寄付できる枠になります。</a:t>
             </a:r>
@@ -17725,11 +17725,11 @@
             <a:r>
               <a:rPr lang="en-US" sz="1500" b="1" dirty="0">
                 <a:solidFill>
-                  <a:srgbClr val="D62828"/>
-                </a:solidFill>
-                <a:latin typeface="Arial" pitchFamily="34" charset="0"/>
-                <a:ea typeface="Arial" pitchFamily="34" charset="-122"/>
-                <a:cs typeface="Arial" pitchFamily="34" charset="-120"/>
+                  <a:srgbClr val="C8161D"/>
+                </a:solidFill>
+                <a:latin typeface="Arial" pitchFamily="34" charset="0"/>
+                <a:ea typeface="BIZ UDPGothic" pitchFamily="34" charset="-122"/>
+                <a:cs typeface="BIZ UDPGothic" pitchFamily="34" charset="-120"/>
               </a:rPr>
               <a:t>年収800万円の場合の例</a:t>
             </a:r>
@@ -17754,11 +17754,11 @@
             </a:avLst>
           </a:prstGeom>
           <a:solidFill>
-            <a:srgbClr val="1A1A1A"/>
+            <a:srgbClr val="FFFFFF"/>
           </a:solidFill>
           <a:ln w="12700">
             <a:solidFill>
-              <a:srgbClr val="2E2E2E"/>
+              <a:srgbClr val="DDE0E6"/>
             </a:solidFill>
             <a:prstDash val="solid"/>
           </a:ln>
@@ -17791,11 +17791,11 @@
             <a:r>
               <a:rPr lang="en-US" sz="1300" dirty="0">
                 <a:solidFill>
-                  <a:srgbClr val="CCCCCC"/>
-                </a:solidFill>
-                <a:latin typeface="Arial" pitchFamily="34" charset="0"/>
-                <a:ea typeface="Arial" pitchFamily="34" charset="-122"/>
-                <a:cs typeface="Arial" pitchFamily="34" charset="-120"/>
+                  <a:srgbClr val="2B2F36"/>
+                </a:solidFill>
+                <a:latin typeface="Arial" pitchFamily="34" charset="0"/>
+                <a:ea typeface="BIZ UDPGothic" pitchFamily="34" charset="-122"/>
+                <a:cs typeface="BIZ UDPGothic" pitchFamily="34" charset="-120"/>
               </a:rPr>
               <a:t>現行の累進課税での所得税額</a:t>
             </a:r>
@@ -17830,11 +17830,11 @@
             <a:r>
               <a:rPr lang="en-US" sz="1500" b="1" dirty="0">
                 <a:solidFill>
-                  <a:srgbClr val="F5F5F0"/>
-                </a:solidFill>
-                <a:latin typeface="Arial" pitchFamily="34" charset="0"/>
-                <a:ea typeface="Arial" pitchFamily="34" charset="-122"/>
-                <a:cs typeface="Arial" pitchFamily="34" charset="-120"/>
+                  <a:srgbClr val="16181D"/>
+                </a:solidFill>
+                <a:latin typeface="Arial" pitchFamily="34" charset="0"/>
+                <a:ea typeface="BIZ UDPGothic" pitchFamily="34" charset="-122"/>
+                <a:cs typeface="BIZ UDPGothic" pitchFamily="34" charset="-120"/>
               </a:rPr>
               <a:t>約45.7万円</a:t>
             </a:r>
@@ -17859,11 +17859,11 @@
             </a:avLst>
           </a:prstGeom>
           <a:solidFill>
-            <a:srgbClr val="1A1A1A"/>
+            <a:srgbClr val="FFFFFF"/>
           </a:solidFill>
           <a:ln w="12700">
             <a:solidFill>
-              <a:srgbClr val="2E2E2E"/>
+              <a:srgbClr val="DDE0E6"/>
             </a:solidFill>
             <a:prstDash val="solid"/>
           </a:ln>
@@ -17896,11 +17896,11 @@
             <a:r>
               <a:rPr lang="en-US" sz="1300" dirty="0">
                 <a:solidFill>
-                  <a:srgbClr val="CCCCCC"/>
-                </a:solidFill>
-                <a:latin typeface="Arial" pitchFamily="34" charset="0"/>
-                <a:ea typeface="Arial" pitchFamily="34" charset="-122"/>
-                <a:cs typeface="Arial" pitchFamily="34" charset="-120"/>
+                  <a:srgbClr val="2B2F36"/>
+                </a:solidFill>
+                <a:latin typeface="Arial" pitchFamily="34" charset="0"/>
+                <a:ea typeface="BIZ UDPGothic" pitchFamily="34" charset="-122"/>
+                <a:cs typeface="BIZ UDPGothic" pitchFamily="34" charset="-120"/>
               </a:rPr>
               <a:t>中央値水準（5%）で計算した場合</a:t>
             </a:r>
@@ -17935,11 +17935,11 @@
             <a:r>
               <a:rPr lang="en-US" sz="1500" b="1" dirty="0">
                 <a:solidFill>
-                  <a:srgbClr val="F5F5F0"/>
-                </a:solidFill>
-                <a:latin typeface="Arial" pitchFamily="34" charset="0"/>
-                <a:ea typeface="Arial" pitchFamily="34" charset="-122"/>
-                <a:cs typeface="Arial" pitchFamily="34" charset="-120"/>
+                  <a:srgbClr val="16181D"/>
+                </a:solidFill>
+                <a:latin typeface="Arial" pitchFamily="34" charset="0"/>
+                <a:ea typeface="BIZ UDPGothic" pitchFamily="34" charset="-122"/>
+                <a:cs typeface="BIZ UDPGothic" pitchFamily="34" charset="-120"/>
               </a:rPr>
               <a:t>約22.1万円</a:t>
             </a:r>
@@ -17964,11 +17964,11 @@
             </a:avLst>
           </a:prstGeom>
           <a:solidFill>
-            <a:srgbClr val="2A1414"/>
+            <a:srgbClr val="FCEBEB"/>
           </a:solidFill>
           <a:ln w="19050">
             <a:solidFill>
-              <a:srgbClr val="D62828"/>
+              <a:srgbClr val="C8161D"/>
             </a:solidFill>
             <a:prstDash val="solid"/>
           </a:ln>
@@ -18001,11 +18001,11 @@
             <a:r>
               <a:rPr lang="en-US" sz="1300" b="1" dirty="0">
                 <a:solidFill>
-                  <a:srgbClr val="F5F5F0"/>
-                </a:solidFill>
-                <a:latin typeface="Arial" pitchFamily="34" charset="0"/>
-                <a:ea typeface="Arial" pitchFamily="34" charset="-122"/>
-                <a:cs typeface="Arial" pitchFamily="34" charset="-120"/>
+                  <a:srgbClr val="16181D"/>
+                </a:solidFill>
+                <a:latin typeface="Arial" pitchFamily="34" charset="0"/>
+                <a:ea typeface="BIZ UDPGothic" pitchFamily="34" charset="-122"/>
+                <a:cs typeface="BIZ UDPGothic" pitchFamily="34" charset="-120"/>
               </a:rPr>
               <a:t>→ 寄付できる枠（差額）</a:t>
             </a:r>
@@ -18040,11 +18040,11 @@
             <a:r>
               <a:rPr lang="en-US" sz="1500" b="1" dirty="0">
                 <a:solidFill>
-                  <a:srgbClr val="D62828"/>
-                </a:solidFill>
-                <a:latin typeface="Arial" pitchFamily="34" charset="0"/>
-                <a:ea typeface="Arial" pitchFamily="34" charset="-122"/>
-                <a:cs typeface="Arial" pitchFamily="34" charset="-120"/>
+                  <a:srgbClr val="C8161D"/>
+                </a:solidFill>
+                <a:latin typeface="Arial" pitchFamily="34" charset="0"/>
+                <a:ea typeface="BIZ UDPGothic" pitchFamily="34" charset="-122"/>
+                <a:cs typeface="BIZ UDPGothic" pitchFamily="34" charset="-120"/>
               </a:rPr>
               <a:t>約23.6万円</a:t>
             </a:r>
@@ -18066,7 +18066,7 @@
     <p:bg>
       <p:bgPr>
         <a:solidFill>
-          <a:srgbClr val="0A0A0A"/>
+          <a:srgbClr val="F5F6F8"/>
         </a:solidFill>
       </p:bgPr>
     </p:bg>
@@ -18111,11 +18111,11 @@
             <a:r>
               <a:rPr lang="en-US" sz="1200" b="1" spc="300" kern="0" dirty="0">
                 <a:solidFill>
-                  <a:srgbClr val="D62828"/>
-                </a:solidFill>
-                <a:latin typeface="Arial" pitchFamily="34" charset="0"/>
-                <a:ea typeface="Arial" pitchFamily="34" charset="-122"/>
-                <a:cs typeface="Arial" pitchFamily="34" charset="-120"/>
+                  <a:srgbClr val="C8161D"/>
+                </a:solidFill>
+                <a:latin typeface="Arial" pitchFamily="34" charset="0"/>
+                <a:ea typeface="BIZ UDPGothic" pitchFamily="34" charset="-122"/>
+                <a:cs typeface="BIZ UDPGothic" pitchFamily="34" charset="-120"/>
               </a:rPr>
               <a:t>3. 所得税 年収別シミュレーション</a:t>
             </a:r>
@@ -18150,11 +18150,11 @@
             <a:r>
               <a:rPr lang="en-US" sz="3000" b="1" dirty="0">
                 <a:solidFill>
-                  <a:srgbClr val="F5F5F0"/>
-                </a:solidFill>
-                <a:latin typeface="Arial" pitchFamily="34" charset="0"/>
-                <a:ea typeface="Arial" pitchFamily="34" charset="-122"/>
-                <a:cs typeface="Arial" pitchFamily="34" charset="-120"/>
+                  <a:srgbClr val="16181D"/>
+                </a:solidFill>
+                <a:latin typeface="Arial" pitchFamily="34" charset="0"/>
+                <a:ea typeface="BIZ UDPGothic" pitchFamily="34" charset="-122"/>
+                <a:cs typeface="BIZ UDPGothic" pitchFamily="34" charset="-120"/>
               </a:rPr>
               <a:t>年収が高いほど、寄付できる枠が大きくなる</a:t>
             </a:r>
@@ -18189,11 +18189,11 @@
             <a:r>
               <a:rPr lang="en-US" sz="1000" dirty="0">
                 <a:solidFill>
-                  <a:srgbClr val="CCCCCC"/>
-                </a:solidFill>
-                <a:latin typeface="Arial" pitchFamily="34" charset="0"/>
-                <a:ea typeface="Arial" pitchFamily="34" charset="-122"/>
-                <a:cs typeface="Arial" pitchFamily="34" charset="-120"/>
+                  <a:srgbClr val="2B2F36"/>
+                </a:solidFill>
+                <a:latin typeface="Arial" pitchFamily="34" charset="0"/>
+                <a:ea typeface="BIZ UDPGothic" pitchFamily="34" charset="-122"/>
+                <a:cs typeface="BIZ UDPGothic" pitchFamily="34" charset="-120"/>
               </a:rPr>
               <a:t>09</a:t>
             </a:r>
@@ -18228,11 +18228,11 @@
             <a:r>
               <a:rPr lang="en-US" sz="900" dirty="0">
                 <a:solidFill>
-                  <a:srgbClr val="555555"/>
-                </a:solidFill>
-                <a:latin typeface="Arial" pitchFamily="34" charset="0"/>
-                <a:ea typeface="Arial" pitchFamily="34" charset="-122"/>
-                <a:cs typeface="Arial" pitchFamily="34" charset="-120"/>
+                  <a:srgbClr val="9AA0AA"/>
+                </a:solidFill>
+                <a:latin typeface="Arial" pitchFamily="34" charset="0"/>
+                <a:ea typeface="BIZ UDPGothic" pitchFamily="34" charset="-122"/>
+                <a:cs typeface="BIZ UDPGothic" pitchFamily="34" charset="-120"/>
               </a:rPr>
               <a:t>REBOOT JAPAN ── 提言005</a:t>
             </a:r>
@@ -18267,11 +18267,11 @@
             <a:r>
               <a:rPr lang="en-US" sz="1100" dirty="0">
                 <a:solidFill>
-                  <a:srgbClr val="888888"/>
-                </a:solidFill>
-                <a:latin typeface="Arial" pitchFamily="34" charset="0"/>
-                <a:ea typeface="Arial" pitchFamily="34" charset="-122"/>
-                <a:cs typeface="Arial" pitchFamily="34" charset="-120"/>
+                  <a:srgbClr val="626875"/>
+                </a:solidFill>
+                <a:latin typeface="Arial" pitchFamily="34" charset="0"/>
+                <a:ea typeface="BIZ UDPGothic" pitchFamily="34" charset="-122"/>
+                <a:cs typeface="BIZ UDPGothic" pitchFamily="34" charset="-120"/>
               </a:rPr>
               <a:t>（概算：給与所得控除・社会保険料控除等は現行制度に基づく試算）</a:t>
             </a:r>
@@ -18294,7 +18294,7 @@
             <a:avLst/>
           </a:prstGeom>
           <a:solidFill>
-            <a:srgbClr val="2E2E2E"/>
+            <a:srgbClr val="DDE0E6"/>
           </a:solidFill>
           <a:ln/>
         </p:spPr>
@@ -18326,11 +18326,11 @@
             <a:r>
               <a:rPr lang="en-US" sz="1150" b="1" dirty="0">
                 <a:solidFill>
-                  <a:srgbClr val="F5F5F0"/>
-                </a:solidFill>
-                <a:latin typeface="Arial" pitchFamily="34" charset="0"/>
-                <a:ea typeface="Arial" pitchFamily="34" charset="-122"/>
-                <a:cs typeface="Arial" pitchFamily="34" charset="-120"/>
+                  <a:srgbClr val="16181D"/>
+                </a:solidFill>
+                <a:latin typeface="Arial" pitchFamily="34" charset="0"/>
+                <a:ea typeface="BIZ UDPGothic" pitchFamily="34" charset="-122"/>
+                <a:cs typeface="BIZ UDPGothic" pitchFamily="34" charset="-120"/>
               </a:rPr>
               <a:t>年収</a:t>
             </a:r>
@@ -18353,7 +18353,7 @@
             <a:avLst/>
           </a:prstGeom>
           <a:solidFill>
-            <a:srgbClr val="2E2E2E"/>
+            <a:srgbClr val="DDE0E6"/>
           </a:solidFill>
           <a:ln/>
         </p:spPr>
@@ -18385,11 +18385,11 @@
             <a:r>
               <a:rPr lang="en-US" sz="1150" b="1" dirty="0">
                 <a:solidFill>
-                  <a:srgbClr val="F5F5F0"/>
-                </a:solidFill>
-                <a:latin typeface="Arial" pitchFamily="34" charset="0"/>
-                <a:ea typeface="Arial" pitchFamily="34" charset="-122"/>
-                <a:cs typeface="Arial" pitchFamily="34" charset="-120"/>
+                  <a:srgbClr val="16181D"/>
+                </a:solidFill>
+                <a:latin typeface="Arial" pitchFamily="34" charset="0"/>
+                <a:ea typeface="BIZ UDPGothic" pitchFamily="34" charset="-122"/>
+                <a:cs typeface="BIZ UDPGothic" pitchFamily="34" charset="-120"/>
               </a:rPr>
               <a:t>現行所得税額</a:t>
             </a:r>
@@ -18412,7 +18412,7 @@
             <a:avLst/>
           </a:prstGeom>
           <a:solidFill>
-            <a:srgbClr val="2E2E2E"/>
+            <a:srgbClr val="DDE0E6"/>
           </a:solidFill>
           <a:ln/>
         </p:spPr>
@@ -18444,11 +18444,11 @@
             <a:r>
               <a:rPr lang="en-US" sz="1150" b="1" dirty="0">
                 <a:solidFill>
-                  <a:srgbClr val="F5F5F0"/>
-                </a:solidFill>
-                <a:latin typeface="Arial" pitchFamily="34" charset="0"/>
-                <a:ea typeface="Arial" pitchFamily="34" charset="-122"/>
-                <a:cs typeface="Arial" pitchFamily="34" charset="-120"/>
+                  <a:srgbClr val="16181D"/>
+                </a:solidFill>
+                <a:latin typeface="Arial" pitchFamily="34" charset="0"/>
+                <a:ea typeface="BIZ UDPGothic" pitchFamily="34" charset="-122"/>
+                <a:cs typeface="BIZ UDPGothic" pitchFamily="34" charset="-120"/>
               </a:rPr>
               <a:t>寄付できる枠（差額）</a:t>
             </a:r>
@@ -18471,7 +18471,7 @@
             <a:avLst/>
           </a:prstGeom>
           <a:solidFill>
-            <a:srgbClr val="2E2E2E"/>
+            <a:srgbClr val="DDE0E6"/>
           </a:solidFill>
           <a:ln/>
         </p:spPr>
@@ -18519,11 +18519,11 @@
             <a:avLst/>
           </a:prstGeom>
           <a:solidFill>
-            <a:srgbClr val="1A1A1A"/>
+            <a:srgbClr val="FFFFFF"/>
           </a:solidFill>
           <a:ln w="9525">
             <a:solidFill>
-              <a:srgbClr val="2E2E2E"/>
+              <a:srgbClr val="DDE0E6"/>
             </a:solidFill>
             <a:prstDash val="solid"/>
           </a:ln>
@@ -18556,11 +18556,11 @@
             <a:r>
               <a:rPr lang="en-US" sz="1300" b="1" dirty="0">
                 <a:solidFill>
-                  <a:srgbClr val="F5F5F0"/>
-                </a:solidFill>
-                <a:latin typeface="Arial" pitchFamily="34" charset="0"/>
-                <a:ea typeface="Arial" pitchFamily="34" charset="-122"/>
-                <a:cs typeface="Arial" pitchFamily="34" charset="-120"/>
+                  <a:srgbClr val="16181D"/>
+                </a:solidFill>
+                <a:latin typeface="Arial" pitchFamily="34" charset="0"/>
+                <a:ea typeface="BIZ UDPGothic" pitchFamily="34" charset="-122"/>
+                <a:cs typeface="BIZ UDPGothic" pitchFamily="34" charset="-120"/>
               </a:rPr>
               <a:t>年収400万円</a:t>
             </a:r>
@@ -18583,11 +18583,11 @@
             <a:avLst/>
           </a:prstGeom>
           <a:solidFill>
-            <a:srgbClr val="1A1A1A"/>
+            <a:srgbClr val="FFFFFF"/>
           </a:solidFill>
           <a:ln w="9525">
             <a:solidFill>
-              <a:srgbClr val="2E2E2E"/>
+              <a:srgbClr val="DDE0E6"/>
             </a:solidFill>
             <a:prstDash val="solid"/>
           </a:ln>
@@ -18620,11 +18620,11 @@
             <a:r>
               <a:rPr lang="en-US" sz="1300" dirty="0">
                 <a:solidFill>
-                  <a:srgbClr val="CCCCCC"/>
-                </a:solidFill>
-                <a:latin typeface="Arial" pitchFamily="34" charset="0"/>
-                <a:ea typeface="Arial" pitchFamily="34" charset="-122"/>
-                <a:cs typeface="Arial" pitchFamily="34" charset="-120"/>
+                  <a:srgbClr val="2B2F36"/>
+                </a:solidFill>
+                <a:latin typeface="Arial" pitchFamily="34" charset="0"/>
+                <a:ea typeface="BIZ UDPGothic" pitchFamily="34" charset="-122"/>
+                <a:cs typeface="BIZ UDPGothic" pitchFamily="34" charset="-120"/>
               </a:rPr>
               <a:t>約8.4万円</a:t>
             </a:r>
@@ -18647,11 +18647,11 @@
             <a:avLst/>
           </a:prstGeom>
           <a:solidFill>
-            <a:srgbClr val="1A1A1A"/>
+            <a:srgbClr val="FFFFFF"/>
           </a:solidFill>
           <a:ln w="9525">
             <a:solidFill>
-              <a:srgbClr val="2E2E2E"/>
+              <a:srgbClr val="DDE0E6"/>
             </a:solidFill>
             <a:prstDash val="solid"/>
           </a:ln>
@@ -18684,11 +18684,11 @@
             <a:r>
               <a:rPr lang="en-US" sz="1400" dirty="0">
                 <a:solidFill>
-                  <a:srgbClr val="CCCCCC"/>
-                </a:solidFill>
-                <a:latin typeface="Arial" pitchFamily="34" charset="0"/>
-                <a:ea typeface="Arial" pitchFamily="34" charset="-122"/>
-                <a:cs typeface="Arial" pitchFamily="34" charset="-120"/>
+                  <a:srgbClr val="2B2F36"/>
+                </a:solidFill>
+                <a:latin typeface="Arial" pitchFamily="34" charset="0"/>
+                <a:ea typeface="BIZ UDPGothic" pitchFamily="34" charset="-122"/>
+                <a:cs typeface="BIZ UDPGothic" pitchFamily="34" charset="-120"/>
               </a:rPr>
               <a:t>0円（対象外）</a:t>
             </a:r>
@@ -18711,11 +18711,11 @@
             <a:avLst/>
           </a:prstGeom>
           <a:solidFill>
-            <a:srgbClr val="1A1A1A"/>
+            <a:srgbClr val="FFFFFF"/>
           </a:solidFill>
           <a:ln w="9525">
             <a:solidFill>
-              <a:srgbClr val="2E2E2E"/>
+              <a:srgbClr val="DDE0E6"/>
             </a:solidFill>
             <a:prstDash val="solid"/>
           </a:ln>
@@ -18748,11 +18748,11 @@
             <a:r>
               <a:rPr lang="en-US" sz="1000" dirty="0">
                 <a:solidFill>
-                  <a:srgbClr val="CCCCCC"/>
-                </a:solidFill>
-                <a:latin typeface="Arial" pitchFamily="34" charset="0"/>
-                <a:ea typeface="Arial" pitchFamily="34" charset="-122"/>
-                <a:cs typeface="Arial" pitchFamily="34" charset="-120"/>
+                  <a:srgbClr val="2B2F36"/>
+                </a:solidFill>
+                <a:latin typeface="Arial" pitchFamily="34" charset="0"/>
+                <a:ea typeface="BIZ UDPGothic" pitchFamily="34" charset="-122"/>
+                <a:cs typeface="BIZ UDPGothic" pitchFamily="34" charset="-120"/>
               </a:rPr>
               <a:t>中央値以下のため差額がほぼゼロ</a:t>
             </a:r>
@@ -18775,11 +18775,11 @@
             <a:avLst/>
           </a:prstGeom>
           <a:solidFill>
-            <a:srgbClr val="0A0A0A"/>
+            <a:srgbClr val="F5F6F8"/>
           </a:solidFill>
           <a:ln w="9525">
             <a:solidFill>
-              <a:srgbClr val="2E2E2E"/>
+              <a:srgbClr val="DDE0E6"/>
             </a:solidFill>
             <a:prstDash val="solid"/>
           </a:ln>
@@ -18812,11 +18812,11 @@
             <a:r>
               <a:rPr lang="en-US" sz="1300" b="1" dirty="0">
                 <a:solidFill>
-                  <a:srgbClr val="F5F5F0"/>
-                </a:solidFill>
-                <a:latin typeface="Arial" pitchFamily="34" charset="0"/>
-                <a:ea typeface="Arial" pitchFamily="34" charset="-122"/>
-                <a:cs typeface="Arial" pitchFamily="34" charset="-120"/>
+                  <a:srgbClr val="16181D"/>
+                </a:solidFill>
+                <a:latin typeface="Arial" pitchFamily="34" charset="0"/>
+                <a:ea typeface="BIZ UDPGothic" pitchFamily="34" charset="-122"/>
+                <a:cs typeface="BIZ UDPGothic" pitchFamily="34" charset="-120"/>
               </a:rPr>
               <a:t>年収800万円</a:t>
             </a:r>
@@ -18839,11 +18839,11 @@
             <a:avLst/>
           </a:prstGeom>
           <a:solidFill>
-            <a:srgbClr val="0A0A0A"/>
+            <a:srgbClr val="F5F6F8"/>
           </a:solidFill>
           <a:ln w="9525">
             <a:solidFill>
-              <a:srgbClr val="2E2E2E"/>
+              <a:srgbClr val="DDE0E6"/>
             </a:solidFill>
             <a:prstDash val="solid"/>
           </a:ln>
@@ -18876,11 +18876,11 @@
             <a:r>
               <a:rPr lang="en-US" sz="1300" dirty="0">
                 <a:solidFill>
-                  <a:srgbClr val="CCCCCC"/>
-                </a:solidFill>
-                <a:latin typeface="Arial" pitchFamily="34" charset="0"/>
-                <a:ea typeface="Arial" pitchFamily="34" charset="-122"/>
-                <a:cs typeface="Arial" pitchFamily="34" charset="-120"/>
+                  <a:srgbClr val="2B2F36"/>
+                </a:solidFill>
+                <a:latin typeface="Arial" pitchFamily="34" charset="0"/>
+                <a:ea typeface="BIZ UDPGothic" pitchFamily="34" charset="-122"/>
+                <a:cs typeface="BIZ UDPGothic" pitchFamily="34" charset="-120"/>
               </a:rPr>
               <a:t>約45.7万円</a:t>
             </a:r>
@@ -18903,11 +18903,11 @@
             <a:avLst/>
           </a:prstGeom>
           <a:solidFill>
-            <a:srgbClr val="2A1414"/>
+            <a:srgbClr val="FCEBEB"/>
           </a:solidFill>
           <a:ln w="19050">
             <a:solidFill>
-              <a:srgbClr val="D62828"/>
+              <a:srgbClr val="C8161D"/>
             </a:solidFill>
             <a:prstDash val="solid"/>
           </a:ln>
@@ -18940,11 +18940,11 @@
             <a:r>
               <a:rPr lang="en-US" sz="1400" b="1" dirty="0">
                 <a:solidFill>
-                  <a:srgbClr val="D62828"/>
-                </a:solidFill>
-                <a:latin typeface="Arial" pitchFamily="34" charset="0"/>
-                <a:ea typeface="Arial" pitchFamily="34" charset="-122"/>
-                <a:cs typeface="Arial" pitchFamily="34" charset="-120"/>
+                  <a:srgbClr val="C8161D"/>
+                </a:solidFill>
+                <a:latin typeface="Arial" pitchFamily="34" charset="0"/>
+                <a:ea typeface="BIZ UDPGothic" pitchFamily="34" charset="-122"/>
+                <a:cs typeface="BIZ UDPGothic" pitchFamily="34" charset="-120"/>
               </a:rPr>
               <a:t>約23.6万円</a:t>
             </a:r>
@@ -18967,11 +18967,11 @@
             <a:avLst/>
           </a:prstGeom>
           <a:solidFill>
-            <a:srgbClr val="0A0A0A"/>
+            <a:srgbClr val="F5F6F8"/>
           </a:solidFill>
           <a:ln w="9525">
             <a:solidFill>
-              <a:srgbClr val="2E2E2E"/>
+              <a:srgbClr val="DDE0E6"/>
             </a:solidFill>
             <a:prstDash val="solid"/>
           </a:ln>
@@ -18992,7 +18992,7 @@
             <a:avLst/>
           </a:prstGeom>
           <a:solidFill>
-            <a:srgbClr val="D62828"/>
+            <a:srgbClr val="C8161D"/>
           </a:solidFill>
           <a:ln/>
         </p:spPr>
@@ -19012,11 +19012,11 @@
             <a:avLst/>
           </a:prstGeom>
           <a:solidFill>
-            <a:srgbClr val="1A1A1A"/>
+            <a:srgbClr val="FFFFFF"/>
           </a:solidFill>
           <a:ln w="9525">
             <a:solidFill>
-              <a:srgbClr val="2E2E2E"/>
+              <a:srgbClr val="DDE0E6"/>
             </a:solidFill>
             <a:prstDash val="solid"/>
           </a:ln>
@@ -19049,11 +19049,11 @@
             <a:r>
               <a:rPr lang="en-US" sz="1300" b="1" dirty="0">
                 <a:solidFill>
-                  <a:srgbClr val="F5F5F0"/>
-                </a:solidFill>
-                <a:latin typeface="Arial" pitchFamily="34" charset="0"/>
-                <a:ea typeface="Arial" pitchFamily="34" charset="-122"/>
-                <a:cs typeface="Arial" pitchFamily="34" charset="-120"/>
+                  <a:srgbClr val="16181D"/>
+                </a:solidFill>
+                <a:latin typeface="Arial" pitchFamily="34" charset="0"/>
+                <a:ea typeface="BIZ UDPGothic" pitchFamily="34" charset="-122"/>
+                <a:cs typeface="BIZ UDPGothic" pitchFamily="34" charset="-120"/>
               </a:rPr>
               <a:t>年収1,200万円</a:t>
             </a:r>
@@ -19076,11 +19076,11 @@
             <a:avLst/>
           </a:prstGeom>
           <a:solidFill>
-            <a:srgbClr val="1A1A1A"/>
+            <a:srgbClr val="FFFFFF"/>
           </a:solidFill>
           <a:ln w="9525">
             <a:solidFill>
-              <a:srgbClr val="2E2E2E"/>
+              <a:srgbClr val="DDE0E6"/>
             </a:solidFill>
             <a:prstDash val="solid"/>
           </a:ln>
@@ -19113,11 +19113,11 @@
             <a:r>
               <a:rPr lang="en-US" sz="1300" dirty="0">
                 <a:solidFill>
-                  <a:srgbClr val="CCCCCC"/>
-                </a:solidFill>
-                <a:latin typeface="Arial" pitchFamily="34" charset="0"/>
-                <a:ea typeface="Arial" pitchFamily="34" charset="-122"/>
-                <a:cs typeface="Arial" pitchFamily="34" charset="-120"/>
+                  <a:srgbClr val="2B2F36"/>
+                </a:solidFill>
+                <a:latin typeface="Arial" pitchFamily="34" charset="0"/>
+                <a:ea typeface="BIZ UDPGothic" pitchFamily="34" charset="-122"/>
+                <a:cs typeface="BIZ UDPGothic" pitchFamily="34" charset="-120"/>
               </a:rPr>
               <a:t>約115.1万円</a:t>
             </a:r>
@@ -19140,11 +19140,11 @@
             <a:avLst/>
           </a:prstGeom>
           <a:solidFill>
-            <a:srgbClr val="2A1414"/>
+            <a:srgbClr val="FCEBEB"/>
           </a:solidFill>
           <a:ln w="19050">
             <a:solidFill>
-              <a:srgbClr val="D62828"/>
+              <a:srgbClr val="C8161D"/>
             </a:solidFill>
             <a:prstDash val="solid"/>
           </a:ln>
@@ -19177,11 +19177,11 @@
             <a:r>
               <a:rPr lang="en-US" sz="1400" b="1" dirty="0">
                 <a:solidFill>
-                  <a:srgbClr val="D62828"/>
-                </a:solidFill>
-                <a:latin typeface="Arial" pitchFamily="34" charset="0"/>
-                <a:ea typeface="Arial" pitchFamily="34" charset="-122"/>
-                <a:cs typeface="Arial" pitchFamily="34" charset="-120"/>
+                  <a:srgbClr val="C8161D"/>
+                </a:solidFill>
+                <a:latin typeface="Arial" pitchFamily="34" charset="0"/>
+                <a:ea typeface="BIZ UDPGothic" pitchFamily="34" charset="-122"/>
+                <a:cs typeface="BIZ UDPGothic" pitchFamily="34" charset="-120"/>
               </a:rPr>
               <a:t>約76.3万円</a:t>
             </a:r>
@@ -19204,11 +19204,11 @@
             <a:avLst/>
           </a:prstGeom>
           <a:solidFill>
-            <a:srgbClr val="1A1A1A"/>
+            <a:srgbClr val="FFFFFF"/>
           </a:solidFill>
           <a:ln w="9525">
             <a:solidFill>
-              <a:srgbClr val="2E2E2E"/>
+              <a:srgbClr val="DDE0E6"/>
             </a:solidFill>
             <a:prstDash val="solid"/>
           </a:ln>
@@ -19229,7 +19229,7 @@
             <a:avLst/>
           </a:prstGeom>
           <a:solidFill>
-            <a:srgbClr val="D62828"/>
+            <a:srgbClr val="C8161D"/>
           </a:solidFill>
           <a:ln/>
         </p:spPr>
@@ -19249,11 +19249,11 @@
             <a:avLst/>
           </a:prstGeom>
           <a:solidFill>
-            <a:srgbClr val="0A0A0A"/>
+            <a:srgbClr val="F5F6F8"/>
           </a:solidFill>
           <a:ln w="9525">
             <a:solidFill>
-              <a:srgbClr val="2E2E2E"/>
+              <a:srgbClr val="DDE0E6"/>
             </a:solidFill>
             <a:prstDash val="solid"/>
           </a:ln>
@@ -19286,11 +19286,11 @@
             <a:r>
               <a:rPr lang="en-US" sz="1300" b="1" dirty="0">
                 <a:solidFill>
-                  <a:srgbClr val="F5F5F0"/>
-                </a:solidFill>
-                <a:latin typeface="Arial" pitchFamily="34" charset="0"/>
-                <a:ea typeface="Arial" pitchFamily="34" charset="-122"/>
-                <a:cs typeface="Arial" pitchFamily="34" charset="-120"/>
+                  <a:srgbClr val="16181D"/>
+                </a:solidFill>
+                <a:latin typeface="Arial" pitchFamily="34" charset="0"/>
+                <a:ea typeface="BIZ UDPGothic" pitchFamily="34" charset="-122"/>
+                <a:cs typeface="BIZ UDPGothic" pitchFamily="34" charset="-120"/>
               </a:rPr>
               <a:t>年収2,000万円</a:t>
             </a:r>
@@ -19313,11 +19313,11 @@
             <a:avLst/>
           </a:prstGeom>
           <a:solidFill>
-            <a:srgbClr val="0A0A0A"/>
+            <a:srgbClr val="F5F6F8"/>
           </a:solidFill>
           <a:ln w="9525">
             <a:solidFill>
-              <a:srgbClr val="2E2E2E"/>
+              <a:srgbClr val="DDE0E6"/>
             </a:solidFill>
             <a:prstDash val="solid"/>
           </a:ln>
@@ -19350,11 +19350,11 @@
             <a:r>
               <a:rPr lang="en-US" sz="1300" dirty="0">
                 <a:solidFill>
-                  <a:srgbClr val="CCCCCC"/>
-                </a:solidFill>
-                <a:latin typeface="Arial" pitchFamily="34" charset="0"/>
-                <a:ea typeface="Arial" pitchFamily="34" charset="-122"/>
-                <a:cs typeface="Arial" pitchFamily="34" charset="-120"/>
+                  <a:srgbClr val="2B2F36"/>
+                </a:solidFill>
+                <a:latin typeface="Arial" pitchFamily="34" charset="0"/>
+                <a:ea typeface="BIZ UDPGothic" pitchFamily="34" charset="-122"/>
+                <a:cs typeface="BIZ UDPGothic" pitchFamily="34" charset="-120"/>
               </a:rPr>
               <a:t>約327.2万円</a:t>
             </a:r>
@@ -19377,11 +19377,11 @@
             <a:avLst/>
           </a:prstGeom>
           <a:solidFill>
-            <a:srgbClr val="2A1414"/>
+            <a:srgbClr val="FCEBEB"/>
           </a:solidFill>
           <a:ln w="19050">
             <a:solidFill>
-              <a:srgbClr val="D62828"/>
+              <a:srgbClr val="C8161D"/>
             </a:solidFill>
             <a:prstDash val="solid"/>
           </a:ln>
@@ -19414,11 +19414,11 @@
             <a:r>
               <a:rPr lang="en-US" sz="1400" b="1" dirty="0">
                 <a:solidFill>
-                  <a:srgbClr val="D62828"/>
-                </a:solidFill>
-                <a:latin typeface="Arial" pitchFamily="34" charset="0"/>
-                <a:ea typeface="Arial" pitchFamily="34" charset="-122"/>
-                <a:cs typeface="Arial" pitchFamily="34" charset="-120"/>
+                  <a:srgbClr val="C8161D"/>
+                </a:solidFill>
+                <a:latin typeface="Arial" pitchFamily="34" charset="0"/>
+                <a:ea typeface="BIZ UDPGothic" pitchFamily="34" charset="-122"/>
+                <a:cs typeface="BIZ UDPGothic" pitchFamily="34" charset="-120"/>
               </a:rPr>
               <a:t>約254.4万円</a:t>
             </a:r>
@@ -19441,11 +19441,11 @@
             <a:avLst/>
           </a:prstGeom>
           <a:solidFill>
-            <a:srgbClr val="0A0A0A"/>
+            <a:srgbClr val="F5F6F8"/>
           </a:solidFill>
           <a:ln w="9525">
             <a:solidFill>
-              <a:srgbClr val="2E2E2E"/>
+              <a:srgbClr val="DDE0E6"/>
             </a:solidFill>
             <a:prstDash val="solid"/>
           </a:ln>
@@ -19466,7 +19466,7 @@
             <a:avLst/>
           </a:prstGeom>
           <a:solidFill>
-            <a:srgbClr val="D62828"/>
+            <a:srgbClr val="C8161D"/>
           </a:solidFill>
           <a:ln/>
         </p:spPr>
@@ -19498,11 +19498,11 @@
             <a:r>
               <a:rPr lang="en-US" sz="1200" i="1" dirty="0">
                 <a:solidFill>
-                  <a:srgbClr val="999999"/>
-                </a:solidFill>
-                <a:latin typeface="Arial" pitchFamily="34" charset="0"/>
-                <a:ea typeface="Arial" pitchFamily="34" charset="-122"/>
-                <a:cs typeface="Arial" pitchFamily="34" charset="-120"/>
+                  <a:srgbClr val="4B515C"/>
+                </a:solidFill>
+                <a:latin typeface="Arial" pitchFamily="34" charset="0"/>
+                <a:ea typeface="BIZ UDPGothic" pitchFamily="34" charset="-122"/>
+                <a:cs typeface="BIZ UDPGothic" pitchFamily="34" charset="-120"/>
               </a:rPr>
               <a:t>寄付しなければ今まで通り累進課税のまま。寄付した場合のみ、税率が中央値水準まで下がります。</a:t>
             </a:r>
